--- a/assets/presentations/2026-07-12-sin-hacer-ruido.pptx
+++ b/assets/presentations/2026-07-12-sin-hacer-ruido.pptx
@@ -1,24 +1,24 @@
 
 <file path=ppt/presentation.xml><?xml version="1.0" encoding="utf-8"?>
-<p:presentation xmlns:a="http://schemas.openxmlformats.org/drawingml/2006/main" xmlns:r="http://schemas.openxmlformats.org/officeDocument/2006/relationships" xmlns:p="http://schemas.openxmlformats.org/presentationml/2006/main">
+<p:presentation xmlns:p="http://schemas.openxmlformats.org/presentationml/2006/main">
   <p:sldMasterIdLst>
-    <p:sldMasterId id="2147483648" r:id="rId1"/>
+    <p:sldMasterId xmlns:r="http://schemas.openxmlformats.org/officeDocument/2006/relationships" id="2147483648" r:id="Rd2ce3b116f5446d5"/>
   </p:sldMasterIdLst>
   <p:notesMasterIdLst>
-    <p:notesMasterId r:id="rId5"/>
+    <p:notesMasterId xmlns:r="http://schemas.openxmlformats.org/officeDocument/2006/relationships" r:id="R599fb3978b5c474a"/>
   </p:notesMasterIdLst>
   <p:sldIdLst>
-    <p:sldId id="256" r:id="rId2"/>
-    <p:sldId id="257" r:id="rId3"/>
-    <p:sldId id="258" r:id="rId4"/>
+    <p:sldId xmlns:r="http://schemas.openxmlformats.org/officeDocument/2006/relationships" id="256" r:id="Redc2d9bd55ad4276"/>
+    <p:sldId xmlns:r="http://schemas.openxmlformats.org/officeDocument/2006/relationships" id="257" r:id="Rfcd12d93bc4546ae"/>
+    <p:sldId xmlns:r="http://schemas.openxmlformats.org/officeDocument/2006/relationships" id="258" r:id="Rdd27fc53083c41ea"/>
   </p:sldIdLst>
   <p:sldSz cx="12192000" cy="6858000"/>
   <p:notesSz cx="6858000" cy="9144000"/>
   <p:defaultTextStyle>
-    <a:defPPr>
+    <a:defPPr xmlns:a="http://schemas.openxmlformats.org/drawingml/2006/main">
       <a:defRPr lang="en-US"/>
     </a:defPPr>
-    <a:lvl1pPr marL="0" indent="0" algn="l" defTabSz="914400">
+    <a:lvl1pPr xmlns:a="http://schemas.openxmlformats.org/drawingml/2006/main" marL="0" indent="0" algn="l" defTabSz="914400">
       <a:defRPr sz="1800" kern="1200">
         <a:solidFill>
           <a:schemeClr val="tx1"/>
@@ -28,7 +28,7 @@
         <a:cs typeface="+mn-cs"/>
       </a:defRPr>
     </a:lvl1pPr>
-    <a:lvl2pPr marL="457200" indent="0" algn="l" defTabSz="914400">
+    <a:lvl2pPr xmlns:a="http://schemas.openxmlformats.org/drawingml/2006/main" marL="457200" indent="0" algn="l" defTabSz="914400">
       <a:defRPr sz="1800" kern="1200">
         <a:solidFill>
           <a:schemeClr val="tx1"/>
@@ -38,7 +38,7 @@
         <a:cs typeface="+mn-cs"/>
       </a:defRPr>
     </a:lvl2pPr>
-    <a:lvl3pPr marL="914400" indent="0" algn="l" defTabSz="914400">
+    <a:lvl3pPr xmlns:a="http://schemas.openxmlformats.org/drawingml/2006/main" marL="914400" indent="0" algn="l" defTabSz="914400">
       <a:defRPr sz="1800" kern="1200">
         <a:solidFill>
           <a:schemeClr val="tx1"/>
@@ -48,7 +48,7 @@
         <a:cs typeface="+mn-cs"/>
       </a:defRPr>
     </a:lvl3pPr>
-    <a:lvl4pPr marL="1371600" indent="0" algn="l" defTabSz="914400">
+    <a:lvl4pPr xmlns:a="http://schemas.openxmlformats.org/drawingml/2006/main" marL="1371600" indent="0" algn="l" defTabSz="914400">
       <a:defRPr sz="1800" kern="1200">
         <a:solidFill>
           <a:schemeClr val="tx1"/>
@@ -58,7 +58,7 @@
         <a:cs typeface="+mn-cs"/>
       </a:defRPr>
     </a:lvl4pPr>
-    <a:lvl5pPr marL="1828800" indent="0" algn="l" defTabSz="914400">
+    <a:lvl5pPr xmlns:a="http://schemas.openxmlformats.org/drawingml/2006/main" marL="1828800" indent="0" algn="l" defTabSz="914400">
       <a:defRPr sz="1800" kern="1200">
         <a:solidFill>
           <a:schemeClr val="tx1"/>
@@ -68,7 +68,7 @@
         <a:cs typeface="+mn-cs"/>
       </a:defRPr>
     </a:lvl5pPr>
-    <a:lvl6pPr marL="2286000" indent="0" algn="l" defTabSz="914400">
+    <a:lvl6pPr xmlns:a="http://schemas.openxmlformats.org/drawingml/2006/main" marL="2286000" indent="0" algn="l" defTabSz="914400">
       <a:defRPr sz="1800" kern="1200">
         <a:solidFill>
           <a:schemeClr val="tx1"/>
@@ -78,7 +78,7 @@
         <a:cs typeface="+mn-cs"/>
       </a:defRPr>
     </a:lvl6pPr>
-    <a:lvl7pPr marL="2743200" indent="0" algn="l" defTabSz="914400">
+    <a:lvl7pPr xmlns:a="http://schemas.openxmlformats.org/drawingml/2006/main" marL="2743200" indent="0" algn="l" defTabSz="914400">
       <a:defRPr sz="1800" kern="1200">
         <a:solidFill>
           <a:schemeClr val="tx1"/>
@@ -88,7 +88,7 @@
         <a:cs typeface="+mn-cs"/>
       </a:defRPr>
     </a:lvl7pPr>
-    <a:lvl8pPr marL="3200400" indent="0" algn="l" defTabSz="914400">
+    <a:lvl8pPr xmlns:a="http://schemas.openxmlformats.org/drawingml/2006/main" marL="3200400" indent="0" algn="l" defTabSz="914400">
       <a:defRPr sz="1800" kern="1200">
         <a:solidFill>
           <a:schemeClr val="tx1"/>
@@ -98,7 +98,7 @@
         <a:cs typeface="+mn-cs"/>
       </a:defRPr>
     </a:lvl8pPr>
-    <a:lvl9pPr marL="3657600" indent="0" algn="l" defTabSz="914400">
+    <a:lvl9pPr xmlns:a="http://schemas.openxmlformats.org/drawingml/2006/main" marL="3657600" indent="0" algn="l" defTabSz="914400">
       <a:defRPr sz="1800" kern="1200">
         <a:solidFill>
           <a:schemeClr val="tx1"/>
@@ -113,11 +113,11 @@
 </file>
 
 <file path=ppt/notesMasters/notesMaster1.xml><?xml version="1.0" encoding="utf-8"?>
-<p:notesMaster xmlns:a="http://schemas.openxmlformats.org/drawingml/2006/main" xmlns:r="http://schemas.openxmlformats.org/officeDocument/2006/relationships" xmlns:p="http://schemas.openxmlformats.org/presentationml/2006/main">
+<p:notesMaster xmlns:p="http://schemas.openxmlformats.org/presentationml/2006/main">
   <p:cSld>
     <p:bg>
       <p:bgRef idx="1001">
-        <a:schemeClr val="bg1"/>
+        <a:schemeClr xmlns:a="http://schemas.openxmlformats.org/drawingml/2006/main" val="bg1"/>
       </p:bgRef>
     </p:bg>
     <p:spTree>
@@ -127,164 +127,380 @@
         <p:nvPr/>
       </p:nvGrpSpPr>
       <p:grpSpPr>
-        <a:xfrm>
-          <a:off x="0" y="0"/>
-          <a:ext cx="0" cy="0"/>
-          <a:chOff x="0" y="0"/>
-          <a:chExt cx="0" cy="0"/>
-        </a:xfrm>
+        <a:xfrm xmlns:a="http://schemas.openxmlformats.org/drawingml/2006/main"/>
       </p:grpSpPr>
       <p:sp>
         <p:nvSpPr>
           <p:cNvPr id="2" name="Header Placeholder"/>
-          <p:cNvSpPr>
-            <a:spLocks noGrp="1"/>
-          </p:cNvSpPr>
+          <p:cNvSpPr/>
           <p:nvPr>
             <p:ph type="hdr" sz="quarter"/>
           </p:nvPr>
         </p:nvSpPr>
         <p:spPr>
-          <a:prstGeom prst="rect">
-            <a:avLst/>
-          </a:prstGeom>
-        </p:spPr>
-        <p:txBody>
-          <a:bodyPr/>
-          <a:lstStyle/>
-          <a:p>
-            <a:endParaRPr/>
-          </a:p>
+          <a:prstGeom xmlns:a="http://schemas.openxmlformats.org/drawingml/2006/main" prst="rect">
+            <a:avLst/>
+          </a:prstGeom>
+        </p:spPr>
+        <p:txBody>
+          <a:bodyPr xmlns:a="http://schemas.openxmlformats.org/drawingml/2006/main"/>
+          <a:lstStyle xmlns:a="http://schemas.openxmlformats.org/drawingml/2006/main"/>
+          <a:p xmlns:a="http://schemas.openxmlformats.org/drawingml/2006/main"/>
         </p:txBody>
       </p:sp>
       <p:sp>
         <p:nvSpPr>
           <p:cNvPr id="3" name="Date Placeholder"/>
-          <p:cNvSpPr>
-            <a:spLocks noGrp="1"/>
-          </p:cNvSpPr>
+          <p:cNvSpPr/>
           <p:nvPr>
             <p:ph type="dt" sz="quarter" idx="1"/>
           </p:nvPr>
         </p:nvSpPr>
         <p:spPr>
-          <a:prstGeom prst="rect">
-            <a:avLst/>
-          </a:prstGeom>
-        </p:spPr>
-        <p:txBody>
-          <a:bodyPr/>
-          <a:lstStyle/>
-          <a:p>
-            <a:endParaRPr/>
-          </a:p>
+          <a:prstGeom xmlns:a="http://schemas.openxmlformats.org/drawingml/2006/main" prst="rect">
+            <a:avLst/>
+          </a:prstGeom>
+        </p:spPr>
+        <p:txBody>
+          <a:bodyPr xmlns:a="http://schemas.openxmlformats.org/drawingml/2006/main"/>
+          <a:lstStyle xmlns:a="http://schemas.openxmlformats.org/drawingml/2006/main"/>
+          <a:p xmlns:a="http://schemas.openxmlformats.org/drawingml/2006/main"/>
         </p:txBody>
       </p:sp>
       <p:sp>
         <p:nvSpPr>
           <p:cNvPr id="4" name="Slide Image Placeholder"/>
-          <p:cNvSpPr>
-            <a:spLocks noGrp="1" noRot="1" noChangeAspect="1"/>
-          </p:cNvSpPr>
+          <p:cNvSpPr/>
           <p:nvPr>
             <p:ph type="sldImg" idx="2"/>
           </p:nvPr>
         </p:nvSpPr>
         <p:spPr>
-          <a:prstGeom prst="rect">
-            <a:avLst/>
-          </a:prstGeom>
-        </p:spPr>
-        <p:txBody>
-          <a:bodyPr/>
-          <a:lstStyle/>
-          <a:p>
-            <a:endParaRPr/>
-          </a:p>
+          <a:prstGeom xmlns:a="http://schemas.openxmlformats.org/drawingml/2006/main" prst="rect">
+            <a:avLst/>
+          </a:prstGeom>
+        </p:spPr>
+        <p:txBody>
+          <a:bodyPr xmlns:a="http://schemas.openxmlformats.org/drawingml/2006/main"/>
+          <a:lstStyle xmlns:a="http://schemas.openxmlformats.org/drawingml/2006/main"/>
+          <a:p xmlns:a="http://schemas.openxmlformats.org/drawingml/2006/main"/>
         </p:txBody>
       </p:sp>
       <p:sp>
         <p:nvSpPr>
           <p:cNvPr id="5" name="Notes Placeholder"/>
-          <p:cNvSpPr>
-            <a:spLocks noGrp="1"/>
-          </p:cNvSpPr>
+          <p:cNvSpPr/>
           <p:nvPr>
             <p:ph type="body" sz="quarter" idx="3"/>
           </p:nvPr>
         </p:nvSpPr>
         <p:spPr>
-          <a:prstGeom prst="rect">
-            <a:avLst/>
-          </a:prstGeom>
-        </p:spPr>
-        <p:txBody>
-          <a:bodyPr/>
-          <a:lstStyle/>
-          <a:p>
-            <a:endParaRPr/>
-          </a:p>
+          <a:prstGeom xmlns:a="http://schemas.openxmlformats.org/drawingml/2006/main" prst="rect">
+            <a:avLst/>
+          </a:prstGeom>
+        </p:spPr>
+        <p:txBody>
+          <a:bodyPr xmlns:a="http://schemas.openxmlformats.org/drawingml/2006/main"/>
+          <a:lstStyle xmlns:a="http://schemas.openxmlformats.org/drawingml/2006/main"/>
+          <a:p xmlns:a="http://schemas.openxmlformats.org/drawingml/2006/main"/>
         </p:txBody>
       </p:sp>
       <p:sp>
         <p:nvSpPr>
           <p:cNvPr id="6" name="Footer Placeholder"/>
-          <p:cNvSpPr>
-            <a:spLocks noGrp="1"/>
-          </p:cNvSpPr>
+          <p:cNvSpPr/>
           <p:nvPr>
             <p:ph type="ftr" sz="quarter" idx="4"/>
           </p:nvPr>
         </p:nvSpPr>
         <p:spPr>
-          <a:prstGeom prst="rect">
-            <a:avLst/>
-          </a:prstGeom>
-        </p:spPr>
-        <p:txBody>
-          <a:bodyPr/>
-          <a:lstStyle/>
-          <a:p>
-            <a:endParaRPr/>
-          </a:p>
+          <a:prstGeom xmlns:a="http://schemas.openxmlformats.org/drawingml/2006/main" prst="rect">
+            <a:avLst/>
+          </a:prstGeom>
+        </p:spPr>
+        <p:txBody>
+          <a:bodyPr xmlns:a="http://schemas.openxmlformats.org/drawingml/2006/main"/>
+          <a:lstStyle xmlns:a="http://schemas.openxmlformats.org/drawingml/2006/main"/>
+          <a:p xmlns:a="http://schemas.openxmlformats.org/drawingml/2006/main"/>
         </p:txBody>
       </p:sp>
       <p:sp>
         <p:nvSpPr>
           <p:cNvPr id="7" name="Slide Number Placeholder"/>
-          <p:cNvSpPr>
-            <a:spLocks noGrp="1"/>
-          </p:cNvSpPr>
+          <p:cNvSpPr/>
           <p:nvPr>
             <p:ph type="sldNum" sz="quarter" idx="5"/>
           </p:nvPr>
         </p:nvSpPr>
         <p:spPr>
-          <a:prstGeom prst="rect">
-            <a:avLst/>
-          </a:prstGeom>
-        </p:spPr>
-        <p:txBody>
-          <a:bodyPr/>
-          <a:lstStyle/>
-          <a:p>
-            <a:endParaRPr/>
-          </a:p>
+          <a:prstGeom xmlns:a="http://schemas.openxmlformats.org/drawingml/2006/main" prst="rect">
+            <a:avLst/>
+          </a:prstGeom>
+        </p:spPr>
+        <p:txBody>
+          <a:bodyPr xmlns:a="http://schemas.openxmlformats.org/drawingml/2006/main"/>
+          <a:lstStyle xmlns:a="http://schemas.openxmlformats.org/drawingml/2006/main"/>
+          <a:p xmlns:a="http://schemas.openxmlformats.org/drawingml/2006/main"/>
         </p:txBody>
       </p:sp>
     </p:spTree>
   </p:cSld>
   <p:clrMap bg1="lt1" tx1="dk1" bg2="lt2" tx2="dk2" accent1="accent1" accent2="accent2" accent3="accent3" accent4="accent4" accent5="accent5" accent6="accent6" hlink="hlink" folHlink="folHlink"/>
   <p:notesStyle>
-    <a:lvl1pPr marL="0" algn="l" defTabSz="914400" rtl="0" eaLnBrk="1" latinLnBrk="0" hangingPunct="1">
+    <a:lvl1pPr xmlns:a="http://schemas.openxmlformats.org/drawingml/2006/main" marL="0" algn="l" defTabSz="914400" rtl="0" eaLnBrk="1" latinLnBrk="0" hangingPunct="1">
       <a:defRPr sz="1200" kern="1200"/>
     </a:lvl1pPr>
   </p:notesStyle>
 </p:notesMaster>
 </file>
 
+<file path=ppt/notesMasters/theme/theme3.xml><?xml version="1.0" encoding="utf-8"?>
+<a:theme xmlns:a="http://schemas.openxmlformats.org/drawingml/2006/main" name="ChatGPT">
+  <a:themeElements>
+    <a:clrScheme name="ChatGPT">
+      <a:dk1>
+        <a:srgbClr val="000000"/>
+      </a:dk1>
+      <a:lt1>
+        <a:srgbClr val="FFFFFF"/>
+      </a:lt1>
+      <a:dk2>
+        <a:srgbClr val="0E2841"/>
+      </a:dk2>
+      <a:lt2>
+        <a:srgbClr val="E8E8E8"/>
+      </a:lt2>
+      <a:accent1>
+        <a:srgbClr val="156082"/>
+      </a:accent1>
+      <a:accent2>
+        <a:srgbClr val="E97132"/>
+      </a:accent2>
+      <a:accent3>
+        <a:srgbClr val="196B24"/>
+      </a:accent3>
+      <a:accent4>
+        <a:srgbClr val="0F9ED5"/>
+      </a:accent4>
+      <a:accent5>
+        <a:srgbClr val="A02B93"/>
+      </a:accent5>
+      <a:accent6>
+        <a:srgbClr val="4EA72E"/>
+      </a:accent6>
+      <a:hlink>
+        <a:srgbClr val="467886"/>
+      </a:hlink>
+      <a:folHlink>
+        <a:srgbClr val="96607D"/>
+      </a:folHlink>
+    </a:clrScheme>
+    <a:fontScheme name="Office">
+      <a:majorFont>
+        <a:latin typeface="Calibri Light"/>
+        <a:ea typeface="Calibri Light"/>
+        <a:cs typeface="Calibri Light"/>
+      </a:majorFont>
+      <a:minorFont>
+        <a:latin typeface="Calibri"/>
+        <a:ea typeface="Calibri"/>
+        <a:cs typeface="Calibri"/>
+      </a:minorFont>
+    </a:fontScheme>
+    <a:fmtScheme name="ChatGPT">
+      <a:fillStyleLst>
+        <a:solidFill>
+          <a:schemeClr val="phClr"/>
+        </a:solidFill>
+        <a:gradFill>
+          <a:gsLst>
+            <a:gs pos="0">
+              <a:schemeClr val="phClr">
+                <a:tint val="67000"/>
+                <a:lumMod val="110000"/>
+                <a:satMod val="105000"/>
+              </a:schemeClr>
+            </a:gs>
+            <a:gs pos="50000">
+              <a:schemeClr val="phClr">
+                <a:tint val="73000"/>
+                <a:lumMod val="105000"/>
+                <a:satMod val="103000"/>
+              </a:schemeClr>
+            </a:gs>
+            <a:gs pos="100000">
+              <a:schemeClr val="phClr">
+                <a:tint val="81000"/>
+                <a:lumMod val="105000"/>
+                <a:satMod val="109000"/>
+              </a:schemeClr>
+            </a:gs>
+          </a:gsLst>
+          <a:lin ang="5400000" scaled="0"/>
+        </a:gradFill>
+        <a:gradFill>
+          <a:gsLst>
+            <a:gs pos="0">
+              <a:schemeClr val="phClr">
+                <a:tint val="94000"/>
+                <a:lumMod val="102000"/>
+                <a:satMod val="103000"/>
+              </a:schemeClr>
+            </a:gs>
+            <a:gs pos="50000">
+              <a:schemeClr val="phClr">
+                <a:shade val="100000"/>
+                <a:lumMod val="100000"/>
+                <a:satMod val="110000"/>
+              </a:schemeClr>
+            </a:gs>
+            <a:gs pos="100000">
+              <a:schemeClr val="phClr">
+                <a:shade val="78000"/>
+                <a:lumMod val="99000"/>
+                <a:satMod val="120000"/>
+              </a:schemeClr>
+            </a:gs>
+          </a:gsLst>
+          <a:lin ang="5400000" scaled="0"/>
+        </a:gradFill>
+      </a:fillStyleLst>
+      <a:lnStyleLst>
+        <a:ln w="12700">
+          <a:solidFill>
+            <a:schemeClr val="phClr"/>
+          </a:solidFill>
+          <a:prstDash val="solid"/>
+        </a:ln>
+        <a:ln w="19050">
+          <a:solidFill>
+            <a:schemeClr val="phClr"/>
+          </a:solidFill>
+          <a:prstDash val="solid"/>
+        </a:ln>
+        <a:ln w="25400">
+          <a:solidFill>
+            <a:schemeClr val="phClr"/>
+          </a:solidFill>
+          <a:prstDash val="solid"/>
+        </a:ln>
+      </a:lnStyleLst>
+      <a:effectStyleLst>
+        <a:effectStyle>
+          <a:effectLst/>
+        </a:effectStyle>
+        <a:effectStyle>
+          <a:effectLst/>
+        </a:effectStyle>
+        <a:effectStyle>
+          <a:effectLst>
+            <a:outerShdw blurRad="57150" dist="19050" dir="5400000">
+              <a:srgbClr val="000000">
+                <a:alpha val="16000"/>
+              </a:srgbClr>
+            </a:outerShdw>
+          </a:effectLst>
+        </a:effectStyle>
+        <a:effectStyle>
+          <a:effectLst>
+            <a:outerShdw blurRad="19050" dist="9525" dir="5400000">
+              <a:srgbClr val="000000">
+                <a:alpha val="6000"/>
+              </a:srgbClr>
+            </a:outerShdw>
+          </a:effectLst>
+        </a:effectStyle>
+        <a:effectStyle>
+          <a:effectLst>
+            <a:outerShdw blurRad="28575" dist="9525" dir="5400000">
+              <a:srgbClr val="000000">
+                <a:alpha val="8000"/>
+              </a:srgbClr>
+            </a:outerShdw>
+          </a:effectLst>
+        </a:effectStyle>
+        <a:effectStyle>
+          <a:effectLst>
+            <a:outerShdw blurRad="57150" dist="19050" dir="5400000">
+              <a:srgbClr val="000000">
+                <a:alpha val="10000"/>
+              </a:srgbClr>
+            </a:outerShdw>
+          </a:effectLst>
+        </a:effectStyle>
+        <a:effectStyle>
+          <a:effectLst>
+            <a:outerShdw blurRad="114300" dist="38100" dir="5400000">
+              <a:srgbClr val="000000">
+                <a:alpha val="12000"/>
+              </a:srgbClr>
+            </a:outerShdw>
+          </a:effectLst>
+        </a:effectStyle>
+        <a:effectStyle>
+          <a:effectLst>
+            <a:outerShdw blurRad="171450" dist="57150" dir="5400000">
+              <a:srgbClr val="000000">
+                <a:alpha val="16000"/>
+              </a:srgbClr>
+            </a:outerShdw>
+          </a:effectLst>
+        </a:effectStyle>
+        <a:effectStyle>
+          <a:effectLst>
+            <a:outerShdw blurRad="266700" dist="95250" dir="5400000">
+              <a:srgbClr val="000000">
+                <a:alpha val="24000"/>
+              </a:srgbClr>
+            </a:outerShdw>
+          </a:effectLst>
+        </a:effectStyle>
+      </a:effectStyleLst>
+      <a:bgFillStyleLst>
+        <a:solidFill>
+          <a:schemeClr val="phClr"/>
+        </a:solidFill>
+        <a:solidFill>
+          <a:schemeClr val="phClr">
+            <a:tint val="95000"/>
+            <a:satMod val="170000"/>
+          </a:schemeClr>
+        </a:solidFill>
+        <a:gradFill>
+          <a:gsLst>
+            <a:gs pos="0">
+              <a:schemeClr val="phClr">
+                <a:tint val="93000"/>
+                <a:shade val="98000"/>
+                <a:lumMod val="102000"/>
+                <a:satMod val="150000"/>
+              </a:schemeClr>
+            </a:gs>
+            <a:gs pos="50000">
+              <a:schemeClr val="phClr">
+                <a:tint val="98000"/>
+                <a:shade val="90000"/>
+                <a:lumMod val="103000"/>
+                <a:satMod val="130000"/>
+              </a:schemeClr>
+            </a:gs>
+            <a:gs pos="100000">
+              <a:schemeClr val="phClr">
+                <a:shade val="63000"/>
+                <a:satMod val="120000"/>
+              </a:schemeClr>
+            </a:gs>
+          </a:gsLst>
+          <a:lin ang="5400000" scaled="0"/>
+        </a:gradFill>
+      </a:bgFillStyleLst>
+    </a:fmtScheme>
+  </a:themeElements>
+</a:theme>
+</file>
+
 <file path=ppt/notesSlides/notesSlide1.xml><?xml version="1.0" encoding="utf-8"?>
-<p:notes xmlns:a="http://schemas.openxmlformats.org/drawingml/2006/main" xmlns:r="http://schemas.openxmlformats.org/officeDocument/2006/relationships" xmlns:p="http://schemas.openxmlformats.org/presentationml/2006/main">
+<p:notes xmlns:p="http://schemas.openxmlformats.org/presentationml/2006/main">
   <p:cSld>
     <p:spTree>
       <p:nvGrpSpPr>
@@ -293,21 +509,16 @@
         <p:nvPr/>
       </p:nvGrpSpPr>
       <p:grpSpPr>
-        <a:xfrm>
-          <a:off x="0" y="0"/>
-          <a:ext cx="0" cy="0"/>
-          <a:chOff x="0" y="0"/>
-          <a:chExt cx="0" cy="0"/>
-        </a:xfrm>
+        <a:xfrm xmlns:a="http://schemas.openxmlformats.org/drawingml/2006/main"/>
       </p:grpSpPr>
       <p:sp>
         <p:nvSpPr>
           <p:cNvPr id="2" name="Slide Image Placeholder 1"/>
           <p:cNvSpPr>
-            <a:spLocks noGrp="1" noRot="1" noChangeAspect="1"/>
+            <a:spLocks xmlns:a="http://schemas.openxmlformats.org/drawingml/2006/main" noGrp="1"/>
           </p:cNvSpPr>
           <p:nvPr>
-            <p:ph type="sldImg"/>
+            <p:ph type="sldImg" idx="0"/>
           </p:nvPr>
         </p:nvSpPr>
         <p:spPr/>
@@ -316,7 +527,7 @@
         <p:nvSpPr>
           <p:cNvPr id="3" name="Notes Placeholder 2"/>
           <p:cNvSpPr>
-            <a:spLocks noGrp="1"/>
+            <a:spLocks xmlns:a="http://schemas.openxmlformats.org/drawingml/2006/main" noGrp="1"/>
           </p:cNvSpPr>
           <p:nvPr>
             <p:ph type="body" idx="1"/>
@@ -324,9 +535,9 @@
         </p:nvSpPr>
         <p:spPr/>
         <p:txBody>
-          <a:bodyPr/>
-          <a:lstStyle/>
-          <a:p>
+          <a:bodyPr xmlns:a="http://schemas.openxmlformats.org/drawingml/2006/main"/>
+          <a:lstStyle xmlns:a="http://schemas.openxmlformats.org/drawingml/2006/main"/>
+          <a:p xmlns:a="http://schemas.openxmlformats.org/drawingml/2006/main">
             <a:r>
               <a:t>Lectura del mapa: comenzar por el límite de nuestra mirada; subrayar la iniciativa de Dios; detenerse en el silencio fecundo; presentar la conversión como disponibilidad; terminar en el fruto común. Idea nuclear: la gracia precede a nuestra percepción y a nuestra respuesta.</a:t>
             </a:r>
@@ -337,7 +548,7 @@
         <p:nvSpPr>
           <p:cNvPr id="4" name="Slide Number Placeholder 3"/>
           <p:cNvSpPr>
-            <a:spLocks noGrp="1"/>
+            <a:spLocks xmlns:a="http://schemas.openxmlformats.org/drawingml/2006/main" noGrp="1"/>
           </p:cNvSpPr>
           <p:nvPr>
             <p:ph type="sldNum" idx="5"/>
@@ -345,23 +556,21 @@
         </p:nvSpPr>
         <p:spPr/>
         <p:txBody>
-          <a:bodyPr/>
-          <a:lstStyle/>
-          <a:p>
-            <a:endParaRPr/>
-          </a:p>
+          <a:bodyPr xmlns:a="http://schemas.openxmlformats.org/drawingml/2006/main"/>
+          <a:lstStyle xmlns:a="http://schemas.openxmlformats.org/drawingml/2006/main"/>
+          <a:p xmlns:a="http://schemas.openxmlformats.org/drawingml/2006/main"/>
         </p:txBody>
       </p:sp>
     </p:spTree>
   </p:cSld>
   <p:clrMapOvr>
-    <a:masterClrMapping/>
+    <a:masterClrMapping xmlns:a="http://schemas.openxmlformats.org/drawingml/2006/main"/>
   </p:clrMapOvr>
 </p:notes>
 </file>
 
 <file path=ppt/notesSlides/notesSlide2.xml><?xml version="1.0" encoding="utf-8"?>
-<p:notes xmlns:a="http://schemas.openxmlformats.org/drawingml/2006/main" xmlns:r="http://schemas.openxmlformats.org/officeDocument/2006/relationships" xmlns:p="http://schemas.openxmlformats.org/presentationml/2006/main">
+<p:notes xmlns:p="http://schemas.openxmlformats.org/presentationml/2006/main">
   <p:cSld>
     <p:spTree>
       <p:nvGrpSpPr>
@@ -370,21 +579,16 @@
         <p:nvPr/>
       </p:nvGrpSpPr>
       <p:grpSpPr>
-        <a:xfrm>
-          <a:off x="0" y="0"/>
-          <a:ext cx="0" cy="0"/>
-          <a:chOff x="0" y="0"/>
-          <a:chExt cx="0" cy="0"/>
-        </a:xfrm>
+        <a:xfrm xmlns:a="http://schemas.openxmlformats.org/drawingml/2006/main"/>
       </p:grpSpPr>
       <p:sp>
         <p:nvSpPr>
           <p:cNvPr id="2" name="Slide Image Placeholder 1"/>
           <p:cNvSpPr>
-            <a:spLocks noGrp="1" noRot="1" noChangeAspect="1"/>
+            <a:spLocks xmlns:a="http://schemas.openxmlformats.org/drawingml/2006/main" noGrp="1"/>
           </p:cNvSpPr>
           <p:nvPr>
-            <p:ph type="sldImg"/>
+            <p:ph type="sldImg" idx="0"/>
           </p:nvPr>
         </p:nvSpPr>
         <p:spPr/>
@@ -393,7 +597,7 @@
         <p:nvSpPr>
           <p:cNvPr id="3" name="Notes Placeholder 2"/>
           <p:cNvSpPr>
-            <a:spLocks noGrp="1"/>
+            <a:spLocks xmlns:a="http://schemas.openxmlformats.org/drawingml/2006/main" noGrp="1"/>
           </p:cNvSpPr>
           <p:nvPr>
             <p:ph type="body" idx="1"/>
@@ -401,9 +605,9 @@
         </p:nvSpPr>
         <p:spPr/>
         <p:txBody>
-          <a:bodyPr/>
-          <a:lstStyle/>
-          <a:p>
+          <a:bodyPr xmlns:a="http://schemas.openxmlformats.org/drawingml/2006/main"/>
+          <a:lstStyle xmlns:a="http://schemas.openxmlformats.org/drawingml/2006/main"/>
+          <a:p xmlns:a="http://schemas.openxmlformats.org/drawingml/2006/main">
             <a:r>
               <a:t>No es necesario leer los cuatro textos completos. Puede asignarse uno a cada pareja o subgrupo. Al volver, pedir que cada grupo formule en una frase qué revela su texto sobre la manera de actuar de Dios.</a:t>
             </a:r>
@@ -414,7 +618,7 @@
         <p:nvSpPr>
           <p:cNvPr id="4" name="Slide Number Placeholder 3"/>
           <p:cNvSpPr>
-            <a:spLocks noGrp="1"/>
+            <a:spLocks xmlns:a="http://schemas.openxmlformats.org/drawingml/2006/main" noGrp="1"/>
           </p:cNvSpPr>
           <p:nvPr>
             <p:ph type="sldNum" idx="5"/>
@@ -422,23 +626,21 @@
         </p:nvSpPr>
         <p:spPr/>
         <p:txBody>
-          <a:bodyPr/>
-          <a:lstStyle/>
-          <a:p>
-            <a:endParaRPr/>
-          </a:p>
+          <a:bodyPr xmlns:a="http://schemas.openxmlformats.org/drawingml/2006/main"/>
+          <a:lstStyle xmlns:a="http://schemas.openxmlformats.org/drawingml/2006/main"/>
+          <a:p xmlns:a="http://schemas.openxmlformats.org/drawingml/2006/main"/>
         </p:txBody>
       </p:sp>
     </p:spTree>
   </p:cSld>
   <p:clrMapOvr>
-    <a:masterClrMapping/>
+    <a:masterClrMapping xmlns:a="http://schemas.openxmlformats.org/drawingml/2006/main"/>
   </p:clrMapOvr>
 </p:notes>
 </file>
 
 <file path=ppt/notesSlides/notesSlide3.xml><?xml version="1.0" encoding="utf-8"?>
-<p:notes xmlns:a="http://schemas.openxmlformats.org/drawingml/2006/main" xmlns:r="http://schemas.openxmlformats.org/officeDocument/2006/relationships" xmlns:p="http://schemas.openxmlformats.org/presentationml/2006/main">
+<p:notes xmlns:p="http://schemas.openxmlformats.org/presentationml/2006/main">
   <p:cSld>
     <p:spTree>
       <p:nvGrpSpPr>
@@ -447,21 +649,16 @@
         <p:nvPr/>
       </p:nvGrpSpPr>
       <p:grpSpPr>
-        <a:xfrm>
-          <a:off x="0" y="0"/>
-          <a:ext cx="0" cy="0"/>
-          <a:chOff x="0" y="0"/>
-          <a:chExt cx="0" cy="0"/>
-        </a:xfrm>
+        <a:xfrm xmlns:a="http://schemas.openxmlformats.org/drawingml/2006/main"/>
       </p:grpSpPr>
       <p:sp>
         <p:nvSpPr>
           <p:cNvPr id="2" name="Slide Image Placeholder 1"/>
           <p:cNvSpPr>
-            <a:spLocks noGrp="1" noRot="1" noChangeAspect="1"/>
+            <a:spLocks xmlns:a="http://schemas.openxmlformats.org/drawingml/2006/main" noGrp="1"/>
           </p:cNvSpPr>
           <p:nvPr>
-            <p:ph type="sldImg"/>
+            <p:ph type="sldImg" idx="0"/>
           </p:nvPr>
         </p:nvSpPr>
         <p:spPr/>
@@ -470,7 +667,7 @@
         <p:nvSpPr>
           <p:cNvPr id="3" name="Notes Placeholder 2"/>
           <p:cNvSpPr>
-            <a:spLocks noGrp="1"/>
+            <a:spLocks xmlns:a="http://schemas.openxmlformats.org/drawingml/2006/main" noGrp="1"/>
           </p:cNvSpPr>
           <p:nvPr>
             <p:ph type="body" idx="1"/>
@@ -478,9 +675,9 @@
         </p:nvSpPr>
         <p:spPr/>
         <p:txBody>
-          <a:bodyPr/>
-          <a:lstStyle/>
-          <a:p>
+          <a:bodyPr xmlns:a="http://schemas.openxmlformats.org/drawingml/2006/main"/>
+          <a:lstStyle xmlns:a="http://schemas.openxmlformats.org/drawingml/2006/main"/>
+          <a:p xmlns:a="http://schemas.openxmlformats.org/drawingml/2006/main">
             <a:r>
               <a:t>Clima: acogedor y sin prisas. En el discernimiento conviene pedir que cada uno hable en primera persona. Evitar convertir las piedras o los miedos de otros en objeto de análisis. El compromiso final debe ser pequeño, verificable y comunitario.</a:t>
             </a:r>
@@ -491,7 +688,7 @@
         <p:nvSpPr>
           <p:cNvPr id="4" name="Slide Number Placeholder 3"/>
           <p:cNvSpPr>
-            <a:spLocks noGrp="1"/>
+            <a:spLocks xmlns:a="http://schemas.openxmlformats.org/drawingml/2006/main" noGrp="1"/>
           </p:cNvSpPr>
           <p:nvPr>
             <p:ph type="sldNum" idx="5"/>
@@ -499,23 +696,21 @@
         </p:nvSpPr>
         <p:spPr/>
         <p:txBody>
-          <a:bodyPr/>
-          <a:lstStyle/>
-          <a:p>
-            <a:endParaRPr/>
-          </a:p>
+          <a:bodyPr xmlns:a="http://schemas.openxmlformats.org/drawingml/2006/main"/>
+          <a:lstStyle xmlns:a="http://schemas.openxmlformats.org/drawingml/2006/main"/>
+          <a:p xmlns:a="http://schemas.openxmlformats.org/drawingml/2006/main"/>
         </p:txBody>
       </p:sp>
     </p:spTree>
   </p:cSld>
   <p:clrMapOvr>
-    <a:masterClrMapping/>
+    <a:masterClrMapping xmlns:a="http://schemas.openxmlformats.org/drawingml/2006/main"/>
   </p:clrMapOvr>
 </p:notes>
 </file>
 
 <file path=ppt/slideLayouts/slideLayout1.xml><?xml version="1.0" encoding="utf-8"?>
-<p:sldLayout xmlns:a="http://schemas.openxmlformats.org/drawingml/2006/main" xmlns:r="http://schemas.openxmlformats.org/officeDocument/2006/relationships" xmlns:p="http://schemas.openxmlformats.org/presentationml/2006/main" type="title">
+<p:sldLayout xmlns:p="http://schemas.openxmlformats.org/presentationml/2006/main" type="title">
   <p:cSld name="Title Slide">
     <p:spTree>
       <p:nvGrpSpPr>
@@ -524,27 +719,19 @@
         <p:nvPr/>
       </p:nvGrpSpPr>
       <p:grpSpPr>
-        <a:xfrm>
-          <a:off x="0" y="0"/>
-          <a:ext cx="0" cy="0"/>
-          <a:chOff x="0" y="0"/>
-          <a:chExt cx="0" cy="0"/>
-        </a:xfrm>
+        <a:xfrm xmlns:a="http://schemas.openxmlformats.org/drawingml/2006/main"/>
       </p:grpSpPr>
     </p:spTree>
   </p:cSld>
-  <p:clrMapOvr>
-    <a:masterClrMapping/>
-  </p:clrMapOvr>
 </p:sldLayout>
 </file>
 
 <file path=ppt/slideMasters/slideMaster1.xml><?xml version="1.0" encoding="utf-8"?>
-<p:sldMaster xmlns:a="http://schemas.openxmlformats.org/drawingml/2006/main" xmlns:r="http://schemas.openxmlformats.org/officeDocument/2006/relationships" xmlns:p="http://schemas.openxmlformats.org/presentationml/2006/main">
+<p:sldMaster xmlns:p="http://schemas.openxmlformats.org/presentationml/2006/main">
   <p:cSld name="Master">
     <p:bg>
       <p:bgRef idx="1001">
-        <a:schemeClr val="bg1"/>
+        <a:schemeClr xmlns:a="http://schemas.openxmlformats.org/drawingml/2006/main" val="bg1"/>
       </p:bgRef>
     </p:bg>
     <p:spTree>
@@ -554,22 +741,17 @@
         <p:nvPr/>
       </p:nvGrpSpPr>
       <p:grpSpPr>
-        <a:xfrm>
-          <a:off x="0" y="0"/>
-          <a:ext cx="0" cy="0"/>
-          <a:chOff x="0" y="0"/>
-          <a:chExt cx="0" cy="0"/>
-        </a:xfrm>
+        <a:xfrm xmlns:a="http://schemas.openxmlformats.org/drawingml/2006/main"/>
       </p:grpSpPr>
     </p:spTree>
   </p:cSld>
   <p:clrMap bg1="lt1" tx1="dk1" bg2="lt2" tx2="dk2" accent1="accent1" accent2="accent2" accent3="accent3" accent4="accent4" accent5="accent5" accent6="accent6" hlink="hlink" folHlink="folHlink"/>
   <p:sldLayoutIdLst>
-    <p:sldLayoutId id="2147483649" r:id="rId1"/>
+    <p:sldLayoutId xmlns:r="http://schemas.openxmlformats.org/officeDocument/2006/relationships" id="2147483649" r:id="R6e4fa9fa9ffa4d0d"/>
   </p:sldLayoutIdLst>
   <p:txStyles>
     <p:titleStyle>
-      <a:lvl1pPr algn="l">
+      <a:lvl1pPr xmlns:a="http://schemas.openxmlformats.org/drawingml/2006/main" algn="l">
         <a:lnSpc>
           <a:spcPct val="90000"/>
         </a:lnSpc>
@@ -588,7 +770,7 @@
       </a:lvl1pPr>
     </p:titleStyle>
     <p:bodyStyle>
-      <a:lvl1pPr marL="228600" indent="-228600" algn="l">
+      <a:lvl1pPr xmlns:a="http://schemas.openxmlformats.org/drawingml/2006/main" marL="228600" indent="-228600" algn="l">
         <a:lnSpc>
           <a:spcPct val="90000"/>
         </a:lnSpc>
@@ -605,7 +787,7 @@
           <a:cs typeface="+mn-lt"/>
         </a:defRPr>
       </a:lvl1pPr>
-      <a:lvl2pPr marL="685800" indent="-228600" algn="l">
+      <a:lvl2pPr xmlns:a="http://schemas.openxmlformats.org/drawingml/2006/main" marL="685800" indent="-228600" algn="l">
         <a:lnSpc>
           <a:spcPct val="90000"/>
         </a:lnSpc>
@@ -622,7 +804,7 @@
           <a:cs typeface="+mn-lt"/>
         </a:defRPr>
       </a:lvl2pPr>
-      <a:lvl3pPr marL="1143000" indent="-228600" algn="l">
+      <a:lvl3pPr xmlns:a="http://schemas.openxmlformats.org/drawingml/2006/main" marL="1143000" indent="-228600" algn="l">
         <a:lnSpc>
           <a:spcPct val="90000"/>
         </a:lnSpc>
@@ -639,7 +821,7 @@
           <a:cs typeface="+mn-lt"/>
         </a:defRPr>
       </a:lvl3pPr>
-      <a:lvl4pPr marL="1600200" indent="-228600" algn="l">
+      <a:lvl4pPr xmlns:a="http://schemas.openxmlformats.org/drawingml/2006/main" marL="1600200" indent="-228600" algn="l">
         <a:lnSpc>
           <a:spcPct val="90000"/>
         </a:lnSpc>
@@ -656,7 +838,7 @@
           <a:cs typeface="+mn-lt"/>
         </a:defRPr>
       </a:lvl4pPr>
-      <a:lvl5pPr marL="2057400" indent="-228600" algn="l">
+      <a:lvl5pPr xmlns:a="http://schemas.openxmlformats.org/drawingml/2006/main" marL="2057400" indent="-228600" algn="l">
         <a:lnSpc>
           <a:spcPct val="90000"/>
         </a:lnSpc>
@@ -673,7 +855,7 @@
           <a:cs typeface="+mn-lt"/>
         </a:defRPr>
       </a:lvl5pPr>
-      <a:lvl6pPr marL="2514600" indent="-228600" algn="l">
+      <a:lvl6pPr xmlns:a="http://schemas.openxmlformats.org/drawingml/2006/main" marL="2514600" indent="-228600" algn="l">
         <a:lnSpc>
           <a:spcPct val="90000"/>
         </a:lnSpc>
@@ -690,7 +872,7 @@
           <a:cs typeface="+mn-lt"/>
         </a:defRPr>
       </a:lvl6pPr>
-      <a:lvl7pPr marL="2971800" indent="-228600" algn="l">
+      <a:lvl7pPr xmlns:a="http://schemas.openxmlformats.org/drawingml/2006/main" marL="2971800" indent="-228600" algn="l">
         <a:lnSpc>
           <a:spcPct val="90000"/>
         </a:lnSpc>
@@ -707,7 +889,7 @@
           <a:cs typeface="+mn-lt"/>
         </a:defRPr>
       </a:lvl7pPr>
-      <a:lvl8pPr marL="3429000" indent="-228600" algn="l">
+      <a:lvl8pPr xmlns:a="http://schemas.openxmlformats.org/drawingml/2006/main" marL="3429000" indent="-228600" algn="l">
         <a:lnSpc>
           <a:spcPct val="90000"/>
         </a:lnSpc>
@@ -724,7 +906,7 @@
           <a:cs typeface="+mn-lt"/>
         </a:defRPr>
       </a:lvl8pPr>
-      <a:lvl9pPr marL="3886200" indent="-228600" algn="l">
+      <a:lvl9pPr xmlns:a="http://schemas.openxmlformats.org/drawingml/2006/main" marL="3886200" indent="-228600" algn="l">
         <a:lnSpc>
           <a:spcPct val="90000"/>
         </a:lnSpc>
@@ -743,7 +925,7 @@
       </a:lvl9pPr>
     </p:bodyStyle>
     <p:otherStyle>
-      <a:lvl1pPr marL="0" algn="l">
+      <a:lvl1pPr xmlns:a="http://schemas.openxmlformats.org/drawingml/2006/main" marL="0" algn="l">
         <a:buNone/>
         <a:defRPr sz="1800">
           <a:solidFill>
@@ -754,7 +936,7 @@
           <a:cs typeface="+mn-lt"/>
         </a:defRPr>
       </a:lvl1pPr>
-      <a:lvl2pPr marL="457200" algn="l">
+      <a:lvl2pPr xmlns:a="http://schemas.openxmlformats.org/drawingml/2006/main" marL="457200" algn="l">
         <a:buNone/>
         <a:defRPr sz="1800">
           <a:solidFill>
@@ -765,7 +947,7 @@
           <a:cs typeface="+mn-lt"/>
         </a:defRPr>
       </a:lvl2pPr>
-      <a:lvl3pPr marL="914400" algn="l">
+      <a:lvl3pPr xmlns:a="http://schemas.openxmlformats.org/drawingml/2006/main" marL="914400" algn="l">
         <a:buNone/>
         <a:defRPr sz="1800">
           <a:solidFill>
@@ -776,7 +958,7 @@
           <a:cs typeface="+mn-lt"/>
         </a:defRPr>
       </a:lvl3pPr>
-      <a:lvl4pPr marL="1371600" algn="l">
+      <a:lvl4pPr xmlns:a="http://schemas.openxmlformats.org/drawingml/2006/main" marL="1371600" algn="l">
         <a:buNone/>
         <a:defRPr sz="1800">
           <a:solidFill>
@@ -787,7 +969,7 @@
           <a:cs typeface="+mn-lt"/>
         </a:defRPr>
       </a:lvl4pPr>
-      <a:lvl5pPr marL="1828800" algn="l">
+      <a:lvl5pPr xmlns:a="http://schemas.openxmlformats.org/drawingml/2006/main" marL="1828800" algn="l">
         <a:buNone/>
         <a:defRPr sz="1800">
           <a:solidFill>
@@ -798,7 +980,7 @@
           <a:cs typeface="+mn-lt"/>
         </a:defRPr>
       </a:lvl5pPr>
-      <a:lvl6pPr marL="2286000" algn="l">
+      <a:lvl6pPr xmlns:a="http://schemas.openxmlformats.org/drawingml/2006/main" marL="2286000" algn="l">
         <a:buNone/>
         <a:defRPr sz="1800">
           <a:solidFill>
@@ -809,7 +991,7 @@
           <a:cs typeface="+mn-lt"/>
         </a:defRPr>
       </a:lvl6pPr>
-      <a:lvl7pPr marL="2743200" algn="l">
+      <a:lvl7pPr xmlns:a="http://schemas.openxmlformats.org/drawingml/2006/main" marL="2743200" algn="l">
         <a:buNone/>
         <a:defRPr sz="1800">
           <a:solidFill>
@@ -820,7 +1002,7 @@
           <a:cs typeface="+mn-lt"/>
         </a:defRPr>
       </a:lvl7pPr>
-      <a:lvl8pPr marL="3200400" algn="l">
+      <a:lvl8pPr xmlns:a="http://schemas.openxmlformats.org/drawingml/2006/main" marL="3200400" algn="l">
         <a:buNone/>
         <a:defRPr sz="1800">
           <a:solidFill>
@@ -831,7 +1013,7 @@
           <a:cs typeface="+mn-lt"/>
         </a:defRPr>
       </a:lvl8pPr>
-      <a:lvl9pPr marL="3657600" algn="l">
+      <a:lvl9pPr xmlns:a="http://schemas.openxmlformats.org/drawingml/2006/main" marL="3657600" algn="l">
         <a:buNone/>
         <a:defRPr sz="1800">
           <a:solidFill>
@@ -847,8 +1029,253 @@
 </p:sldMaster>
 </file>
 
+<file path=ppt/slideMasters/theme/theme2.xml><?xml version="1.0" encoding="utf-8"?>
+<a:theme xmlns:a="http://schemas.openxmlformats.org/drawingml/2006/main" name="ChatGPT">
+  <a:themeElements>
+    <a:clrScheme name="ChatGPT">
+      <a:dk1>
+        <a:srgbClr val="000000"/>
+      </a:dk1>
+      <a:lt1>
+        <a:srgbClr val="FFFFFF"/>
+      </a:lt1>
+      <a:dk2>
+        <a:srgbClr val="0E2841"/>
+      </a:dk2>
+      <a:lt2>
+        <a:srgbClr val="E8E8E8"/>
+      </a:lt2>
+      <a:accent1>
+        <a:srgbClr val="156082"/>
+      </a:accent1>
+      <a:accent2>
+        <a:srgbClr val="E97132"/>
+      </a:accent2>
+      <a:accent3>
+        <a:srgbClr val="196B24"/>
+      </a:accent3>
+      <a:accent4>
+        <a:srgbClr val="0F9ED5"/>
+      </a:accent4>
+      <a:accent5>
+        <a:srgbClr val="A02B93"/>
+      </a:accent5>
+      <a:accent6>
+        <a:srgbClr val="4EA72E"/>
+      </a:accent6>
+      <a:hlink>
+        <a:srgbClr val="467886"/>
+      </a:hlink>
+      <a:folHlink>
+        <a:srgbClr val="96607D"/>
+      </a:folHlink>
+    </a:clrScheme>
+    <a:fontScheme name="Office">
+      <a:majorFont>
+        <a:latin typeface="Calibri Light"/>
+        <a:ea typeface="Calibri Light"/>
+        <a:cs typeface="Calibri Light"/>
+      </a:majorFont>
+      <a:minorFont>
+        <a:latin typeface="Calibri"/>
+        <a:ea typeface="Calibri"/>
+        <a:cs typeface="Calibri"/>
+      </a:minorFont>
+    </a:fontScheme>
+    <a:fmtScheme name="ChatGPT">
+      <a:fillStyleLst>
+        <a:solidFill>
+          <a:schemeClr val="phClr"/>
+        </a:solidFill>
+        <a:gradFill>
+          <a:gsLst>
+            <a:gs pos="0">
+              <a:schemeClr val="phClr">
+                <a:tint val="67000"/>
+                <a:lumMod val="110000"/>
+                <a:satMod val="105000"/>
+              </a:schemeClr>
+            </a:gs>
+            <a:gs pos="50000">
+              <a:schemeClr val="phClr">
+                <a:tint val="73000"/>
+                <a:lumMod val="105000"/>
+                <a:satMod val="103000"/>
+              </a:schemeClr>
+            </a:gs>
+            <a:gs pos="100000">
+              <a:schemeClr val="phClr">
+                <a:tint val="81000"/>
+                <a:lumMod val="105000"/>
+                <a:satMod val="109000"/>
+              </a:schemeClr>
+            </a:gs>
+          </a:gsLst>
+          <a:lin ang="5400000" scaled="0"/>
+        </a:gradFill>
+        <a:gradFill>
+          <a:gsLst>
+            <a:gs pos="0">
+              <a:schemeClr val="phClr">
+                <a:tint val="94000"/>
+                <a:lumMod val="102000"/>
+                <a:satMod val="103000"/>
+              </a:schemeClr>
+            </a:gs>
+            <a:gs pos="50000">
+              <a:schemeClr val="phClr">
+                <a:shade val="100000"/>
+                <a:lumMod val="100000"/>
+                <a:satMod val="110000"/>
+              </a:schemeClr>
+            </a:gs>
+            <a:gs pos="100000">
+              <a:schemeClr val="phClr">
+                <a:shade val="78000"/>
+                <a:lumMod val="99000"/>
+                <a:satMod val="120000"/>
+              </a:schemeClr>
+            </a:gs>
+          </a:gsLst>
+          <a:lin ang="5400000" scaled="0"/>
+        </a:gradFill>
+      </a:fillStyleLst>
+      <a:lnStyleLst>
+        <a:ln w="12700">
+          <a:solidFill>
+            <a:schemeClr val="phClr"/>
+          </a:solidFill>
+          <a:prstDash val="solid"/>
+        </a:ln>
+        <a:ln w="19050">
+          <a:solidFill>
+            <a:schemeClr val="phClr"/>
+          </a:solidFill>
+          <a:prstDash val="solid"/>
+        </a:ln>
+        <a:ln w="25400">
+          <a:solidFill>
+            <a:schemeClr val="phClr"/>
+          </a:solidFill>
+          <a:prstDash val="solid"/>
+        </a:ln>
+      </a:lnStyleLst>
+      <a:effectStyleLst>
+        <a:effectStyle>
+          <a:effectLst/>
+        </a:effectStyle>
+        <a:effectStyle>
+          <a:effectLst/>
+        </a:effectStyle>
+        <a:effectStyle>
+          <a:effectLst>
+            <a:outerShdw blurRad="57150" dist="19050" dir="5400000">
+              <a:srgbClr val="000000">
+                <a:alpha val="16000"/>
+              </a:srgbClr>
+            </a:outerShdw>
+          </a:effectLst>
+        </a:effectStyle>
+        <a:effectStyle>
+          <a:effectLst>
+            <a:outerShdw blurRad="19050" dist="9525" dir="5400000">
+              <a:srgbClr val="000000">
+                <a:alpha val="6000"/>
+              </a:srgbClr>
+            </a:outerShdw>
+          </a:effectLst>
+        </a:effectStyle>
+        <a:effectStyle>
+          <a:effectLst>
+            <a:outerShdw blurRad="28575" dist="9525" dir="5400000">
+              <a:srgbClr val="000000">
+                <a:alpha val="8000"/>
+              </a:srgbClr>
+            </a:outerShdw>
+          </a:effectLst>
+        </a:effectStyle>
+        <a:effectStyle>
+          <a:effectLst>
+            <a:outerShdw blurRad="57150" dist="19050" dir="5400000">
+              <a:srgbClr val="000000">
+                <a:alpha val="10000"/>
+              </a:srgbClr>
+            </a:outerShdw>
+          </a:effectLst>
+        </a:effectStyle>
+        <a:effectStyle>
+          <a:effectLst>
+            <a:outerShdw blurRad="114300" dist="38100" dir="5400000">
+              <a:srgbClr val="000000">
+                <a:alpha val="12000"/>
+              </a:srgbClr>
+            </a:outerShdw>
+          </a:effectLst>
+        </a:effectStyle>
+        <a:effectStyle>
+          <a:effectLst>
+            <a:outerShdw blurRad="171450" dist="57150" dir="5400000">
+              <a:srgbClr val="000000">
+                <a:alpha val="16000"/>
+              </a:srgbClr>
+            </a:outerShdw>
+          </a:effectLst>
+        </a:effectStyle>
+        <a:effectStyle>
+          <a:effectLst>
+            <a:outerShdw blurRad="266700" dist="95250" dir="5400000">
+              <a:srgbClr val="000000">
+                <a:alpha val="24000"/>
+              </a:srgbClr>
+            </a:outerShdw>
+          </a:effectLst>
+        </a:effectStyle>
+      </a:effectStyleLst>
+      <a:bgFillStyleLst>
+        <a:solidFill>
+          <a:schemeClr val="phClr"/>
+        </a:solidFill>
+        <a:solidFill>
+          <a:schemeClr val="phClr">
+            <a:tint val="95000"/>
+            <a:satMod val="170000"/>
+          </a:schemeClr>
+        </a:solidFill>
+        <a:gradFill>
+          <a:gsLst>
+            <a:gs pos="0">
+              <a:schemeClr val="phClr">
+                <a:tint val="93000"/>
+                <a:shade val="98000"/>
+                <a:lumMod val="102000"/>
+                <a:satMod val="150000"/>
+              </a:schemeClr>
+            </a:gs>
+            <a:gs pos="50000">
+              <a:schemeClr val="phClr">
+                <a:tint val="98000"/>
+                <a:shade val="90000"/>
+                <a:lumMod val="103000"/>
+                <a:satMod val="130000"/>
+              </a:schemeClr>
+            </a:gs>
+            <a:gs pos="100000">
+              <a:schemeClr val="phClr">
+                <a:shade val="63000"/>
+                <a:satMod val="120000"/>
+              </a:schemeClr>
+            </a:gs>
+          </a:gsLst>
+          <a:lin ang="5400000" scaled="0"/>
+        </a:gradFill>
+      </a:bgFillStyleLst>
+    </a:fmtScheme>
+  </a:themeElements>
+</a:theme>
+</file>
+
 <file path=ppt/slides/slide1.xml><?xml version="1.0" encoding="utf-8"?>
-<p:sld xmlns:a="http://schemas.openxmlformats.org/drawingml/2006/main" xmlns:r="http://schemas.openxmlformats.org/officeDocument/2006/relationships" xmlns:p="http://schemas.openxmlformats.org/presentationml/2006/main">
+<p:sld xmlns:p="http://schemas.openxmlformats.org/presentationml/2006/main">
   <p:cSld>
     <p:spTree>
       <p:nvGrpSpPr>
@@ -857,34 +1284,29 @@
         <p:nvPr/>
       </p:nvGrpSpPr>
       <p:grpSpPr>
-        <a:xfrm>
-          <a:off x="0" y="0"/>
-          <a:ext cx="0" cy="0"/>
-          <a:chOff x="0" y="0"/>
-          <a:chExt cx="0" cy="0"/>
-        </a:xfrm>
+        <a:xfrm xmlns:a="http://schemas.openxmlformats.org/drawingml/2006/main"/>
       </p:grpSpPr>
       <p:pic>
         <p:nvPicPr>
-          <p:cNvPr id="42" name="Imagen 41"/>
+          <p:cNvPr id="43" name="Imagen 41"/>
           <p:cNvPicPr>
-            <a:picLocks noChangeAspect="1"/>
+            <a:picLocks xmlns:a="http://schemas.openxmlformats.org/drawingml/2006/main" noChangeAspect="1"/>
           </p:cNvPicPr>
           <p:nvPr/>
         </p:nvPicPr>
         <p:blipFill>
-          <a:blip r:embed="rId3"/>
-          <a:srcRect t="27" b="27"/>
-          <a:stretch>
-            <a:fillRect/>
+          <a:blip xmlns:r="http://schemas.openxmlformats.org/officeDocument/2006/relationships" xmlns:a="http://schemas.openxmlformats.org/drawingml/2006/main" r:embed="Re8c36cc8500c47c0"/>
+          <a:srcRect xmlns:a="http://schemas.openxmlformats.org/drawingml/2006/main" l="0" t="27" r="0" b="27"/>
+          <a:stretch xmlns:a="http://schemas.openxmlformats.org/drawingml/2006/main">
+            <a:fillRect l="0" t="0" r="0" b="0"/>
           </a:stretch>
         </p:blipFill>
         <p:spPr>
-          <a:xfrm>
+          <a:xfrm xmlns:a="http://schemas.openxmlformats.org/drawingml/2006/main">
             <a:off x="0" y="0"/>
             <a:ext cx="12192000" cy="6858000"/>
           </a:xfrm>
-          <a:prstGeom prst="rect">
+          <a:prstGeom xmlns:a="http://schemas.openxmlformats.org/drawingml/2006/main" prst="rect">
             <a:avLst/>
           </a:prstGeom>
         </p:spPr>
@@ -892,26 +1314,26 @@
       <p:sp>
         <p:nvSpPr>
           <p:cNvPr id="2" name="Rectángulo 1">
-            <a:extLst>
+            <a:extLst xmlns:a="http://schemas.openxmlformats.org/drawingml/2006/main">
               <a:ext uri="{FF2B5EF4-FFF2-40B4-BE49-F238E27FC236}">
                 <a16:creationId xmlns:a16="http://schemas.microsoft.com/office/drawing/2014/main" id="{B76F925A-853B-4B63-B630-E7E0361BA3FF}"/>
               </a:ext>
             </a:extLst>
           </p:cNvPr>
           <p:cNvSpPr>
-            <a:spLocks noGrp="1"/>
-          </p:cNvSpPr>
-          <p:nvPr/>
-        </p:nvSpPr>
-        <p:spPr>
-          <a:xfrm>
+            <a:spLocks xmlns:a="http://schemas.openxmlformats.org/drawingml/2006/main" noGrp="1"/>
+          </p:cNvSpPr>
+          <p:nvPr/>
+        </p:nvSpPr>
+        <p:spPr>
+          <a:xfrm xmlns:a="http://schemas.openxmlformats.org/drawingml/2006/main">
             <a:off x="0" y="0"/>
             <a:ext cx="12192000" cy="1123950"/>
           </a:xfrm>
-          <a:prstGeom prst="rect">
-            <a:avLst/>
-          </a:prstGeom>
-          <a:ln w="0">
+          <a:prstGeom xmlns:a="http://schemas.openxmlformats.org/drawingml/2006/main" prst="rect">
+            <a:avLst/>
+          </a:prstGeom>
+          <a:ln xmlns:a="http://schemas.openxmlformats.org/drawingml/2006/main" w="0">
             <a:noFill/>
           </a:ln>
         </p:spPr>
@@ -919,26 +1341,26 @@
       <p:sp>
         <p:nvSpPr>
           <p:cNvPr id="3" name="Rectángulo 2">
-            <a:extLst>
+            <a:extLst xmlns:a="http://schemas.openxmlformats.org/drawingml/2006/main">
               <a:ext uri="{FF2B5EF4-FFF2-40B4-BE49-F238E27FC236}">
                 <a16:creationId xmlns:a16="http://schemas.microsoft.com/office/drawing/2014/main" id="{FB1C263C-5E91-44EE-907E-89FD02816680}"/>
               </a:ext>
             </a:extLst>
           </p:cNvPr>
           <p:cNvSpPr>
-            <a:spLocks noGrp="1"/>
-          </p:cNvSpPr>
-          <p:nvPr/>
-        </p:nvSpPr>
-        <p:spPr>
-          <a:xfrm>
+            <a:spLocks xmlns:a="http://schemas.openxmlformats.org/drawingml/2006/main" noGrp="1"/>
+          </p:cNvSpPr>
+          <p:nvPr/>
+        </p:nvSpPr>
+        <p:spPr>
+          <a:xfrm xmlns:a="http://schemas.openxmlformats.org/drawingml/2006/main">
             <a:off x="0" y="4457700"/>
             <a:ext cx="12192000" cy="2400300"/>
           </a:xfrm>
-          <a:prstGeom prst="rect">
-            <a:avLst/>
-          </a:prstGeom>
-          <a:ln w="0">
+          <a:prstGeom xmlns:a="http://schemas.openxmlformats.org/drawingml/2006/main" prst="rect">
+            <a:avLst/>
+          </a:prstGeom>
+          <a:ln xmlns:a="http://schemas.openxmlformats.org/drawingml/2006/main" w="0">
             <a:noFill/>
           </a:ln>
         </p:spPr>
@@ -946,35 +1368,36 @@
       <p:sp>
         <p:nvSpPr>
           <p:cNvPr id="4" name="Rectángulo 3">
-            <a:extLst>
+            <a:extLst xmlns:a="http://schemas.openxmlformats.org/drawingml/2006/main">
               <a:ext uri="{FF2B5EF4-FFF2-40B4-BE49-F238E27FC236}">
                 <a16:creationId xmlns:a16="http://schemas.microsoft.com/office/drawing/2014/main" id="{B76D6CD6-C65C-4094-B79C-E893F1944BC9}"/>
               </a:ext>
             </a:extLst>
           </p:cNvPr>
           <p:cNvSpPr>
-            <a:spLocks noGrp="1"/>
-          </p:cNvSpPr>
-          <p:nvPr/>
-        </p:nvSpPr>
-        <p:spPr>
-          <a:xfrm>
+            <a:spLocks xmlns:a="http://schemas.openxmlformats.org/drawingml/2006/main" noGrp="1"/>
+          </p:cNvSpPr>
+          <p:nvPr/>
+        </p:nvSpPr>
+        <p:spPr>
+          <a:xfrm xmlns:a="http://schemas.openxmlformats.org/drawingml/2006/main">
             <a:off x="514350" y="228600"/>
             <a:ext cx="5715000" cy="428625"/>
           </a:xfrm>
-          <a:prstGeom prst="rect">
-            <a:avLst/>
-          </a:prstGeom>
-          <a:noFill/>
-          <a:ln w="0">
-            <a:noFill/>
-          </a:ln>
-        </p:spPr>
-        <p:txBody>
-          <a:bodyPr anchor="ctr"/>
-          <a:lstStyle/>
-          <a:p>
-            <a:pPr>
+          <a:prstGeom xmlns:a="http://schemas.openxmlformats.org/drawingml/2006/main" prst="rect">
+            <a:avLst/>
+          </a:prstGeom>
+          <a:noFill xmlns:a="http://schemas.openxmlformats.org/drawingml/2006/main"/>
+          <a:ln xmlns:a="http://schemas.openxmlformats.org/drawingml/2006/main" w="0">
+            <a:noFill/>
+          </a:ln>
+        </p:spPr>
+        <p:txBody>
+          <a:bodyPr xmlns:a="http://schemas.openxmlformats.org/drawingml/2006/main" anchor="ctr"/>
+          <a:lstStyle xmlns:a="http://schemas.openxmlformats.org/drawingml/2006/main"/>
+          <a:p xmlns:a="http://schemas.openxmlformats.org/drawingml/2006/main">
+            <a:pPr>
+              <a:buNone/>
               <a:defRPr sz="2400" b="1">
                 <a:solidFill>
                   <a:srgbClr val="FFFFFF"/>
@@ -995,35 +1418,36 @@
       <p:sp>
         <p:nvSpPr>
           <p:cNvPr id="5" name="Rectángulo 4">
-            <a:extLst>
+            <a:extLst xmlns:a="http://schemas.openxmlformats.org/drawingml/2006/main">
               <a:ext uri="{FF2B5EF4-FFF2-40B4-BE49-F238E27FC236}">
                 <a16:creationId xmlns:a16="http://schemas.microsoft.com/office/drawing/2014/main" id="{5912B2F9-7ECB-4D03-9D83-96A67B67EAEA}"/>
               </a:ext>
             </a:extLst>
           </p:cNvPr>
           <p:cNvSpPr>
-            <a:spLocks noGrp="1"/>
-          </p:cNvSpPr>
-          <p:nvPr/>
-        </p:nvSpPr>
-        <p:spPr>
-          <a:xfrm>
+            <a:spLocks xmlns:a="http://schemas.openxmlformats.org/drawingml/2006/main" noGrp="1"/>
+          </p:cNvSpPr>
+          <p:nvPr/>
+        </p:nvSpPr>
+        <p:spPr>
+          <a:xfrm xmlns:a="http://schemas.openxmlformats.org/drawingml/2006/main">
             <a:off x="533400" y="666750"/>
             <a:ext cx="8096250" cy="266700"/>
           </a:xfrm>
-          <a:prstGeom prst="rect">
-            <a:avLst/>
-          </a:prstGeom>
-          <a:noFill/>
-          <a:ln w="0">
-            <a:noFill/>
-          </a:ln>
-        </p:spPr>
-        <p:txBody>
-          <a:bodyPr anchor="ctr"/>
-          <a:lstStyle/>
-          <a:p>
-            <a:pPr>
+          <a:prstGeom xmlns:a="http://schemas.openxmlformats.org/drawingml/2006/main" prst="rect">
+            <a:avLst/>
+          </a:prstGeom>
+          <a:noFill xmlns:a="http://schemas.openxmlformats.org/drawingml/2006/main"/>
+          <a:ln xmlns:a="http://schemas.openxmlformats.org/drawingml/2006/main" w="0">
+            <a:noFill/>
+          </a:ln>
+        </p:spPr>
+        <p:txBody>
+          <a:bodyPr xmlns:a="http://schemas.openxmlformats.org/drawingml/2006/main" anchor="ctr"/>
+          <a:lstStyle xmlns:a="http://schemas.openxmlformats.org/drawingml/2006/main"/>
+          <a:p xmlns:a="http://schemas.openxmlformats.org/drawingml/2006/main">
+            <a:pPr>
+              <a:buNone/>
               <a:defRPr sz="1275" b="0">
                 <a:solidFill>
                   <a:srgbClr val="F5E7C3"/>
@@ -1031,7 +1455,7 @@
               </a:defRPr>
             </a:pPr>
             <a:r>
-              <a:rPr lang="es-ES" sz="1275" dirty="0">
+              <a:rPr sz="1275">
                 <a:solidFill>
                   <a:srgbClr val="F5E7C3"/>
                 </a:solidFill>
@@ -1039,7 +1463,7 @@
               <a:t>U</a:t>
             </a:r>
             <a:r>
-              <a:rPr sz="1275" b="0" dirty="0">
+              <a:rPr sz="1275" b="0">
                 <a:solidFill>
                   <a:srgbClr val="F5E7C3"/>
                 </a:solidFill>
@@ -1047,7 +1471,7 @@
               <a:t>na gracia </a:t>
             </a:r>
             <a:r>
-              <a:rPr sz="1275" b="0" dirty="0" err="1">
+              <a:rPr sz="1275" b="0">
                 <a:solidFill>
                   <a:srgbClr val="F5E7C3"/>
                 </a:solidFill>
@@ -1055,7 +1479,7 @@
               <a:t>que</a:t>
             </a:r>
             <a:r>
-              <a:rPr sz="1275" b="0" dirty="0">
+              <a:rPr sz="1275" b="0">
                 <a:solidFill>
                   <a:srgbClr val="F5E7C3"/>
                 </a:solidFill>
@@ -1063,7 +1487,7 @@
               <a:t> </a:t>
             </a:r>
             <a:r>
-              <a:rPr sz="1275" b="0" dirty="0" err="1">
+              <a:rPr sz="1275" b="0">
                 <a:solidFill>
                   <a:srgbClr val="F5E7C3"/>
                 </a:solidFill>
@@ -1071,7 +1495,7 @@
               <a:t>trabaja</a:t>
             </a:r>
             <a:r>
-              <a:rPr sz="1275" b="0" dirty="0">
+              <a:rPr sz="1275" b="0">
                 <a:solidFill>
                   <a:srgbClr val="F5E7C3"/>
                 </a:solidFill>
@@ -1079,7 +1503,7 @@
               <a:t> antes de </a:t>
             </a:r>
             <a:r>
-              <a:rPr sz="1275" b="0" dirty="0" err="1">
+              <a:rPr sz="1275" b="0">
                 <a:solidFill>
                   <a:srgbClr val="F5E7C3"/>
                 </a:solidFill>
@@ -1087,7 +1511,7 @@
               <a:t>hacerse</a:t>
             </a:r>
             <a:r>
-              <a:rPr sz="1275" b="0" dirty="0">
+              <a:rPr sz="1275" b="0">
                 <a:solidFill>
                   <a:srgbClr val="F5E7C3"/>
                 </a:solidFill>
@@ -1100,28 +1524,28 @@
       <p:sp>
         <p:nvSpPr>
           <p:cNvPr id="6" name="Rectángulo: esquinas redondeadas 5">
-            <a:extLst>
+            <a:extLst xmlns:a="http://schemas.openxmlformats.org/drawingml/2006/main">
               <a:ext uri="{FF2B5EF4-FFF2-40B4-BE49-F238E27FC236}">
                 <a16:creationId xmlns:a16="http://schemas.microsoft.com/office/drawing/2014/main" id="{6BA613D3-A121-4C21-8A6A-26CE265C21D6}"/>
               </a:ext>
             </a:extLst>
           </p:cNvPr>
           <p:cNvSpPr>
-            <a:spLocks noGrp="1"/>
-          </p:cNvSpPr>
-          <p:nvPr/>
-        </p:nvSpPr>
-        <p:spPr>
-          <a:xfrm>
-            <a:off x="3943350" y="1381125"/>
+            <a:spLocks xmlns:a="http://schemas.openxmlformats.org/drawingml/2006/main" noGrp="1"/>
+          </p:cNvSpPr>
+          <p:nvPr/>
+        </p:nvSpPr>
+        <p:spPr>
+          <a:xfrm xmlns:a="http://schemas.openxmlformats.org/drawingml/2006/main">
+            <a:off x="762000" y="1381125"/>
             <a:ext cx="4305300" cy="1581150"/>
           </a:xfrm>
-          <a:prstGeom prst="roundRect">
+          <a:prstGeom xmlns:a="http://schemas.openxmlformats.org/drawingml/2006/main" prst="roundRect">
             <a:avLst>
               <a:gd name="adj" fmla="val 7229"/>
             </a:avLst>
           </a:prstGeom>
-          <a:ln w="9525">
+          <a:ln xmlns:a="http://schemas.openxmlformats.org/drawingml/2006/main" w="9525">
             <a:solidFill>
               <a:srgbClr val="C7B379"/>
             </a:solidFill>
@@ -1132,36 +1556,41 @@
       <p:sp>
         <p:nvSpPr>
           <p:cNvPr id="7" name="Rectángulo 6">
-            <a:extLst>
+            <a:extLst xmlns:a="http://schemas.openxmlformats.org/drawingml/2006/main">
               <a:ext uri="{FF2B5EF4-FFF2-40B4-BE49-F238E27FC236}">
                 <a16:creationId xmlns:a16="http://schemas.microsoft.com/office/drawing/2014/main" id="{D33900F7-2BFB-4C08-9991-E4DBC79CDB0C}"/>
               </a:ext>
             </a:extLst>
           </p:cNvPr>
           <p:cNvSpPr>
-            <a:spLocks noGrp="1"/>
-          </p:cNvSpPr>
-          <p:nvPr/>
-        </p:nvSpPr>
-        <p:spPr>
-          <a:xfrm>
-            <a:off x="4514850" y="1552575"/>
+            <a:spLocks xmlns:a="http://schemas.openxmlformats.org/drawingml/2006/main" noGrp="1"/>
+          </p:cNvSpPr>
+          <p:nvPr/>
+        </p:nvSpPr>
+        <p:spPr>
+          <a:xfrm xmlns:a="http://schemas.openxmlformats.org/drawingml/2006/main">
+            <a:off x="1333500" y="1552575"/>
             <a:ext cx="3162300" cy="742950"/>
           </a:xfrm>
-          <a:prstGeom prst="rect">
-            <a:avLst/>
-          </a:prstGeom>
-          <a:noFill/>
-          <a:ln w="0">
-            <a:noFill/>
-          </a:ln>
-        </p:spPr>
-        <p:txBody>
-          <a:bodyPr anchor="ctr"/>
-          <a:lstStyle/>
-          <a:p>
+          <a:prstGeom xmlns:a="http://schemas.openxmlformats.org/drawingml/2006/main" prst="rect">
+            <a:avLst/>
+          </a:prstGeom>
+          <a:noFill xmlns:a="http://schemas.openxmlformats.org/drawingml/2006/main"/>
+          <a:ln xmlns:a="http://schemas.openxmlformats.org/drawingml/2006/main" w="0">
+            <a:noFill/>
+          </a:ln>
+        </p:spPr>
+        <p:txBody>
+          <a:bodyPr xmlns:a="http://schemas.openxmlformats.org/drawingml/2006/main" anchor="ctr"/>
+          <a:lstStyle xmlns:a="http://schemas.openxmlformats.org/drawingml/2006/main"/>
+          <a:p xmlns:a="http://schemas.openxmlformats.org/drawingml/2006/main">
             <a:pPr algn="ctr">
+              <a:buNone/>
               <a:defRPr sz="1875" b="1">
+                <a:ln w="0">
+                  <a:noFill/>
+                  <a:prstDash val="solid"/>
+                </a:ln>
                 <a:solidFill>
                   <a:srgbClr val="FFFFFF"/>
                 </a:solidFill>
@@ -1169,7 +1598,10 @@
             </a:pPr>
             <a:r>
               <a:rPr sz="1875">
-                <a:ln w="0"/>
+                <a:ln w="0">
+                  <a:noFill/>
+                  <a:prstDash val="solid"/>
+                </a:ln>
                 <a:solidFill>
                   <a:schemeClr val="tx2">
                     <a:lumMod val="90000"/>
@@ -1187,9 +1619,14 @@
               <a:t>DIOS YA ESTÁ OBRANDO</a:t>
             </a:r>
           </a:p>
-          <a:p>
+          <a:p xmlns:a="http://schemas.openxmlformats.org/drawingml/2006/main">
             <a:pPr algn="ctr">
+              <a:buNone/>
               <a:defRPr sz="1875" b="1">
+                <a:ln w="0">
+                  <a:noFill/>
+                  <a:prstDash val="solid"/>
+                </a:ln>
                 <a:solidFill>
                   <a:srgbClr val="FFFFFF"/>
                 </a:solidFill>
@@ -1197,7 +1634,10 @@
             </a:pPr>
             <a:r>
               <a:rPr sz="1875">
-                <a:ln w="0"/>
+                <a:ln w="0">
+                  <a:noFill/>
+                  <a:prstDash val="solid"/>
+                </a:ln>
                 <a:solidFill>
                   <a:schemeClr val="tx2">
                     <a:lumMod val="90000"/>
@@ -1220,36 +1660,41 @@
       <p:sp>
         <p:nvSpPr>
           <p:cNvPr id="8" name="Rectángulo 7">
-            <a:extLst>
+            <a:extLst xmlns:a="http://schemas.openxmlformats.org/drawingml/2006/main">
               <a:ext uri="{FF2B5EF4-FFF2-40B4-BE49-F238E27FC236}">
                 <a16:creationId xmlns:a16="http://schemas.microsoft.com/office/drawing/2014/main" id="{8F9A3AF1-988D-4987-A2AF-F5D5DBBF33B9}"/>
               </a:ext>
             </a:extLst>
           </p:cNvPr>
           <p:cNvSpPr>
-            <a:spLocks noGrp="1"/>
-          </p:cNvSpPr>
-          <p:nvPr/>
-        </p:nvSpPr>
-        <p:spPr>
-          <a:xfrm>
-            <a:off x="4305300" y="2200275"/>
+            <a:spLocks xmlns:a="http://schemas.openxmlformats.org/drawingml/2006/main" noGrp="1"/>
+          </p:cNvSpPr>
+          <p:nvPr/>
+        </p:nvSpPr>
+        <p:spPr>
+          <a:xfrm xmlns:a="http://schemas.openxmlformats.org/drawingml/2006/main">
+            <a:off x="1123950" y="2200275"/>
             <a:ext cx="3848100" cy="457200"/>
           </a:xfrm>
-          <a:prstGeom prst="rect">
-            <a:avLst/>
-          </a:prstGeom>
-          <a:noFill/>
-          <a:ln w="0">
-            <a:noFill/>
-          </a:ln>
-        </p:spPr>
-        <p:txBody>
-          <a:bodyPr anchor="ctr"/>
-          <a:lstStyle/>
-          <a:p>
-            <a:pPr>
+          <a:prstGeom xmlns:a="http://schemas.openxmlformats.org/drawingml/2006/main" prst="rect">
+            <a:avLst/>
+          </a:prstGeom>
+          <a:noFill xmlns:a="http://schemas.openxmlformats.org/drawingml/2006/main"/>
+          <a:ln xmlns:a="http://schemas.openxmlformats.org/drawingml/2006/main" w="0">
+            <a:noFill/>
+          </a:ln>
+        </p:spPr>
+        <p:txBody>
+          <a:bodyPr xmlns:a="http://schemas.openxmlformats.org/drawingml/2006/main" anchor="ctr"/>
+          <a:lstStyle xmlns:a="http://schemas.openxmlformats.org/drawingml/2006/main"/>
+          <a:p xmlns:a="http://schemas.openxmlformats.org/drawingml/2006/main">
+            <a:pPr>
+              <a:buNone/>
               <a:defRPr sz="1200" b="0">
+                <a:ln w="0">
+                  <a:noFill/>
+                  <a:prstDash val="solid"/>
+                </a:ln>
                 <a:solidFill>
                   <a:srgbClr val="FFFFFF"/>
                 </a:solidFill>
@@ -1257,7 +1702,10 @@
             </a:pPr>
             <a:r>
               <a:rPr sz="1200">
-                <a:ln w="0"/>
+                <a:ln w="0">
+                  <a:noFill/>
+                  <a:prstDash val="solid"/>
+                </a:ln>
                 <a:solidFill>
                   <a:srgbClr val="52748E"/>
                 </a:solidFill>
@@ -1272,9 +1720,14 @@
               <a:t>La esperanza cristiana no niega el invierno:</a:t>
             </a:r>
           </a:p>
-          <a:p>
-            <a:pPr>
+          <a:p xmlns:a="http://schemas.openxmlformats.org/drawingml/2006/main">
+            <a:pPr>
+              <a:buNone/>
               <a:defRPr sz="1200" b="0">
+                <a:ln w="0">
+                  <a:noFill/>
+                  <a:prstDash val="solid"/>
+                </a:ln>
                 <a:solidFill>
                   <a:srgbClr val="FFFFFF"/>
                 </a:solidFill>
@@ -1282,7 +1735,10 @@
             </a:pPr>
             <a:r>
               <a:rPr sz="1200">
-                <a:ln w="0"/>
+                <a:ln w="0">
+                  <a:noFill/>
+                  <a:prstDash val="solid"/>
+                </a:ln>
                 <a:solidFill>
                   <a:srgbClr val="52748E"/>
                 </a:solidFill>
@@ -1302,27 +1758,27 @@
       <p:sp>
         <p:nvSpPr>
           <p:cNvPr id="9" name="Conector recto 8">
-            <a:extLst>
+            <a:extLst xmlns:a="http://schemas.openxmlformats.org/drawingml/2006/main">
               <a:ext uri="{FF2B5EF4-FFF2-40B4-BE49-F238E27FC236}">
                 <a16:creationId xmlns:a16="http://schemas.microsoft.com/office/drawing/2014/main" id="{766AD396-925D-4C92-B794-935B24E5E35D}"/>
               </a:ext>
             </a:extLst>
           </p:cNvPr>
           <p:cNvSpPr>
-            <a:spLocks noGrp="1"/>
-          </p:cNvSpPr>
-          <p:nvPr/>
-        </p:nvSpPr>
-        <p:spPr>
-          <a:xfrm flipV="1">
+            <a:spLocks xmlns:a="http://schemas.openxmlformats.org/drawingml/2006/main" noGrp="1"/>
+          </p:cNvSpPr>
+          <p:nvPr/>
+        </p:nvSpPr>
+        <p:spPr>
+          <a:xfrm xmlns:a="http://schemas.openxmlformats.org/drawingml/2006/main" flipV="1">
             <a:off x="676275" y="4600575"/>
             <a:ext cx="10753725" cy="47625"/>
           </a:xfrm>
-          <a:prstGeom prst="line">
-            <a:avLst/>
-          </a:prstGeom>
-          <a:noFill/>
-          <a:ln w="19050">
+          <a:prstGeom xmlns:a="http://schemas.openxmlformats.org/drawingml/2006/main" prst="line">
+            <a:avLst/>
+          </a:prstGeom>
+          <a:noFill xmlns:a="http://schemas.openxmlformats.org/drawingml/2006/main"/>
+          <a:ln xmlns:a="http://schemas.openxmlformats.org/drawingml/2006/main" w="19050">
             <a:solidFill>
               <a:srgbClr val="CDA64F"/>
             </a:solidFill>
@@ -1333,29 +1789,29 @@
       <p:sp>
         <p:nvSpPr>
           <p:cNvPr id="10" name="Elipse 9">
-            <a:extLst>
+            <a:extLst xmlns:a="http://schemas.openxmlformats.org/drawingml/2006/main">
               <a:ext uri="{FF2B5EF4-FFF2-40B4-BE49-F238E27FC236}">
                 <a16:creationId xmlns:a16="http://schemas.microsoft.com/office/drawing/2014/main" id="{125F3B06-0623-45FC-A98E-F08D0AB8A03C}"/>
               </a:ext>
             </a:extLst>
           </p:cNvPr>
           <p:cNvSpPr>
-            <a:spLocks noGrp="1"/>
-          </p:cNvSpPr>
-          <p:nvPr/>
-        </p:nvSpPr>
-        <p:spPr>
-          <a:xfrm>
+            <a:spLocks xmlns:a="http://schemas.openxmlformats.org/drawingml/2006/main" noGrp="1"/>
+          </p:cNvSpPr>
+          <p:nvPr/>
+        </p:nvSpPr>
+        <p:spPr>
+          <a:xfrm xmlns:a="http://schemas.openxmlformats.org/drawingml/2006/main">
             <a:off x="438150" y="4486275"/>
             <a:ext cx="228600" cy="228600"/>
           </a:xfrm>
-          <a:prstGeom prst="ellipse">
-            <a:avLst/>
-          </a:prstGeom>
-          <a:solidFill>
+          <a:prstGeom xmlns:a="http://schemas.openxmlformats.org/drawingml/2006/main" prst="ellipse">
+            <a:avLst/>
+          </a:prstGeom>
+          <a:solidFill xmlns:a="http://schemas.openxmlformats.org/drawingml/2006/main">
             <a:srgbClr val="D9A441"/>
           </a:solidFill>
-          <a:ln w="9525">
+          <a:ln xmlns:a="http://schemas.openxmlformats.org/drawingml/2006/main" w="9525">
             <a:solidFill>
               <a:srgbClr val="F5E7C3"/>
             </a:solidFill>
@@ -1365,35 +1821,36 @@
       <p:sp>
         <p:nvSpPr>
           <p:cNvPr id="11" name="Rectángulo 10">
-            <a:extLst>
+            <a:extLst xmlns:a="http://schemas.openxmlformats.org/drawingml/2006/main">
               <a:ext uri="{FF2B5EF4-FFF2-40B4-BE49-F238E27FC236}">
                 <a16:creationId xmlns:a16="http://schemas.microsoft.com/office/drawing/2014/main" id="{665761AE-B378-4760-9A4B-681322582544}"/>
               </a:ext>
             </a:extLst>
           </p:cNvPr>
           <p:cNvSpPr>
-            <a:spLocks noGrp="1"/>
-          </p:cNvSpPr>
-          <p:nvPr/>
-        </p:nvSpPr>
-        <p:spPr>
-          <a:xfrm>
+            <a:spLocks xmlns:a="http://schemas.openxmlformats.org/drawingml/2006/main" noGrp="1"/>
+          </p:cNvSpPr>
+          <p:nvPr/>
+        </p:nvSpPr>
+        <p:spPr>
+          <a:xfrm xmlns:a="http://schemas.openxmlformats.org/drawingml/2006/main">
             <a:off x="438150" y="4495800"/>
             <a:ext cx="228600" cy="209550"/>
           </a:xfrm>
-          <a:prstGeom prst="rect">
-            <a:avLst/>
-          </a:prstGeom>
-          <a:noFill/>
-          <a:ln w="0">
-            <a:noFill/>
-          </a:ln>
-        </p:spPr>
-        <p:txBody>
-          <a:bodyPr anchor="ctr"/>
-          <a:lstStyle/>
-          <a:p>
-            <a:pPr>
+          <a:prstGeom xmlns:a="http://schemas.openxmlformats.org/drawingml/2006/main" prst="rect">
+            <a:avLst/>
+          </a:prstGeom>
+          <a:noFill xmlns:a="http://schemas.openxmlformats.org/drawingml/2006/main"/>
+          <a:ln xmlns:a="http://schemas.openxmlformats.org/drawingml/2006/main" w="0">
+            <a:noFill/>
+          </a:ln>
+        </p:spPr>
+        <p:txBody>
+          <a:bodyPr xmlns:a="http://schemas.openxmlformats.org/drawingml/2006/main" anchor="ctr"/>
+          <a:lstStyle xmlns:a="http://schemas.openxmlformats.org/drawingml/2006/main"/>
+          <a:p xmlns:a="http://schemas.openxmlformats.org/drawingml/2006/main">
+            <a:pPr>
+              <a:buNone/>
               <a:defRPr sz="750" b="1">
                 <a:solidFill>
                   <a:srgbClr val="07151F"/>
@@ -1414,35 +1871,36 @@
       <p:sp>
         <p:nvSpPr>
           <p:cNvPr id="12" name="Rectángulo 11">
-            <a:extLst>
+            <a:extLst xmlns:a="http://schemas.openxmlformats.org/drawingml/2006/main">
               <a:ext uri="{FF2B5EF4-FFF2-40B4-BE49-F238E27FC236}">
                 <a16:creationId xmlns:a16="http://schemas.microsoft.com/office/drawing/2014/main" id="{12613CD1-C39B-4AAF-BBCE-27BE81326D1D}"/>
               </a:ext>
             </a:extLst>
           </p:cNvPr>
           <p:cNvSpPr>
-            <a:spLocks noGrp="1"/>
-          </p:cNvSpPr>
-          <p:nvPr/>
-        </p:nvSpPr>
-        <p:spPr>
-          <a:xfrm>
+            <a:spLocks xmlns:a="http://schemas.openxmlformats.org/drawingml/2006/main" noGrp="1"/>
+          </p:cNvSpPr>
+          <p:nvPr/>
+        </p:nvSpPr>
+        <p:spPr>
+          <a:xfrm xmlns:a="http://schemas.openxmlformats.org/drawingml/2006/main">
             <a:off x="428625" y="4686300"/>
             <a:ext cx="2124075" cy="257175"/>
           </a:xfrm>
-          <a:prstGeom prst="rect">
-            <a:avLst/>
-          </a:prstGeom>
-          <a:noFill/>
-          <a:ln w="0">
-            <a:noFill/>
-          </a:ln>
-        </p:spPr>
-        <p:txBody>
-          <a:bodyPr anchor="ctr"/>
-          <a:lstStyle/>
-          <a:p>
-            <a:pPr>
+          <a:prstGeom xmlns:a="http://schemas.openxmlformats.org/drawingml/2006/main" prst="rect">
+            <a:avLst/>
+          </a:prstGeom>
+          <a:noFill xmlns:a="http://schemas.openxmlformats.org/drawingml/2006/main"/>
+          <a:ln xmlns:a="http://schemas.openxmlformats.org/drawingml/2006/main" w="0">
+            <a:noFill/>
+          </a:ln>
+        </p:spPr>
+        <p:txBody>
+          <a:bodyPr xmlns:a="http://schemas.openxmlformats.org/drawingml/2006/main" anchor="ctr"/>
+          <a:lstStyle xmlns:a="http://schemas.openxmlformats.org/drawingml/2006/main"/>
+          <a:p xmlns:a="http://schemas.openxmlformats.org/drawingml/2006/main">
+            <a:pPr>
+              <a:buNone/>
               <a:defRPr sz="1200" b="1">
                 <a:solidFill>
                   <a:srgbClr val="D9A441"/>
@@ -1463,35 +1921,36 @@
       <p:sp>
         <p:nvSpPr>
           <p:cNvPr id="13" name="Rectángulo 12">
-            <a:extLst>
+            <a:extLst xmlns:a="http://schemas.openxmlformats.org/drawingml/2006/main">
               <a:ext uri="{FF2B5EF4-FFF2-40B4-BE49-F238E27FC236}">
                 <a16:creationId xmlns:a16="http://schemas.microsoft.com/office/drawing/2014/main" id="{73132C27-ABFD-4365-B43B-986B5714A5FA}"/>
               </a:ext>
             </a:extLst>
           </p:cNvPr>
           <p:cNvSpPr>
-            <a:spLocks noGrp="1"/>
-          </p:cNvSpPr>
-          <p:nvPr/>
-        </p:nvSpPr>
-        <p:spPr>
-          <a:xfrm>
+            <a:spLocks xmlns:a="http://schemas.openxmlformats.org/drawingml/2006/main" noGrp="1"/>
+          </p:cNvSpPr>
+          <p:nvPr/>
+        </p:nvSpPr>
+        <p:spPr>
+          <a:xfrm xmlns:a="http://schemas.openxmlformats.org/drawingml/2006/main">
             <a:off x="428625" y="4981575"/>
             <a:ext cx="2124075" cy="457200"/>
           </a:xfrm>
-          <a:prstGeom prst="rect">
-            <a:avLst/>
-          </a:prstGeom>
-          <a:noFill/>
-          <a:ln w="0">
-            <a:noFill/>
-          </a:ln>
-        </p:spPr>
-        <p:txBody>
-          <a:bodyPr anchor="ctr"/>
-          <a:lstStyle/>
-          <a:p>
-            <a:pPr>
+          <a:prstGeom xmlns:a="http://schemas.openxmlformats.org/drawingml/2006/main" prst="rect">
+            <a:avLst/>
+          </a:prstGeom>
+          <a:noFill xmlns:a="http://schemas.openxmlformats.org/drawingml/2006/main"/>
+          <a:ln xmlns:a="http://schemas.openxmlformats.org/drawingml/2006/main" w="0">
+            <a:noFill/>
+          </a:ln>
+        </p:spPr>
+        <p:txBody>
+          <a:bodyPr xmlns:a="http://schemas.openxmlformats.org/drawingml/2006/main" anchor="ctr"/>
+          <a:lstStyle xmlns:a="http://schemas.openxmlformats.org/drawingml/2006/main"/>
+          <a:p xmlns:a="http://schemas.openxmlformats.org/drawingml/2006/main">
+            <a:pPr>
+              <a:buNone/>
               <a:defRPr sz="1125" b="1">
                 <a:solidFill>
                   <a:srgbClr val="FFFFFF"/>
@@ -1507,8 +1966,9 @@
               <a:t>Derrotas, puertas cerradas,</a:t>
             </a:r>
           </a:p>
-          <a:p>
-            <a:pPr>
+          <a:p xmlns:a="http://schemas.openxmlformats.org/drawingml/2006/main">
+            <a:pPr>
+              <a:buNone/>
               <a:defRPr sz="1125" b="1">
                 <a:solidFill>
                   <a:srgbClr val="FFFFFF"/>
@@ -1529,27 +1989,27 @@
       <p:sp>
         <p:nvSpPr>
           <p:cNvPr id="14" name="Conector recto 13">
-            <a:extLst>
+            <a:extLst xmlns:a="http://schemas.openxmlformats.org/drawingml/2006/main">
               <a:ext uri="{FF2B5EF4-FFF2-40B4-BE49-F238E27FC236}">
                 <a16:creationId xmlns:a16="http://schemas.microsoft.com/office/drawing/2014/main" id="{743C9350-C4A1-4490-AD9D-DD5C3BAC772D}"/>
               </a:ext>
             </a:extLst>
           </p:cNvPr>
           <p:cNvSpPr>
-            <a:spLocks noGrp="1"/>
-          </p:cNvSpPr>
-          <p:nvPr/>
-        </p:nvSpPr>
-        <p:spPr>
-          <a:xfrm>
+            <a:spLocks xmlns:a="http://schemas.openxmlformats.org/drawingml/2006/main" noGrp="1"/>
+          </p:cNvSpPr>
+          <p:nvPr/>
+        </p:nvSpPr>
+        <p:spPr>
+          <a:xfrm xmlns:a="http://schemas.openxmlformats.org/drawingml/2006/main">
             <a:off x="428625" y="5505450"/>
             <a:ext cx="2009775" cy="9525"/>
           </a:xfrm>
-          <a:prstGeom prst="line">
-            <a:avLst/>
-          </a:prstGeom>
-          <a:noFill/>
-          <a:ln w="9525">
+          <a:prstGeom xmlns:a="http://schemas.openxmlformats.org/drawingml/2006/main" prst="line">
+            <a:avLst/>
+          </a:prstGeom>
+          <a:noFill xmlns:a="http://schemas.openxmlformats.org/drawingml/2006/main"/>
+          <a:ln xmlns:a="http://schemas.openxmlformats.org/drawingml/2006/main" w="9525">
             <a:solidFill>
               <a:srgbClr val="6E858D"/>
             </a:solidFill>
@@ -1560,35 +2020,36 @@
       <p:sp>
         <p:nvSpPr>
           <p:cNvPr id="15" name="Rectángulo 14">
-            <a:extLst>
+            <a:extLst xmlns:a="http://schemas.openxmlformats.org/drawingml/2006/main">
               <a:ext uri="{FF2B5EF4-FFF2-40B4-BE49-F238E27FC236}">
                 <a16:creationId xmlns:a16="http://schemas.microsoft.com/office/drawing/2014/main" id="{1D8BD664-2AAB-48D3-BBB2-62EFB4D7A226}"/>
               </a:ext>
             </a:extLst>
           </p:cNvPr>
           <p:cNvSpPr>
-            <a:spLocks noGrp="1"/>
-          </p:cNvSpPr>
-          <p:nvPr/>
-        </p:nvSpPr>
-        <p:spPr>
-          <a:xfrm>
+            <a:spLocks xmlns:a="http://schemas.openxmlformats.org/drawingml/2006/main" noGrp="1"/>
+          </p:cNvSpPr>
+          <p:nvPr/>
+        </p:nvSpPr>
+        <p:spPr>
+          <a:xfrm xmlns:a="http://schemas.openxmlformats.org/drawingml/2006/main">
             <a:off x="428625" y="5572125"/>
             <a:ext cx="2124075" cy="533400"/>
           </a:xfrm>
-          <a:prstGeom prst="rect">
-            <a:avLst/>
-          </a:prstGeom>
-          <a:noFill/>
-          <a:ln w="0">
-            <a:noFill/>
-          </a:ln>
-        </p:spPr>
-        <p:txBody>
-          <a:bodyPr anchor="ctr"/>
-          <a:lstStyle/>
-          <a:p>
-            <a:pPr>
+          <a:prstGeom xmlns:a="http://schemas.openxmlformats.org/drawingml/2006/main" prst="rect">
+            <a:avLst/>
+          </a:prstGeom>
+          <a:noFill xmlns:a="http://schemas.openxmlformats.org/drawingml/2006/main"/>
+          <a:ln xmlns:a="http://schemas.openxmlformats.org/drawingml/2006/main" w="0">
+            <a:noFill/>
+          </a:ln>
+        </p:spPr>
+        <p:txBody>
+          <a:bodyPr xmlns:a="http://schemas.openxmlformats.org/drawingml/2006/main" anchor="ctr"/>
+          <a:lstStyle xmlns:a="http://schemas.openxmlformats.org/drawingml/2006/main"/>
+          <a:p xmlns:a="http://schemas.openxmlformats.org/drawingml/2006/main">
+            <a:pPr>
+              <a:buNone/>
               <a:defRPr sz="1050" b="0">
                 <a:solidFill>
                   <a:srgbClr val="DCE3E3"/>
@@ -1604,8 +2065,9 @@
               <a:t>La mirada humana confunde</a:t>
             </a:r>
           </a:p>
-          <a:p>
-            <a:pPr>
+          <a:p xmlns:a="http://schemas.openxmlformats.org/drawingml/2006/main">
+            <a:pPr>
+              <a:buNone/>
               <a:defRPr sz="1050" b="0">
                 <a:solidFill>
                   <a:srgbClr val="DCE3E3"/>
@@ -1626,29 +2088,29 @@
       <p:sp>
         <p:nvSpPr>
           <p:cNvPr id="16" name="Elipse 15">
-            <a:extLst>
+            <a:extLst xmlns:a="http://schemas.openxmlformats.org/drawingml/2006/main">
               <a:ext uri="{FF2B5EF4-FFF2-40B4-BE49-F238E27FC236}">
                 <a16:creationId xmlns:a16="http://schemas.microsoft.com/office/drawing/2014/main" id="{B66FFF91-9CA2-4037-A956-A2DE54CB47C7}"/>
               </a:ext>
             </a:extLst>
           </p:cNvPr>
           <p:cNvSpPr>
-            <a:spLocks noGrp="1"/>
-          </p:cNvSpPr>
-          <p:nvPr/>
-        </p:nvSpPr>
-        <p:spPr>
-          <a:xfrm>
+            <a:spLocks xmlns:a="http://schemas.openxmlformats.org/drawingml/2006/main" noGrp="1"/>
+          </p:cNvSpPr>
+          <p:nvPr/>
+        </p:nvSpPr>
+        <p:spPr>
+          <a:xfrm xmlns:a="http://schemas.openxmlformats.org/drawingml/2006/main">
             <a:off x="2733675" y="4486275"/>
             <a:ext cx="228600" cy="228600"/>
           </a:xfrm>
-          <a:prstGeom prst="ellipse">
-            <a:avLst/>
-          </a:prstGeom>
-          <a:solidFill>
+          <a:prstGeom xmlns:a="http://schemas.openxmlformats.org/drawingml/2006/main" prst="ellipse">
+            <a:avLst/>
+          </a:prstGeom>
+          <a:solidFill xmlns:a="http://schemas.openxmlformats.org/drawingml/2006/main">
             <a:srgbClr val="D9A441"/>
           </a:solidFill>
-          <a:ln w="9525">
+          <a:ln xmlns:a="http://schemas.openxmlformats.org/drawingml/2006/main" w="9525">
             <a:solidFill>
               <a:srgbClr val="F5E7C3"/>
             </a:solidFill>
@@ -1658,35 +2120,36 @@
       <p:sp>
         <p:nvSpPr>
           <p:cNvPr id="17" name="Rectángulo 16">
-            <a:extLst>
+            <a:extLst xmlns:a="http://schemas.openxmlformats.org/drawingml/2006/main">
               <a:ext uri="{FF2B5EF4-FFF2-40B4-BE49-F238E27FC236}">
                 <a16:creationId xmlns:a16="http://schemas.microsoft.com/office/drawing/2014/main" id="{3DE679FA-D2A8-430A-B3B4-C3932A72B274}"/>
               </a:ext>
             </a:extLst>
           </p:cNvPr>
           <p:cNvSpPr>
-            <a:spLocks noGrp="1"/>
-          </p:cNvSpPr>
-          <p:nvPr/>
-        </p:nvSpPr>
-        <p:spPr>
-          <a:xfrm>
+            <a:spLocks xmlns:a="http://schemas.openxmlformats.org/drawingml/2006/main" noGrp="1"/>
+          </p:cNvSpPr>
+          <p:nvPr/>
+        </p:nvSpPr>
+        <p:spPr>
+          <a:xfrm xmlns:a="http://schemas.openxmlformats.org/drawingml/2006/main">
             <a:off x="2733675" y="4495800"/>
             <a:ext cx="228600" cy="209550"/>
           </a:xfrm>
-          <a:prstGeom prst="rect">
-            <a:avLst/>
-          </a:prstGeom>
-          <a:noFill/>
-          <a:ln w="0">
-            <a:noFill/>
-          </a:ln>
-        </p:spPr>
-        <p:txBody>
-          <a:bodyPr anchor="ctr"/>
-          <a:lstStyle/>
-          <a:p>
-            <a:pPr>
+          <a:prstGeom xmlns:a="http://schemas.openxmlformats.org/drawingml/2006/main" prst="rect">
+            <a:avLst/>
+          </a:prstGeom>
+          <a:noFill xmlns:a="http://schemas.openxmlformats.org/drawingml/2006/main"/>
+          <a:ln xmlns:a="http://schemas.openxmlformats.org/drawingml/2006/main" w="0">
+            <a:noFill/>
+          </a:ln>
+        </p:spPr>
+        <p:txBody>
+          <a:bodyPr xmlns:a="http://schemas.openxmlformats.org/drawingml/2006/main" anchor="ctr"/>
+          <a:lstStyle xmlns:a="http://schemas.openxmlformats.org/drawingml/2006/main"/>
+          <a:p xmlns:a="http://schemas.openxmlformats.org/drawingml/2006/main">
+            <a:pPr>
+              <a:buNone/>
               <a:defRPr sz="750" b="1">
                 <a:solidFill>
                   <a:srgbClr val="07151F"/>
@@ -1707,35 +2170,36 @@
       <p:sp>
         <p:nvSpPr>
           <p:cNvPr id="18" name="Rectángulo 17">
-            <a:extLst>
+            <a:extLst xmlns:a="http://schemas.openxmlformats.org/drawingml/2006/main">
               <a:ext uri="{FF2B5EF4-FFF2-40B4-BE49-F238E27FC236}">
                 <a16:creationId xmlns:a16="http://schemas.microsoft.com/office/drawing/2014/main" id="{C6E15EEF-3684-4338-8BA0-DF2F682EFD08}"/>
               </a:ext>
             </a:extLst>
           </p:cNvPr>
           <p:cNvSpPr>
-            <a:spLocks noGrp="1"/>
-          </p:cNvSpPr>
-          <p:nvPr/>
-        </p:nvSpPr>
-        <p:spPr>
-          <a:xfrm>
+            <a:spLocks xmlns:a="http://schemas.openxmlformats.org/drawingml/2006/main" noGrp="1"/>
+          </p:cNvSpPr>
+          <p:nvPr/>
+        </p:nvSpPr>
+        <p:spPr>
+          <a:xfrm xmlns:a="http://schemas.openxmlformats.org/drawingml/2006/main">
             <a:off x="2724150" y="4686300"/>
             <a:ext cx="2124075" cy="257175"/>
           </a:xfrm>
-          <a:prstGeom prst="rect">
-            <a:avLst/>
-          </a:prstGeom>
-          <a:noFill/>
-          <a:ln w="0">
-            <a:noFill/>
-          </a:ln>
-        </p:spPr>
-        <p:txBody>
-          <a:bodyPr anchor="ctr"/>
-          <a:lstStyle/>
-          <a:p>
-            <a:pPr>
+          <a:prstGeom xmlns:a="http://schemas.openxmlformats.org/drawingml/2006/main" prst="rect">
+            <a:avLst/>
+          </a:prstGeom>
+          <a:noFill xmlns:a="http://schemas.openxmlformats.org/drawingml/2006/main"/>
+          <a:ln xmlns:a="http://schemas.openxmlformats.org/drawingml/2006/main" w="0">
+            <a:noFill/>
+          </a:ln>
+        </p:spPr>
+        <p:txBody>
+          <a:bodyPr xmlns:a="http://schemas.openxmlformats.org/drawingml/2006/main" anchor="ctr"/>
+          <a:lstStyle xmlns:a="http://schemas.openxmlformats.org/drawingml/2006/main"/>
+          <a:p xmlns:a="http://schemas.openxmlformats.org/drawingml/2006/main">
+            <a:pPr>
+              <a:buNone/>
               <a:defRPr sz="1200" b="1">
                 <a:solidFill>
                   <a:srgbClr val="D9A441"/>
@@ -1756,35 +2220,36 @@
       <p:sp>
         <p:nvSpPr>
           <p:cNvPr id="19" name="Rectángulo 18">
-            <a:extLst>
+            <a:extLst xmlns:a="http://schemas.openxmlformats.org/drawingml/2006/main">
               <a:ext uri="{FF2B5EF4-FFF2-40B4-BE49-F238E27FC236}">
                 <a16:creationId xmlns:a16="http://schemas.microsoft.com/office/drawing/2014/main" id="{C5A39A7D-9CD1-42F2-A7DB-5F0014AC231C}"/>
               </a:ext>
             </a:extLst>
           </p:cNvPr>
           <p:cNvSpPr>
-            <a:spLocks noGrp="1"/>
-          </p:cNvSpPr>
-          <p:nvPr/>
-        </p:nvSpPr>
-        <p:spPr>
-          <a:xfrm>
+            <a:spLocks xmlns:a="http://schemas.openxmlformats.org/drawingml/2006/main" noGrp="1"/>
+          </p:cNvSpPr>
+          <p:nvPr/>
+        </p:nvSpPr>
+        <p:spPr>
+          <a:xfrm xmlns:a="http://schemas.openxmlformats.org/drawingml/2006/main">
             <a:off x="2724150" y="4981575"/>
             <a:ext cx="2124075" cy="457200"/>
           </a:xfrm>
-          <a:prstGeom prst="rect">
-            <a:avLst/>
-          </a:prstGeom>
-          <a:noFill/>
-          <a:ln w="0">
-            <a:noFill/>
-          </a:ln>
-        </p:spPr>
-        <p:txBody>
-          <a:bodyPr anchor="ctr"/>
-          <a:lstStyle/>
-          <a:p>
-            <a:pPr>
+          <a:prstGeom xmlns:a="http://schemas.openxmlformats.org/drawingml/2006/main" prst="rect">
+            <a:avLst/>
+          </a:prstGeom>
+          <a:noFill xmlns:a="http://schemas.openxmlformats.org/drawingml/2006/main"/>
+          <a:ln xmlns:a="http://schemas.openxmlformats.org/drawingml/2006/main" w="0">
+            <a:noFill/>
+          </a:ln>
+        </p:spPr>
+        <p:txBody>
+          <a:bodyPr xmlns:a="http://schemas.openxmlformats.org/drawingml/2006/main" anchor="ctr"/>
+          <a:lstStyle xmlns:a="http://schemas.openxmlformats.org/drawingml/2006/main"/>
+          <a:p xmlns:a="http://schemas.openxmlformats.org/drawingml/2006/main">
+            <a:pPr>
+              <a:buNone/>
               <a:defRPr sz="1125" b="1">
                 <a:solidFill>
                   <a:srgbClr val="FFFFFF"/>
@@ -1800,8 +2265,9 @@
               <a:t>Dios siembra, llama,</a:t>
             </a:r>
           </a:p>
-          <a:p>
-            <a:pPr>
+          <a:p xmlns:a="http://schemas.openxmlformats.org/drawingml/2006/main">
+            <a:pPr>
+              <a:buNone/>
               <a:defRPr sz="1125" b="1">
                 <a:solidFill>
                   <a:srgbClr val="FFFFFF"/>
@@ -1822,27 +2288,27 @@
       <p:sp>
         <p:nvSpPr>
           <p:cNvPr id="20" name="Conector recto 19">
-            <a:extLst>
+            <a:extLst xmlns:a="http://schemas.openxmlformats.org/drawingml/2006/main">
               <a:ext uri="{FF2B5EF4-FFF2-40B4-BE49-F238E27FC236}">
                 <a16:creationId xmlns:a16="http://schemas.microsoft.com/office/drawing/2014/main" id="{C915E308-4F55-4006-BE35-D83ACB192400}"/>
               </a:ext>
             </a:extLst>
           </p:cNvPr>
           <p:cNvSpPr>
-            <a:spLocks noGrp="1"/>
-          </p:cNvSpPr>
-          <p:nvPr/>
-        </p:nvSpPr>
-        <p:spPr>
-          <a:xfrm>
+            <a:spLocks xmlns:a="http://schemas.openxmlformats.org/drawingml/2006/main" noGrp="1"/>
+          </p:cNvSpPr>
+          <p:nvPr/>
+        </p:nvSpPr>
+        <p:spPr>
+          <a:xfrm xmlns:a="http://schemas.openxmlformats.org/drawingml/2006/main">
             <a:off x="2724150" y="5505450"/>
             <a:ext cx="2009775" cy="9525"/>
           </a:xfrm>
-          <a:prstGeom prst="line">
-            <a:avLst/>
-          </a:prstGeom>
-          <a:noFill/>
-          <a:ln w="9525">
+          <a:prstGeom xmlns:a="http://schemas.openxmlformats.org/drawingml/2006/main" prst="line">
+            <a:avLst/>
+          </a:prstGeom>
+          <a:noFill xmlns:a="http://schemas.openxmlformats.org/drawingml/2006/main"/>
+          <a:ln xmlns:a="http://schemas.openxmlformats.org/drawingml/2006/main" w="9525">
             <a:solidFill>
               <a:srgbClr val="6E858D"/>
             </a:solidFill>
@@ -1853,35 +2319,36 @@
       <p:sp>
         <p:nvSpPr>
           <p:cNvPr id="21" name="Rectángulo 20">
-            <a:extLst>
+            <a:extLst xmlns:a="http://schemas.openxmlformats.org/drawingml/2006/main">
               <a:ext uri="{FF2B5EF4-FFF2-40B4-BE49-F238E27FC236}">
                 <a16:creationId xmlns:a16="http://schemas.microsoft.com/office/drawing/2014/main" id="{CEE927DE-097C-47A0-8B22-8024ECD0F3DD}"/>
               </a:ext>
             </a:extLst>
           </p:cNvPr>
           <p:cNvSpPr>
-            <a:spLocks noGrp="1"/>
-          </p:cNvSpPr>
-          <p:nvPr/>
-        </p:nvSpPr>
-        <p:spPr>
-          <a:xfrm>
+            <a:spLocks xmlns:a="http://schemas.openxmlformats.org/drawingml/2006/main" noGrp="1"/>
+          </p:cNvSpPr>
+          <p:nvPr/>
+        </p:nvSpPr>
+        <p:spPr>
+          <a:xfrm xmlns:a="http://schemas.openxmlformats.org/drawingml/2006/main">
             <a:off x="2724150" y="5572125"/>
             <a:ext cx="2124075" cy="533400"/>
           </a:xfrm>
-          <a:prstGeom prst="rect">
-            <a:avLst/>
-          </a:prstGeom>
-          <a:noFill/>
-          <a:ln w="0">
-            <a:noFill/>
-          </a:ln>
-        </p:spPr>
-        <p:txBody>
-          <a:bodyPr anchor="ctr"/>
-          <a:lstStyle/>
-          <a:p>
-            <a:pPr>
+          <a:prstGeom xmlns:a="http://schemas.openxmlformats.org/drawingml/2006/main" prst="rect">
+            <a:avLst/>
+          </a:prstGeom>
+          <a:noFill xmlns:a="http://schemas.openxmlformats.org/drawingml/2006/main"/>
+          <a:ln xmlns:a="http://schemas.openxmlformats.org/drawingml/2006/main" w="0">
+            <a:noFill/>
+          </a:ln>
+        </p:spPr>
+        <p:txBody>
+          <a:bodyPr xmlns:a="http://schemas.openxmlformats.org/drawingml/2006/main" anchor="ctr"/>
+          <a:lstStyle xmlns:a="http://schemas.openxmlformats.org/drawingml/2006/main"/>
+          <a:p xmlns:a="http://schemas.openxmlformats.org/drawingml/2006/main">
+            <a:pPr>
+              <a:buNone/>
               <a:defRPr sz="1050" b="0">
                 <a:solidFill>
                   <a:srgbClr val="DCE3E3"/>
@@ -1897,8 +2364,9 @@
               <a:t>La gracia comienza antes</a:t>
             </a:r>
           </a:p>
-          <a:p>
-            <a:pPr>
+          <a:p xmlns:a="http://schemas.openxmlformats.org/drawingml/2006/main">
+            <a:pPr>
+              <a:buNone/>
               <a:defRPr sz="1050" b="0">
                 <a:solidFill>
                   <a:srgbClr val="DCE3E3"/>
@@ -1919,29 +2387,29 @@
       <p:sp>
         <p:nvSpPr>
           <p:cNvPr id="22" name="Elipse 21">
-            <a:extLst>
+            <a:extLst xmlns:a="http://schemas.openxmlformats.org/drawingml/2006/main">
               <a:ext uri="{FF2B5EF4-FFF2-40B4-BE49-F238E27FC236}">
                 <a16:creationId xmlns:a16="http://schemas.microsoft.com/office/drawing/2014/main" id="{26BBFF55-7514-457A-AE5C-C740E04E88B6}"/>
               </a:ext>
             </a:extLst>
           </p:cNvPr>
           <p:cNvSpPr>
-            <a:spLocks noGrp="1"/>
-          </p:cNvSpPr>
-          <p:nvPr/>
-        </p:nvSpPr>
-        <p:spPr>
-          <a:xfrm>
+            <a:spLocks xmlns:a="http://schemas.openxmlformats.org/drawingml/2006/main" noGrp="1"/>
+          </p:cNvSpPr>
+          <p:nvPr/>
+        </p:nvSpPr>
+        <p:spPr>
+          <a:xfrm xmlns:a="http://schemas.openxmlformats.org/drawingml/2006/main">
             <a:off x="5029200" y="4486275"/>
             <a:ext cx="228600" cy="228600"/>
           </a:xfrm>
-          <a:prstGeom prst="ellipse">
-            <a:avLst/>
-          </a:prstGeom>
-          <a:solidFill>
+          <a:prstGeom xmlns:a="http://schemas.openxmlformats.org/drawingml/2006/main" prst="ellipse">
+            <a:avLst/>
+          </a:prstGeom>
+          <a:solidFill xmlns:a="http://schemas.openxmlformats.org/drawingml/2006/main">
             <a:srgbClr val="D9A441"/>
           </a:solidFill>
-          <a:ln w="9525">
+          <a:ln xmlns:a="http://schemas.openxmlformats.org/drawingml/2006/main" w="9525">
             <a:solidFill>
               <a:srgbClr val="F5E7C3"/>
             </a:solidFill>
@@ -1951,35 +2419,36 @@
       <p:sp>
         <p:nvSpPr>
           <p:cNvPr id="23" name="Rectángulo 22">
-            <a:extLst>
+            <a:extLst xmlns:a="http://schemas.openxmlformats.org/drawingml/2006/main">
               <a:ext uri="{FF2B5EF4-FFF2-40B4-BE49-F238E27FC236}">
                 <a16:creationId xmlns:a16="http://schemas.microsoft.com/office/drawing/2014/main" id="{B5775468-8B8E-4ABF-B92E-67DADC5F8167}"/>
               </a:ext>
             </a:extLst>
           </p:cNvPr>
           <p:cNvSpPr>
-            <a:spLocks noGrp="1"/>
-          </p:cNvSpPr>
-          <p:nvPr/>
-        </p:nvSpPr>
-        <p:spPr>
-          <a:xfrm>
+            <a:spLocks xmlns:a="http://schemas.openxmlformats.org/drawingml/2006/main" noGrp="1"/>
+          </p:cNvSpPr>
+          <p:nvPr/>
+        </p:nvSpPr>
+        <p:spPr>
+          <a:xfrm xmlns:a="http://schemas.openxmlformats.org/drawingml/2006/main">
             <a:off x="5029200" y="4495800"/>
             <a:ext cx="228600" cy="209550"/>
           </a:xfrm>
-          <a:prstGeom prst="rect">
-            <a:avLst/>
-          </a:prstGeom>
-          <a:noFill/>
-          <a:ln w="0">
-            <a:noFill/>
-          </a:ln>
-        </p:spPr>
-        <p:txBody>
-          <a:bodyPr anchor="ctr"/>
-          <a:lstStyle/>
-          <a:p>
-            <a:pPr>
+          <a:prstGeom xmlns:a="http://schemas.openxmlformats.org/drawingml/2006/main" prst="rect">
+            <a:avLst/>
+          </a:prstGeom>
+          <a:noFill xmlns:a="http://schemas.openxmlformats.org/drawingml/2006/main"/>
+          <a:ln xmlns:a="http://schemas.openxmlformats.org/drawingml/2006/main" w="0">
+            <a:noFill/>
+          </a:ln>
+        </p:spPr>
+        <p:txBody>
+          <a:bodyPr xmlns:a="http://schemas.openxmlformats.org/drawingml/2006/main" anchor="ctr"/>
+          <a:lstStyle xmlns:a="http://schemas.openxmlformats.org/drawingml/2006/main"/>
+          <a:p xmlns:a="http://schemas.openxmlformats.org/drawingml/2006/main">
+            <a:pPr>
+              <a:buNone/>
               <a:defRPr sz="750" b="1">
                 <a:solidFill>
                   <a:srgbClr val="07151F"/>
@@ -2000,35 +2469,36 @@
       <p:sp>
         <p:nvSpPr>
           <p:cNvPr id="24" name="Rectángulo 23">
-            <a:extLst>
+            <a:extLst xmlns:a="http://schemas.openxmlformats.org/drawingml/2006/main">
               <a:ext uri="{FF2B5EF4-FFF2-40B4-BE49-F238E27FC236}">
                 <a16:creationId xmlns:a16="http://schemas.microsoft.com/office/drawing/2014/main" id="{D935F955-A505-483F-A10A-C7C65AD1F56D}"/>
               </a:ext>
             </a:extLst>
           </p:cNvPr>
           <p:cNvSpPr>
-            <a:spLocks noGrp="1"/>
-          </p:cNvSpPr>
-          <p:nvPr/>
-        </p:nvSpPr>
-        <p:spPr>
-          <a:xfrm>
+            <a:spLocks xmlns:a="http://schemas.openxmlformats.org/drawingml/2006/main" noGrp="1"/>
+          </p:cNvSpPr>
+          <p:nvPr/>
+        </p:nvSpPr>
+        <p:spPr>
+          <a:xfrm xmlns:a="http://schemas.openxmlformats.org/drawingml/2006/main">
             <a:off x="5019675" y="4686300"/>
             <a:ext cx="2124075" cy="257175"/>
           </a:xfrm>
-          <a:prstGeom prst="rect">
-            <a:avLst/>
-          </a:prstGeom>
-          <a:noFill/>
-          <a:ln w="0">
-            <a:noFill/>
-          </a:ln>
-        </p:spPr>
-        <p:txBody>
-          <a:bodyPr anchor="ctr"/>
-          <a:lstStyle/>
-          <a:p>
-            <a:pPr>
+          <a:prstGeom xmlns:a="http://schemas.openxmlformats.org/drawingml/2006/main" prst="rect">
+            <a:avLst/>
+          </a:prstGeom>
+          <a:noFill xmlns:a="http://schemas.openxmlformats.org/drawingml/2006/main"/>
+          <a:ln xmlns:a="http://schemas.openxmlformats.org/drawingml/2006/main" w="0">
+            <a:noFill/>
+          </a:ln>
+        </p:spPr>
+        <p:txBody>
+          <a:bodyPr xmlns:a="http://schemas.openxmlformats.org/drawingml/2006/main" anchor="ctr"/>
+          <a:lstStyle xmlns:a="http://schemas.openxmlformats.org/drawingml/2006/main"/>
+          <a:p xmlns:a="http://schemas.openxmlformats.org/drawingml/2006/main">
+            <a:pPr>
+              <a:buNone/>
               <a:defRPr sz="1200" b="1">
                 <a:solidFill>
                   <a:srgbClr val="D9A441"/>
@@ -2049,35 +2519,36 @@
       <p:sp>
         <p:nvSpPr>
           <p:cNvPr id="25" name="Rectángulo 24">
-            <a:extLst>
+            <a:extLst xmlns:a="http://schemas.openxmlformats.org/drawingml/2006/main">
               <a:ext uri="{FF2B5EF4-FFF2-40B4-BE49-F238E27FC236}">
                 <a16:creationId xmlns:a16="http://schemas.microsoft.com/office/drawing/2014/main" id="{B35129EB-3FA7-4669-BF9F-26DE8F4BD2F2}"/>
               </a:ext>
             </a:extLst>
           </p:cNvPr>
           <p:cNvSpPr>
-            <a:spLocks noGrp="1"/>
-          </p:cNvSpPr>
-          <p:nvPr/>
-        </p:nvSpPr>
-        <p:spPr>
-          <a:xfrm>
+            <a:spLocks xmlns:a="http://schemas.openxmlformats.org/drawingml/2006/main" noGrp="1"/>
+          </p:cNvSpPr>
+          <p:nvPr/>
+        </p:nvSpPr>
+        <p:spPr>
+          <a:xfrm xmlns:a="http://schemas.openxmlformats.org/drawingml/2006/main">
             <a:off x="5019675" y="4981575"/>
             <a:ext cx="2124075" cy="457200"/>
           </a:xfrm>
-          <a:prstGeom prst="rect">
-            <a:avLst/>
-          </a:prstGeom>
-          <a:noFill/>
-          <a:ln w="0">
-            <a:noFill/>
-          </a:ln>
-        </p:spPr>
-        <p:txBody>
-          <a:bodyPr anchor="ctr"/>
-          <a:lstStyle/>
-          <a:p>
-            <a:pPr>
+          <a:prstGeom xmlns:a="http://schemas.openxmlformats.org/drawingml/2006/main" prst="rect">
+            <a:avLst/>
+          </a:prstGeom>
+          <a:noFill xmlns:a="http://schemas.openxmlformats.org/drawingml/2006/main"/>
+          <a:ln xmlns:a="http://schemas.openxmlformats.org/drawingml/2006/main" w="0">
+            <a:noFill/>
+          </a:ln>
+        </p:spPr>
+        <p:txBody>
+          <a:bodyPr xmlns:a="http://schemas.openxmlformats.org/drawingml/2006/main" anchor="ctr"/>
+          <a:lstStyle xmlns:a="http://schemas.openxmlformats.org/drawingml/2006/main"/>
+          <a:p xmlns:a="http://schemas.openxmlformats.org/drawingml/2006/main">
+            <a:pPr>
+              <a:buNone/>
               <a:defRPr sz="1125" b="1">
                 <a:solidFill>
                   <a:srgbClr val="FFFFFF"/>
@@ -2093,8 +2564,9 @@
               <a:t>La semilla trabaja</a:t>
             </a:r>
           </a:p>
-          <a:p>
-            <a:pPr>
+          <a:p xmlns:a="http://schemas.openxmlformats.org/drawingml/2006/main">
+            <a:pPr>
+              <a:buNone/>
               <a:defRPr sz="1125" b="1">
                 <a:solidFill>
                   <a:srgbClr val="FFFFFF"/>
@@ -2115,27 +2587,27 @@
       <p:sp>
         <p:nvSpPr>
           <p:cNvPr id="26" name="Conector recto 25">
-            <a:extLst>
+            <a:extLst xmlns:a="http://schemas.openxmlformats.org/drawingml/2006/main">
               <a:ext uri="{FF2B5EF4-FFF2-40B4-BE49-F238E27FC236}">
                 <a16:creationId xmlns:a16="http://schemas.microsoft.com/office/drawing/2014/main" id="{7679B2FF-34E5-4D19-851E-EC869FF001DC}"/>
               </a:ext>
             </a:extLst>
           </p:cNvPr>
           <p:cNvSpPr>
-            <a:spLocks noGrp="1"/>
-          </p:cNvSpPr>
-          <p:nvPr/>
-        </p:nvSpPr>
-        <p:spPr>
-          <a:xfrm>
+            <a:spLocks xmlns:a="http://schemas.openxmlformats.org/drawingml/2006/main" noGrp="1"/>
+          </p:cNvSpPr>
+          <p:nvPr/>
+        </p:nvSpPr>
+        <p:spPr>
+          <a:xfrm xmlns:a="http://schemas.openxmlformats.org/drawingml/2006/main">
             <a:off x="5019675" y="5505450"/>
             <a:ext cx="2009775" cy="9525"/>
           </a:xfrm>
-          <a:prstGeom prst="line">
-            <a:avLst/>
-          </a:prstGeom>
-          <a:noFill/>
-          <a:ln w="9525">
+          <a:prstGeom xmlns:a="http://schemas.openxmlformats.org/drawingml/2006/main" prst="line">
+            <a:avLst/>
+          </a:prstGeom>
+          <a:noFill xmlns:a="http://schemas.openxmlformats.org/drawingml/2006/main"/>
+          <a:ln xmlns:a="http://schemas.openxmlformats.org/drawingml/2006/main" w="9525">
             <a:solidFill>
               <a:srgbClr val="6E858D"/>
             </a:solidFill>
@@ -2146,35 +2618,36 @@
       <p:sp>
         <p:nvSpPr>
           <p:cNvPr id="27" name="Rectángulo 26">
-            <a:extLst>
+            <a:extLst xmlns:a="http://schemas.openxmlformats.org/drawingml/2006/main">
               <a:ext uri="{FF2B5EF4-FFF2-40B4-BE49-F238E27FC236}">
                 <a16:creationId xmlns:a16="http://schemas.microsoft.com/office/drawing/2014/main" id="{42D02D78-9FF2-44F5-B00A-5FE232E32BC7}"/>
               </a:ext>
             </a:extLst>
           </p:cNvPr>
           <p:cNvSpPr>
-            <a:spLocks noGrp="1"/>
-          </p:cNvSpPr>
-          <p:nvPr/>
-        </p:nvSpPr>
-        <p:spPr>
-          <a:xfrm>
+            <a:spLocks xmlns:a="http://schemas.openxmlformats.org/drawingml/2006/main" noGrp="1"/>
+          </p:cNvSpPr>
+          <p:nvPr/>
+        </p:nvSpPr>
+        <p:spPr>
+          <a:xfrm xmlns:a="http://schemas.openxmlformats.org/drawingml/2006/main">
             <a:off x="5019675" y="5572125"/>
             <a:ext cx="2124075" cy="533400"/>
           </a:xfrm>
-          <a:prstGeom prst="rect">
-            <a:avLst/>
-          </a:prstGeom>
-          <a:noFill/>
-          <a:ln w="0">
-            <a:noFill/>
-          </a:ln>
-        </p:spPr>
-        <p:txBody>
-          <a:bodyPr anchor="ctr"/>
-          <a:lstStyle/>
-          <a:p>
-            <a:pPr>
+          <a:prstGeom xmlns:a="http://schemas.openxmlformats.org/drawingml/2006/main" prst="rect">
+            <a:avLst/>
+          </a:prstGeom>
+          <a:noFill xmlns:a="http://schemas.openxmlformats.org/drawingml/2006/main"/>
+          <a:ln xmlns:a="http://schemas.openxmlformats.org/drawingml/2006/main" w="0">
+            <a:noFill/>
+          </a:ln>
+        </p:spPr>
+        <p:txBody>
+          <a:bodyPr xmlns:a="http://schemas.openxmlformats.org/drawingml/2006/main" anchor="ctr"/>
+          <a:lstStyle xmlns:a="http://schemas.openxmlformats.org/drawingml/2006/main"/>
+          <a:p xmlns:a="http://schemas.openxmlformats.org/drawingml/2006/main">
+            <a:pPr>
+              <a:buNone/>
               <a:defRPr sz="1050" b="0">
                 <a:solidFill>
                   <a:srgbClr val="DCE3E3"/>
@@ -2190,8 +2663,9 @@
               <a:t>Creer es confiar en procesos</a:t>
             </a:r>
           </a:p>
-          <a:p>
-            <a:pPr>
+          <a:p xmlns:a="http://schemas.openxmlformats.org/drawingml/2006/main">
+            <a:pPr>
+              <a:buNone/>
               <a:defRPr sz="1050" b="0">
                 <a:solidFill>
                   <a:srgbClr val="DCE3E3"/>
@@ -2212,29 +2686,29 @@
       <p:sp>
         <p:nvSpPr>
           <p:cNvPr id="28" name="Elipse 27">
-            <a:extLst>
+            <a:extLst xmlns:a="http://schemas.openxmlformats.org/drawingml/2006/main">
               <a:ext uri="{FF2B5EF4-FFF2-40B4-BE49-F238E27FC236}">
                 <a16:creationId xmlns:a16="http://schemas.microsoft.com/office/drawing/2014/main" id="{BE26EAC8-47A2-4607-BEFE-2460A2FFCF43}"/>
               </a:ext>
             </a:extLst>
           </p:cNvPr>
           <p:cNvSpPr>
-            <a:spLocks noGrp="1"/>
-          </p:cNvSpPr>
-          <p:nvPr/>
-        </p:nvSpPr>
-        <p:spPr>
-          <a:xfrm>
+            <a:spLocks xmlns:a="http://schemas.openxmlformats.org/drawingml/2006/main" noGrp="1"/>
+          </p:cNvSpPr>
+          <p:nvPr/>
+        </p:nvSpPr>
+        <p:spPr>
+          <a:xfrm xmlns:a="http://schemas.openxmlformats.org/drawingml/2006/main">
             <a:off x="7324725" y="4486275"/>
             <a:ext cx="228600" cy="228600"/>
           </a:xfrm>
-          <a:prstGeom prst="ellipse">
-            <a:avLst/>
-          </a:prstGeom>
-          <a:solidFill>
+          <a:prstGeom xmlns:a="http://schemas.openxmlformats.org/drawingml/2006/main" prst="ellipse">
+            <a:avLst/>
+          </a:prstGeom>
+          <a:solidFill xmlns:a="http://schemas.openxmlformats.org/drawingml/2006/main">
             <a:srgbClr val="D9A441"/>
           </a:solidFill>
-          <a:ln w="9525">
+          <a:ln xmlns:a="http://schemas.openxmlformats.org/drawingml/2006/main" w="9525">
             <a:solidFill>
               <a:srgbClr val="F5E7C3"/>
             </a:solidFill>
@@ -2244,35 +2718,36 @@
       <p:sp>
         <p:nvSpPr>
           <p:cNvPr id="29" name="Rectángulo 28">
-            <a:extLst>
+            <a:extLst xmlns:a="http://schemas.openxmlformats.org/drawingml/2006/main">
               <a:ext uri="{FF2B5EF4-FFF2-40B4-BE49-F238E27FC236}">
                 <a16:creationId xmlns:a16="http://schemas.microsoft.com/office/drawing/2014/main" id="{8B3C1128-2625-4751-800D-21D264F87A57}"/>
               </a:ext>
             </a:extLst>
           </p:cNvPr>
           <p:cNvSpPr>
-            <a:spLocks noGrp="1"/>
-          </p:cNvSpPr>
-          <p:nvPr/>
-        </p:nvSpPr>
-        <p:spPr>
-          <a:xfrm>
+            <a:spLocks xmlns:a="http://schemas.openxmlformats.org/drawingml/2006/main" noGrp="1"/>
+          </p:cNvSpPr>
+          <p:nvPr/>
+        </p:nvSpPr>
+        <p:spPr>
+          <a:xfrm xmlns:a="http://schemas.openxmlformats.org/drawingml/2006/main">
             <a:off x="7324725" y="4495800"/>
             <a:ext cx="228600" cy="209550"/>
           </a:xfrm>
-          <a:prstGeom prst="rect">
-            <a:avLst/>
-          </a:prstGeom>
-          <a:noFill/>
-          <a:ln w="0">
-            <a:noFill/>
-          </a:ln>
-        </p:spPr>
-        <p:txBody>
-          <a:bodyPr anchor="ctr"/>
-          <a:lstStyle/>
-          <a:p>
-            <a:pPr>
+          <a:prstGeom xmlns:a="http://schemas.openxmlformats.org/drawingml/2006/main" prst="rect">
+            <a:avLst/>
+          </a:prstGeom>
+          <a:noFill xmlns:a="http://schemas.openxmlformats.org/drawingml/2006/main"/>
+          <a:ln xmlns:a="http://schemas.openxmlformats.org/drawingml/2006/main" w="0">
+            <a:noFill/>
+          </a:ln>
+        </p:spPr>
+        <p:txBody>
+          <a:bodyPr xmlns:a="http://schemas.openxmlformats.org/drawingml/2006/main" anchor="ctr"/>
+          <a:lstStyle xmlns:a="http://schemas.openxmlformats.org/drawingml/2006/main"/>
+          <a:p xmlns:a="http://schemas.openxmlformats.org/drawingml/2006/main">
+            <a:pPr>
+              <a:buNone/>
               <a:defRPr sz="750" b="1">
                 <a:solidFill>
                   <a:srgbClr val="07151F"/>
@@ -2293,35 +2768,36 @@
       <p:sp>
         <p:nvSpPr>
           <p:cNvPr id="30" name="Rectángulo 29">
-            <a:extLst>
+            <a:extLst xmlns:a="http://schemas.openxmlformats.org/drawingml/2006/main">
               <a:ext uri="{FF2B5EF4-FFF2-40B4-BE49-F238E27FC236}">
                 <a16:creationId xmlns:a16="http://schemas.microsoft.com/office/drawing/2014/main" id="{02290257-ADD7-4E95-946B-FC1D86FB62AD}"/>
               </a:ext>
             </a:extLst>
           </p:cNvPr>
           <p:cNvSpPr>
-            <a:spLocks noGrp="1"/>
-          </p:cNvSpPr>
-          <p:nvPr/>
-        </p:nvSpPr>
-        <p:spPr>
-          <a:xfrm>
+            <a:spLocks xmlns:a="http://schemas.openxmlformats.org/drawingml/2006/main" noGrp="1"/>
+          </p:cNvSpPr>
+          <p:nvPr/>
+        </p:nvSpPr>
+        <p:spPr>
+          <a:xfrm xmlns:a="http://schemas.openxmlformats.org/drawingml/2006/main">
             <a:off x="7315200" y="4686300"/>
             <a:ext cx="2124075" cy="257175"/>
           </a:xfrm>
-          <a:prstGeom prst="rect">
-            <a:avLst/>
-          </a:prstGeom>
-          <a:noFill/>
-          <a:ln w="0">
-            <a:noFill/>
-          </a:ln>
-        </p:spPr>
-        <p:txBody>
-          <a:bodyPr anchor="ctr"/>
-          <a:lstStyle/>
-          <a:p>
-            <a:pPr>
+          <a:prstGeom xmlns:a="http://schemas.openxmlformats.org/drawingml/2006/main" prst="rect">
+            <a:avLst/>
+          </a:prstGeom>
+          <a:noFill xmlns:a="http://schemas.openxmlformats.org/drawingml/2006/main"/>
+          <a:ln xmlns:a="http://schemas.openxmlformats.org/drawingml/2006/main" w="0">
+            <a:noFill/>
+          </a:ln>
+        </p:spPr>
+        <p:txBody>
+          <a:bodyPr xmlns:a="http://schemas.openxmlformats.org/drawingml/2006/main" anchor="ctr"/>
+          <a:lstStyle xmlns:a="http://schemas.openxmlformats.org/drawingml/2006/main"/>
+          <a:p xmlns:a="http://schemas.openxmlformats.org/drawingml/2006/main">
+            <a:pPr>
+              <a:buNone/>
               <a:defRPr sz="1200" b="1">
                 <a:solidFill>
                   <a:srgbClr val="D9A441"/>
@@ -2342,35 +2818,36 @@
       <p:sp>
         <p:nvSpPr>
           <p:cNvPr id="31" name="Rectángulo 30">
-            <a:extLst>
+            <a:extLst xmlns:a="http://schemas.openxmlformats.org/drawingml/2006/main">
               <a:ext uri="{FF2B5EF4-FFF2-40B4-BE49-F238E27FC236}">
                 <a16:creationId xmlns:a16="http://schemas.microsoft.com/office/drawing/2014/main" id="{B00D536D-D621-4236-AF48-F610F2F9BBC5}"/>
               </a:ext>
             </a:extLst>
           </p:cNvPr>
           <p:cNvSpPr>
-            <a:spLocks noGrp="1"/>
-          </p:cNvSpPr>
-          <p:nvPr/>
-        </p:nvSpPr>
-        <p:spPr>
-          <a:xfrm>
+            <a:spLocks xmlns:a="http://schemas.openxmlformats.org/drawingml/2006/main" noGrp="1"/>
+          </p:cNvSpPr>
+          <p:nvPr/>
+        </p:nvSpPr>
+        <p:spPr>
+          <a:xfrm xmlns:a="http://schemas.openxmlformats.org/drawingml/2006/main">
             <a:off x="7315200" y="4981575"/>
             <a:ext cx="2124075" cy="457200"/>
           </a:xfrm>
-          <a:prstGeom prst="rect">
-            <a:avLst/>
-          </a:prstGeom>
-          <a:noFill/>
-          <a:ln w="0">
-            <a:noFill/>
-          </a:ln>
-        </p:spPr>
-        <p:txBody>
-          <a:bodyPr anchor="ctr"/>
-          <a:lstStyle/>
-          <a:p>
-            <a:pPr>
+          <a:prstGeom xmlns:a="http://schemas.openxmlformats.org/drawingml/2006/main" prst="rect">
+            <a:avLst/>
+          </a:prstGeom>
+          <a:noFill xmlns:a="http://schemas.openxmlformats.org/drawingml/2006/main"/>
+          <a:ln xmlns:a="http://schemas.openxmlformats.org/drawingml/2006/main" w="0">
+            <a:noFill/>
+          </a:ln>
+        </p:spPr>
+        <p:txBody>
+          <a:bodyPr xmlns:a="http://schemas.openxmlformats.org/drawingml/2006/main" anchor="ctr"/>
+          <a:lstStyle xmlns:a="http://schemas.openxmlformats.org/drawingml/2006/main"/>
+          <a:p xmlns:a="http://schemas.openxmlformats.org/drawingml/2006/main">
+            <a:pPr>
+              <a:buNone/>
               <a:defRPr sz="1125" b="1">
                 <a:solidFill>
                   <a:srgbClr val="FFFFFF"/>
@@ -2386,8 +2863,9 @@
               <a:t>Quitar piedras, romper</a:t>
             </a:r>
           </a:p>
-          <a:p>
-            <a:pPr>
+          <a:p xmlns:a="http://schemas.openxmlformats.org/drawingml/2006/main">
+            <a:pPr>
+              <a:buNone/>
               <a:defRPr sz="1125" b="1">
                 <a:solidFill>
                   <a:srgbClr val="FFFFFF"/>
@@ -2408,27 +2886,27 @@
       <p:sp>
         <p:nvSpPr>
           <p:cNvPr id="32" name="Conector recto 31">
-            <a:extLst>
+            <a:extLst xmlns:a="http://schemas.openxmlformats.org/drawingml/2006/main">
               <a:ext uri="{FF2B5EF4-FFF2-40B4-BE49-F238E27FC236}">
                 <a16:creationId xmlns:a16="http://schemas.microsoft.com/office/drawing/2014/main" id="{8C8B5876-7F3F-4B03-90C7-DD63DB089F0D}"/>
               </a:ext>
             </a:extLst>
           </p:cNvPr>
           <p:cNvSpPr>
-            <a:spLocks noGrp="1"/>
-          </p:cNvSpPr>
-          <p:nvPr/>
-        </p:nvSpPr>
-        <p:spPr>
-          <a:xfrm>
+            <a:spLocks xmlns:a="http://schemas.openxmlformats.org/drawingml/2006/main" noGrp="1"/>
+          </p:cNvSpPr>
+          <p:nvPr/>
+        </p:nvSpPr>
+        <p:spPr>
+          <a:xfrm xmlns:a="http://schemas.openxmlformats.org/drawingml/2006/main">
             <a:off x="7315200" y="5505450"/>
             <a:ext cx="2009775" cy="9525"/>
           </a:xfrm>
-          <a:prstGeom prst="line">
-            <a:avLst/>
-          </a:prstGeom>
-          <a:noFill/>
-          <a:ln w="9525">
+          <a:prstGeom xmlns:a="http://schemas.openxmlformats.org/drawingml/2006/main" prst="line">
+            <a:avLst/>
+          </a:prstGeom>
+          <a:noFill xmlns:a="http://schemas.openxmlformats.org/drawingml/2006/main"/>
+          <a:ln xmlns:a="http://schemas.openxmlformats.org/drawingml/2006/main" w="9525">
             <a:solidFill>
               <a:srgbClr val="6E858D"/>
             </a:solidFill>
@@ -2439,35 +2917,36 @@
       <p:sp>
         <p:nvSpPr>
           <p:cNvPr id="33" name="Rectángulo 32">
-            <a:extLst>
+            <a:extLst xmlns:a="http://schemas.openxmlformats.org/drawingml/2006/main">
               <a:ext uri="{FF2B5EF4-FFF2-40B4-BE49-F238E27FC236}">
                 <a16:creationId xmlns:a16="http://schemas.microsoft.com/office/drawing/2014/main" id="{F935BB92-EC79-495F-BBBD-30B0F3EAC7D9}"/>
               </a:ext>
             </a:extLst>
           </p:cNvPr>
           <p:cNvSpPr>
-            <a:spLocks noGrp="1"/>
-          </p:cNvSpPr>
-          <p:nvPr/>
-        </p:nvSpPr>
-        <p:spPr>
-          <a:xfrm>
+            <a:spLocks xmlns:a="http://schemas.openxmlformats.org/drawingml/2006/main" noGrp="1"/>
+          </p:cNvSpPr>
+          <p:nvPr/>
+        </p:nvSpPr>
+        <p:spPr>
+          <a:xfrm xmlns:a="http://schemas.openxmlformats.org/drawingml/2006/main">
             <a:off x="7315200" y="5572125"/>
             <a:ext cx="2124075" cy="533400"/>
           </a:xfrm>
-          <a:prstGeom prst="rect">
-            <a:avLst/>
-          </a:prstGeom>
-          <a:noFill/>
-          <a:ln w="0">
-            <a:noFill/>
-          </a:ln>
-        </p:spPr>
-        <p:txBody>
-          <a:bodyPr anchor="ctr"/>
-          <a:lstStyle/>
-          <a:p>
-            <a:pPr>
+          <a:prstGeom xmlns:a="http://schemas.openxmlformats.org/drawingml/2006/main" prst="rect">
+            <a:avLst/>
+          </a:prstGeom>
+          <a:noFill xmlns:a="http://schemas.openxmlformats.org/drawingml/2006/main"/>
+          <a:ln xmlns:a="http://schemas.openxmlformats.org/drawingml/2006/main" w="0">
+            <a:noFill/>
+          </a:ln>
+        </p:spPr>
+        <p:txBody>
+          <a:bodyPr xmlns:a="http://schemas.openxmlformats.org/drawingml/2006/main" anchor="ctr"/>
+          <a:lstStyle xmlns:a="http://schemas.openxmlformats.org/drawingml/2006/main"/>
+          <a:p xmlns:a="http://schemas.openxmlformats.org/drawingml/2006/main">
+            <a:pPr>
+              <a:buNone/>
               <a:defRPr sz="1050" b="0">
                 <a:solidFill>
                   <a:srgbClr val="DCE3E3"/>
@@ -2483,8 +2962,9 @@
               <a:t>Convertirse es hacerse</a:t>
             </a:r>
           </a:p>
-          <a:p>
-            <a:pPr>
+          <a:p xmlns:a="http://schemas.openxmlformats.org/drawingml/2006/main">
+            <a:pPr>
+              <a:buNone/>
               <a:defRPr sz="1050" b="0">
                 <a:solidFill>
                   <a:srgbClr val="DCE3E3"/>
@@ -2505,29 +2985,29 @@
       <p:sp>
         <p:nvSpPr>
           <p:cNvPr id="34" name="Elipse 33">
-            <a:extLst>
+            <a:extLst xmlns:a="http://schemas.openxmlformats.org/drawingml/2006/main">
               <a:ext uri="{FF2B5EF4-FFF2-40B4-BE49-F238E27FC236}">
                 <a16:creationId xmlns:a16="http://schemas.microsoft.com/office/drawing/2014/main" id="{2FF2A9B7-688D-4C1E-AE74-25F236D3F30C}"/>
               </a:ext>
             </a:extLst>
           </p:cNvPr>
           <p:cNvSpPr>
-            <a:spLocks noGrp="1"/>
-          </p:cNvSpPr>
-          <p:nvPr/>
-        </p:nvSpPr>
-        <p:spPr>
-          <a:xfrm>
+            <a:spLocks xmlns:a="http://schemas.openxmlformats.org/drawingml/2006/main" noGrp="1"/>
+          </p:cNvSpPr>
+          <p:nvPr/>
+        </p:nvSpPr>
+        <p:spPr>
+          <a:xfrm xmlns:a="http://schemas.openxmlformats.org/drawingml/2006/main">
             <a:off x="9620250" y="4486275"/>
             <a:ext cx="228600" cy="228600"/>
           </a:xfrm>
-          <a:prstGeom prst="ellipse">
-            <a:avLst/>
-          </a:prstGeom>
-          <a:solidFill>
+          <a:prstGeom xmlns:a="http://schemas.openxmlformats.org/drawingml/2006/main" prst="ellipse">
+            <a:avLst/>
+          </a:prstGeom>
+          <a:solidFill xmlns:a="http://schemas.openxmlformats.org/drawingml/2006/main">
             <a:srgbClr val="D9A441"/>
           </a:solidFill>
-          <a:ln w="9525">
+          <a:ln xmlns:a="http://schemas.openxmlformats.org/drawingml/2006/main" w="9525">
             <a:solidFill>
               <a:srgbClr val="F5E7C3"/>
             </a:solidFill>
@@ -2537,35 +3017,36 @@
       <p:sp>
         <p:nvSpPr>
           <p:cNvPr id="35" name="Rectángulo 34">
-            <a:extLst>
+            <a:extLst xmlns:a="http://schemas.openxmlformats.org/drawingml/2006/main">
               <a:ext uri="{FF2B5EF4-FFF2-40B4-BE49-F238E27FC236}">
                 <a16:creationId xmlns:a16="http://schemas.microsoft.com/office/drawing/2014/main" id="{731CFFEA-8755-4D80-99D5-85B69C56CDDD}"/>
               </a:ext>
             </a:extLst>
           </p:cNvPr>
           <p:cNvSpPr>
-            <a:spLocks noGrp="1"/>
-          </p:cNvSpPr>
-          <p:nvPr/>
-        </p:nvSpPr>
-        <p:spPr>
-          <a:xfrm>
+            <a:spLocks xmlns:a="http://schemas.openxmlformats.org/drawingml/2006/main" noGrp="1"/>
+          </p:cNvSpPr>
+          <p:nvPr/>
+        </p:nvSpPr>
+        <p:spPr>
+          <a:xfrm xmlns:a="http://schemas.openxmlformats.org/drawingml/2006/main">
             <a:off x="9620250" y="4495800"/>
             <a:ext cx="228600" cy="209550"/>
           </a:xfrm>
-          <a:prstGeom prst="rect">
-            <a:avLst/>
-          </a:prstGeom>
-          <a:noFill/>
-          <a:ln w="0">
-            <a:noFill/>
-          </a:ln>
-        </p:spPr>
-        <p:txBody>
-          <a:bodyPr anchor="ctr"/>
-          <a:lstStyle/>
-          <a:p>
-            <a:pPr>
+          <a:prstGeom xmlns:a="http://schemas.openxmlformats.org/drawingml/2006/main" prst="rect">
+            <a:avLst/>
+          </a:prstGeom>
+          <a:noFill xmlns:a="http://schemas.openxmlformats.org/drawingml/2006/main"/>
+          <a:ln xmlns:a="http://schemas.openxmlformats.org/drawingml/2006/main" w="0">
+            <a:noFill/>
+          </a:ln>
+        </p:spPr>
+        <p:txBody>
+          <a:bodyPr xmlns:a="http://schemas.openxmlformats.org/drawingml/2006/main" anchor="ctr"/>
+          <a:lstStyle xmlns:a="http://schemas.openxmlformats.org/drawingml/2006/main"/>
+          <a:p xmlns:a="http://schemas.openxmlformats.org/drawingml/2006/main">
+            <a:pPr>
+              <a:buNone/>
               <a:defRPr sz="750" b="1">
                 <a:solidFill>
                   <a:srgbClr val="07151F"/>
@@ -2586,35 +3067,36 @@
       <p:sp>
         <p:nvSpPr>
           <p:cNvPr id="36" name="Rectángulo 35">
-            <a:extLst>
+            <a:extLst xmlns:a="http://schemas.openxmlformats.org/drawingml/2006/main">
               <a:ext uri="{FF2B5EF4-FFF2-40B4-BE49-F238E27FC236}">
                 <a16:creationId xmlns:a16="http://schemas.microsoft.com/office/drawing/2014/main" id="{E4B35737-4FF5-4FFB-B35C-BF0791C43AD1}"/>
               </a:ext>
             </a:extLst>
           </p:cNvPr>
           <p:cNvSpPr>
-            <a:spLocks noGrp="1"/>
-          </p:cNvSpPr>
-          <p:nvPr/>
-        </p:nvSpPr>
-        <p:spPr>
-          <a:xfrm>
+            <a:spLocks xmlns:a="http://schemas.openxmlformats.org/drawingml/2006/main" noGrp="1"/>
+          </p:cNvSpPr>
+          <p:nvPr/>
+        </p:nvSpPr>
+        <p:spPr>
+          <a:xfrm xmlns:a="http://schemas.openxmlformats.org/drawingml/2006/main">
             <a:off x="9610725" y="4686300"/>
             <a:ext cx="2124075" cy="257175"/>
           </a:xfrm>
-          <a:prstGeom prst="rect">
-            <a:avLst/>
-          </a:prstGeom>
-          <a:noFill/>
-          <a:ln w="0">
-            <a:noFill/>
-          </a:ln>
-        </p:spPr>
-        <p:txBody>
-          <a:bodyPr anchor="ctr"/>
-          <a:lstStyle/>
-          <a:p>
-            <a:pPr>
+          <a:prstGeom xmlns:a="http://schemas.openxmlformats.org/drawingml/2006/main" prst="rect">
+            <a:avLst/>
+          </a:prstGeom>
+          <a:noFill xmlns:a="http://schemas.openxmlformats.org/drawingml/2006/main"/>
+          <a:ln xmlns:a="http://schemas.openxmlformats.org/drawingml/2006/main" w="0">
+            <a:noFill/>
+          </a:ln>
+        </p:spPr>
+        <p:txBody>
+          <a:bodyPr xmlns:a="http://schemas.openxmlformats.org/drawingml/2006/main" anchor="ctr"/>
+          <a:lstStyle xmlns:a="http://schemas.openxmlformats.org/drawingml/2006/main"/>
+          <a:p xmlns:a="http://schemas.openxmlformats.org/drawingml/2006/main">
+            <a:pPr>
+              <a:buNone/>
               <a:defRPr sz="1200" b="1">
                 <a:solidFill>
                   <a:srgbClr val="D9A441"/>
@@ -2635,35 +3117,36 @@
       <p:sp>
         <p:nvSpPr>
           <p:cNvPr id="37" name="Rectángulo 36">
-            <a:extLst>
+            <a:extLst xmlns:a="http://schemas.openxmlformats.org/drawingml/2006/main">
               <a:ext uri="{FF2B5EF4-FFF2-40B4-BE49-F238E27FC236}">
                 <a16:creationId xmlns:a16="http://schemas.microsoft.com/office/drawing/2014/main" id="{D3C05DC6-EEF3-47D1-8D15-FD1B08633B3F}"/>
               </a:ext>
             </a:extLst>
           </p:cNvPr>
           <p:cNvSpPr>
-            <a:spLocks noGrp="1"/>
-          </p:cNvSpPr>
-          <p:nvPr/>
-        </p:nvSpPr>
-        <p:spPr>
-          <a:xfrm>
+            <a:spLocks xmlns:a="http://schemas.openxmlformats.org/drawingml/2006/main" noGrp="1"/>
+          </p:cNvSpPr>
+          <p:nvPr/>
+        </p:nvSpPr>
+        <p:spPr>
+          <a:xfrm xmlns:a="http://schemas.openxmlformats.org/drawingml/2006/main">
             <a:off x="9610725" y="4981575"/>
             <a:ext cx="2124075" cy="457200"/>
           </a:xfrm>
-          <a:prstGeom prst="rect">
-            <a:avLst/>
-          </a:prstGeom>
-          <a:noFill/>
-          <a:ln w="0">
-            <a:noFill/>
-          </a:ln>
-        </p:spPr>
-        <p:txBody>
-          <a:bodyPr anchor="ctr"/>
-          <a:lstStyle/>
-          <a:p>
-            <a:pPr>
+          <a:prstGeom xmlns:a="http://schemas.openxmlformats.org/drawingml/2006/main" prst="rect">
+            <a:avLst/>
+          </a:prstGeom>
+          <a:noFill xmlns:a="http://schemas.openxmlformats.org/drawingml/2006/main"/>
+          <a:ln xmlns:a="http://schemas.openxmlformats.org/drawingml/2006/main" w="0">
+            <a:noFill/>
+          </a:ln>
+        </p:spPr>
+        <p:txBody>
+          <a:bodyPr xmlns:a="http://schemas.openxmlformats.org/drawingml/2006/main" anchor="ctr"/>
+          <a:lstStyle xmlns:a="http://schemas.openxmlformats.org/drawingml/2006/main"/>
+          <a:p xmlns:a="http://schemas.openxmlformats.org/drawingml/2006/main">
+            <a:pPr>
+              <a:buNone/>
               <a:defRPr sz="1125" b="1">
                 <a:solidFill>
                   <a:srgbClr val="FFFFFF"/>
@@ -2679,8 +3162,9 @@
               <a:t>La Palabra encuentra sitio</a:t>
             </a:r>
           </a:p>
-          <a:p>
-            <a:pPr>
+          <a:p xmlns:a="http://schemas.openxmlformats.org/drawingml/2006/main">
+            <a:pPr>
+              <a:buNone/>
               <a:defRPr sz="1125" b="1">
                 <a:solidFill>
                   <a:srgbClr val="FFFFFF"/>
@@ -2701,27 +3185,27 @@
       <p:sp>
         <p:nvSpPr>
           <p:cNvPr id="38" name="Conector recto 37">
-            <a:extLst>
+            <a:extLst xmlns:a="http://schemas.openxmlformats.org/drawingml/2006/main">
               <a:ext uri="{FF2B5EF4-FFF2-40B4-BE49-F238E27FC236}">
                 <a16:creationId xmlns:a16="http://schemas.microsoft.com/office/drawing/2014/main" id="{3579FD05-578B-414A-A46E-83F30DAF291E}"/>
               </a:ext>
             </a:extLst>
           </p:cNvPr>
           <p:cNvSpPr>
-            <a:spLocks noGrp="1"/>
-          </p:cNvSpPr>
-          <p:nvPr/>
-        </p:nvSpPr>
-        <p:spPr>
-          <a:xfrm>
+            <a:spLocks xmlns:a="http://schemas.openxmlformats.org/drawingml/2006/main" noGrp="1"/>
+          </p:cNvSpPr>
+          <p:nvPr/>
+        </p:nvSpPr>
+        <p:spPr>
+          <a:xfrm xmlns:a="http://schemas.openxmlformats.org/drawingml/2006/main">
             <a:off x="9610725" y="5505450"/>
             <a:ext cx="2009775" cy="9525"/>
           </a:xfrm>
-          <a:prstGeom prst="line">
-            <a:avLst/>
-          </a:prstGeom>
-          <a:noFill/>
-          <a:ln w="9525">
+          <a:prstGeom xmlns:a="http://schemas.openxmlformats.org/drawingml/2006/main" prst="line">
+            <a:avLst/>
+          </a:prstGeom>
+          <a:noFill xmlns:a="http://schemas.openxmlformats.org/drawingml/2006/main"/>
+          <a:ln xmlns:a="http://schemas.openxmlformats.org/drawingml/2006/main" w="9525">
             <a:solidFill>
               <a:srgbClr val="6E858D"/>
             </a:solidFill>
@@ -2732,35 +3216,36 @@
       <p:sp>
         <p:nvSpPr>
           <p:cNvPr id="39" name="Rectángulo 38">
-            <a:extLst>
+            <a:extLst xmlns:a="http://schemas.openxmlformats.org/drawingml/2006/main">
               <a:ext uri="{FF2B5EF4-FFF2-40B4-BE49-F238E27FC236}">
                 <a16:creationId xmlns:a16="http://schemas.microsoft.com/office/drawing/2014/main" id="{C276F3AF-1F6D-406C-A755-D267075D4397}"/>
               </a:ext>
             </a:extLst>
           </p:cNvPr>
           <p:cNvSpPr>
-            <a:spLocks noGrp="1"/>
-          </p:cNvSpPr>
-          <p:nvPr/>
-        </p:nvSpPr>
-        <p:spPr>
-          <a:xfrm>
+            <a:spLocks xmlns:a="http://schemas.openxmlformats.org/drawingml/2006/main" noGrp="1"/>
+          </p:cNvSpPr>
+          <p:nvPr/>
+        </p:nvSpPr>
+        <p:spPr>
+          <a:xfrm xmlns:a="http://schemas.openxmlformats.org/drawingml/2006/main">
             <a:off x="9610725" y="5572125"/>
             <a:ext cx="2124075" cy="533400"/>
           </a:xfrm>
-          <a:prstGeom prst="rect">
-            <a:avLst/>
-          </a:prstGeom>
-          <a:noFill/>
-          <a:ln w="0">
-            <a:noFill/>
-          </a:ln>
-        </p:spPr>
-        <p:txBody>
-          <a:bodyPr anchor="ctr"/>
-          <a:lstStyle/>
-          <a:p>
-            <a:pPr>
+          <a:prstGeom xmlns:a="http://schemas.openxmlformats.org/drawingml/2006/main" prst="rect">
+            <a:avLst/>
+          </a:prstGeom>
+          <a:noFill xmlns:a="http://schemas.openxmlformats.org/drawingml/2006/main"/>
+          <a:ln xmlns:a="http://schemas.openxmlformats.org/drawingml/2006/main" w="0">
+            <a:noFill/>
+          </a:ln>
+        </p:spPr>
+        <p:txBody>
+          <a:bodyPr xmlns:a="http://schemas.openxmlformats.org/drawingml/2006/main" anchor="ctr"/>
+          <a:lstStyle xmlns:a="http://schemas.openxmlformats.org/drawingml/2006/main"/>
+          <a:p xmlns:a="http://schemas.openxmlformats.org/drawingml/2006/main">
+            <a:pPr>
+              <a:buNone/>
               <a:defRPr sz="1050" b="0">
                 <a:solidFill>
                   <a:srgbClr val="DCE3E3"/>
@@ -2776,8 +3261,9 @@
               <a:t>El don recibido se vuelve</a:t>
             </a:r>
           </a:p>
-          <a:p>
-            <a:pPr>
+          <a:p xmlns:a="http://schemas.openxmlformats.org/drawingml/2006/main">
+            <a:pPr>
+              <a:buNone/>
               <a:defRPr sz="1050" b="0">
                 <a:solidFill>
                   <a:srgbClr val="DCE3E3"/>
@@ -2798,35 +3284,36 @@
       <p:sp>
         <p:nvSpPr>
           <p:cNvPr id="40" name="Rectángulo 39">
-            <a:extLst>
+            <a:extLst xmlns:a="http://schemas.openxmlformats.org/drawingml/2006/main">
               <a:ext uri="{FF2B5EF4-FFF2-40B4-BE49-F238E27FC236}">
                 <a16:creationId xmlns:a16="http://schemas.microsoft.com/office/drawing/2014/main" id="{BBFA0AF3-1233-4EED-9907-CF97B9DDE100}"/>
               </a:ext>
             </a:extLst>
           </p:cNvPr>
           <p:cNvSpPr>
-            <a:spLocks noGrp="1"/>
-          </p:cNvSpPr>
-          <p:nvPr/>
-        </p:nvSpPr>
-        <p:spPr>
-          <a:xfrm>
+            <a:spLocks xmlns:a="http://schemas.openxmlformats.org/drawingml/2006/main" noGrp="1"/>
+          </p:cNvSpPr>
+          <p:nvPr/>
+        </p:nvSpPr>
+        <p:spPr>
+          <a:xfrm xmlns:a="http://schemas.openxmlformats.org/drawingml/2006/main">
             <a:off x="7239000" y="4095750"/>
             <a:ext cx="4381500" cy="285750"/>
           </a:xfrm>
-          <a:prstGeom prst="rect">
-            <a:avLst/>
-          </a:prstGeom>
-          <a:noFill/>
-          <a:ln w="0">
-            <a:noFill/>
-          </a:ln>
-        </p:spPr>
-        <p:txBody>
-          <a:bodyPr anchor="ctr"/>
-          <a:lstStyle/>
-          <a:p>
-            <a:pPr>
+          <a:prstGeom xmlns:a="http://schemas.openxmlformats.org/drawingml/2006/main" prst="rect">
+            <a:avLst/>
+          </a:prstGeom>
+          <a:noFill xmlns:a="http://schemas.openxmlformats.org/drawingml/2006/main"/>
+          <a:ln xmlns:a="http://schemas.openxmlformats.org/drawingml/2006/main" w="0">
+            <a:noFill/>
+          </a:ln>
+        </p:spPr>
+        <p:txBody>
+          <a:bodyPr xmlns:a="http://schemas.openxmlformats.org/drawingml/2006/main" anchor="ctr"/>
+          <a:lstStyle xmlns:a="http://schemas.openxmlformats.org/drawingml/2006/main"/>
+          <a:p xmlns:a="http://schemas.openxmlformats.org/drawingml/2006/main">
+            <a:pPr>
+              <a:buNone/>
               <a:defRPr sz="1350" b="1">
                 <a:solidFill>
                   <a:srgbClr val="F5E7C3"/>
@@ -2847,35 +3334,36 @@
       <p:sp>
         <p:nvSpPr>
           <p:cNvPr id="41" name="Rectángulo 40">
-            <a:extLst>
+            <a:extLst xmlns:a="http://schemas.openxmlformats.org/drawingml/2006/main">
               <a:ext uri="{FF2B5EF4-FFF2-40B4-BE49-F238E27FC236}">
                 <a16:creationId xmlns:a16="http://schemas.microsoft.com/office/drawing/2014/main" id="{F331B9A7-E894-478D-B98F-65FC4F15579D}"/>
               </a:ext>
             </a:extLst>
           </p:cNvPr>
           <p:cNvSpPr>
-            <a:spLocks noGrp="1"/>
-          </p:cNvSpPr>
-          <p:nvPr/>
-        </p:nvSpPr>
-        <p:spPr>
-          <a:xfrm>
+            <a:spLocks xmlns:a="http://schemas.openxmlformats.org/drawingml/2006/main" noGrp="1"/>
+          </p:cNvSpPr>
+          <p:nvPr/>
+        </p:nvSpPr>
+        <p:spPr>
+          <a:xfrm xmlns:a="http://schemas.openxmlformats.org/drawingml/2006/main">
             <a:off x="11334750" y="6429375"/>
             <a:ext cx="400050" cy="171450"/>
           </a:xfrm>
-          <a:prstGeom prst="rect">
-            <a:avLst/>
-          </a:prstGeom>
-          <a:noFill/>
-          <a:ln w="0">
-            <a:noFill/>
-          </a:ln>
-        </p:spPr>
-        <p:txBody>
-          <a:bodyPr anchor="ctr"/>
-          <a:lstStyle/>
-          <a:p>
-            <a:pPr>
+          <a:prstGeom xmlns:a="http://schemas.openxmlformats.org/drawingml/2006/main" prst="rect">
+            <a:avLst/>
+          </a:prstGeom>
+          <a:noFill xmlns:a="http://schemas.openxmlformats.org/drawingml/2006/main"/>
+          <a:ln xmlns:a="http://schemas.openxmlformats.org/drawingml/2006/main" w="0">
+            <a:noFill/>
+          </a:ln>
+        </p:spPr>
+        <p:txBody>
+          <a:bodyPr xmlns:a="http://schemas.openxmlformats.org/drawingml/2006/main" anchor="ctr"/>
+          <a:lstStyle xmlns:a="http://schemas.openxmlformats.org/drawingml/2006/main"/>
+          <a:p xmlns:a="http://schemas.openxmlformats.org/drawingml/2006/main">
+            <a:pPr>
+              <a:buNone/>
               <a:defRPr sz="825" b="0">
                 <a:solidFill>
                   <a:srgbClr val="B8C3C7"/>
@@ -2900,21 +3388,17 @@
       </p:ext>
     </p:extLst>
   </p:cSld>
-  <p:clrMapOvr>
-    <a:masterClrMapping/>
-  </p:clrMapOvr>
 </p:sld>
 </file>
 
 <file path=ppt/slides/slide2.xml><?xml version="1.0" encoding="utf-8"?>
-<p:sld xmlns:a="http://schemas.openxmlformats.org/drawingml/2006/main" xmlns:r="http://schemas.openxmlformats.org/officeDocument/2006/relationships" xmlns:p="http://schemas.openxmlformats.org/presentationml/2006/main">
+<p:sld xmlns:p="http://schemas.openxmlformats.org/presentationml/2006/main">
   <p:cSld>
     <p:bg>
       <p:bgPr>
-        <a:solidFill>
+        <a:solidFill xmlns:a="http://schemas.openxmlformats.org/drawingml/2006/main">
           <a:srgbClr val="F4F0E7"/>
         </a:solidFill>
-        <a:effectLst/>
       </p:bgPr>
     </p:bg>
     <p:spTree>
@@ -2924,45 +3408,41 @@
         <p:nvPr/>
       </p:nvGrpSpPr>
       <p:grpSpPr>
-        <a:xfrm>
-          <a:off x="0" y="0"/>
-          <a:ext cx="0" cy="0"/>
-          <a:chOff x="0" y="0"/>
-          <a:chExt cx="0" cy="0"/>
-        </a:xfrm>
+        <a:xfrm xmlns:a="http://schemas.openxmlformats.org/drawingml/2006/main"/>
       </p:grpSpPr>
       <p:sp>
         <p:nvSpPr>
           <p:cNvPr id="40" name="Rectángulo 39">
-            <a:extLst>
+            <a:extLst xmlns:a="http://schemas.openxmlformats.org/drawingml/2006/main">
               <a:ext uri="{FF2B5EF4-FFF2-40B4-BE49-F238E27FC236}">
                 <a16:creationId xmlns:a16="http://schemas.microsoft.com/office/drawing/2014/main" id="{72F37E03-C2AE-4457-92CB-8FFA9A737EB8}"/>
               </a:ext>
             </a:extLst>
           </p:cNvPr>
           <p:cNvSpPr>
-            <a:spLocks noGrp="1"/>
-          </p:cNvSpPr>
-          <p:nvPr/>
-        </p:nvSpPr>
-        <p:spPr>
-          <a:xfrm>
+            <a:spLocks xmlns:a="http://schemas.openxmlformats.org/drawingml/2006/main" noGrp="1"/>
+          </p:cNvSpPr>
+          <p:nvPr/>
+        </p:nvSpPr>
+        <p:spPr>
+          <a:xfrm xmlns:a="http://schemas.openxmlformats.org/drawingml/2006/main">
             <a:off x="514350" y="266700"/>
             <a:ext cx="7239000" cy="400050"/>
           </a:xfrm>
-          <a:prstGeom prst="rect">
-            <a:avLst/>
-          </a:prstGeom>
-          <a:noFill/>
-          <a:ln w="0">
-            <a:noFill/>
-          </a:ln>
-        </p:spPr>
-        <p:txBody>
-          <a:bodyPr anchor="ctr"/>
-          <a:lstStyle/>
-          <a:p>
-            <a:pPr>
+          <a:prstGeom xmlns:a="http://schemas.openxmlformats.org/drawingml/2006/main" prst="rect">
+            <a:avLst/>
+          </a:prstGeom>
+          <a:noFill xmlns:a="http://schemas.openxmlformats.org/drawingml/2006/main"/>
+          <a:ln xmlns:a="http://schemas.openxmlformats.org/drawingml/2006/main" w="0">
+            <a:noFill/>
+          </a:ln>
+        </p:spPr>
+        <p:txBody>
+          <a:bodyPr xmlns:a="http://schemas.openxmlformats.org/drawingml/2006/main" anchor="ctr"/>
+          <a:lstStyle xmlns:a="http://schemas.openxmlformats.org/drawingml/2006/main"/>
+          <a:p xmlns:a="http://schemas.openxmlformats.org/drawingml/2006/main">
+            <a:pPr>
+              <a:buNone/>
               <a:defRPr sz="2250" b="1">
                 <a:solidFill>
                   <a:srgbClr val="07151F"/>
@@ -2983,35 +3463,36 @@
       <p:sp>
         <p:nvSpPr>
           <p:cNvPr id="2" name="Rectángulo 1">
-            <a:extLst>
+            <a:extLst xmlns:a="http://schemas.openxmlformats.org/drawingml/2006/main">
               <a:ext uri="{FF2B5EF4-FFF2-40B4-BE49-F238E27FC236}">
                 <a16:creationId xmlns:a16="http://schemas.microsoft.com/office/drawing/2014/main" id="{A32D06E0-C229-427F-A845-5B0388C551EF}"/>
               </a:ext>
             </a:extLst>
           </p:cNvPr>
           <p:cNvSpPr>
-            <a:spLocks noGrp="1"/>
-          </p:cNvSpPr>
-          <p:nvPr/>
-        </p:nvSpPr>
-        <p:spPr>
-          <a:xfrm>
+            <a:spLocks xmlns:a="http://schemas.openxmlformats.org/drawingml/2006/main" noGrp="1"/>
+          </p:cNvSpPr>
+          <p:nvPr/>
+        </p:nvSpPr>
+        <p:spPr>
+          <a:xfrm xmlns:a="http://schemas.openxmlformats.org/drawingml/2006/main">
             <a:off x="533400" y="685800"/>
             <a:ext cx="8096250" cy="266700"/>
           </a:xfrm>
-          <a:prstGeom prst="rect">
-            <a:avLst/>
-          </a:prstGeom>
-          <a:noFill/>
-          <a:ln w="0">
-            <a:noFill/>
-          </a:ln>
-        </p:spPr>
-        <p:txBody>
-          <a:bodyPr anchor="ctr"/>
-          <a:lstStyle/>
-          <a:p>
-            <a:pPr>
+          <a:prstGeom xmlns:a="http://schemas.openxmlformats.org/drawingml/2006/main" prst="rect">
+            <a:avLst/>
+          </a:prstGeom>
+          <a:noFill xmlns:a="http://schemas.openxmlformats.org/drawingml/2006/main"/>
+          <a:ln xmlns:a="http://schemas.openxmlformats.org/drawingml/2006/main" w="0">
+            <a:noFill/>
+          </a:ln>
+        </p:spPr>
+        <p:txBody>
+          <a:bodyPr xmlns:a="http://schemas.openxmlformats.org/drawingml/2006/main" anchor="ctr"/>
+          <a:lstStyle xmlns:a="http://schemas.openxmlformats.org/drawingml/2006/main"/>
+          <a:p xmlns:a="http://schemas.openxmlformats.org/drawingml/2006/main">
+            <a:pPr>
+              <a:buNone/>
               <a:defRPr sz="1200" b="0">
                 <a:solidFill>
                   <a:srgbClr val="4D646B"/>
@@ -3032,27 +3513,27 @@
       <p:sp>
         <p:nvSpPr>
           <p:cNvPr id="3" name="Conector recto 2">
-            <a:extLst>
+            <a:extLst xmlns:a="http://schemas.openxmlformats.org/drawingml/2006/main">
               <a:ext uri="{FF2B5EF4-FFF2-40B4-BE49-F238E27FC236}">
                 <a16:creationId xmlns:a16="http://schemas.microsoft.com/office/drawing/2014/main" id="{011AFFC2-C892-49BF-B5B8-38CA089B6987}"/>
               </a:ext>
             </a:extLst>
           </p:cNvPr>
           <p:cNvSpPr>
-            <a:spLocks noGrp="1"/>
-          </p:cNvSpPr>
-          <p:nvPr/>
-        </p:nvSpPr>
-        <p:spPr>
-          <a:xfrm>
+            <a:spLocks xmlns:a="http://schemas.openxmlformats.org/drawingml/2006/main" noGrp="1"/>
+          </p:cNvSpPr>
+          <p:nvPr/>
+        </p:nvSpPr>
+        <p:spPr>
+          <a:xfrm xmlns:a="http://schemas.openxmlformats.org/drawingml/2006/main">
             <a:off x="533400" y="1066800"/>
             <a:ext cx="11125200" cy="9525"/>
           </a:xfrm>
-          <a:prstGeom prst="line">
-            <a:avLst/>
-          </a:prstGeom>
-          <a:noFill/>
-          <a:ln w="28575">
+          <a:prstGeom xmlns:a="http://schemas.openxmlformats.org/drawingml/2006/main" prst="line">
+            <a:avLst/>
+          </a:prstGeom>
+          <a:noFill xmlns:a="http://schemas.openxmlformats.org/drawingml/2006/main"/>
+          <a:ln xmlns:a="http://schemas.openxmlformats.org/drawingml/2006/main" w="28575">
             <a:solidFill>
               <a:srgbClr val="D9A441"/>
             </a:solidFill>
@@ -3063,31 +3544,31 @@
       <p:sp>
         <p:nvSpPr>
           <p:cNvPr id="4" name="Rectángulo: esquinas redondeadas 3">
-            <a:extLst>
+            <a:extLst xmlns:a="http://schemas.openxmlformats.org/drawingml/2006/main">
               <a:ext uri="{FF2B5EF4-FFF2-40B4-BE49-F238E27FC236}">
                 <a16:creationId xmlns:a16="http://schemas.microsoft.com/office/drawing/2014/main" id="{ED4C0F0B-03BD-4136-B8C9-08B2D21A40B5}"/>
               </a:ext>
             </a:extLst>
           </p:cNvPr>
           <p:cNvSpPr>
-            <a:spLocks noGrp="1"/>
-          </p:cNvSpPr>
-          <p:nvPr/>
-        </p:nvSpPr>
-        <p:spPr>
-          <a:xfrm>
+            <a:spLocks xmlns:a="http://schemas.openxmlformats.org/drawingml/2006/main" noGrp="1"/>
+          </p:cNvSpPr>
+          <p:nvPr/>
+        </p:nvSpPr>
+        <p:spPr>
+          <a:xfrm xmlns:a="http://schemas.openxmlformats.org/drawingml/2006/main">
             <a:off x="533400" y="1381125"/>
             <a:ext cx="2533650" cy="3905250"/>
           </a:xfrm>
-          <a:prstGeom prst="roundRect">
+          <a:prstGeom xmlns:a="http://schemas.openxmlformats.org/drawingml/2006/main" prst="roundRect">
             <a:avLst>
               <a:gd name="adj" fmla="val 4511"/>
             </a:avLst>
           </a:prstGeom>
-          <a:solidFill>
+          <a:solidFill xmlns:a="http://schemas.openxmlformats.org/drawingml/2006/main">
             <a:srgbClr val="0D2A38"/>
           </a:solidFill>
-          <a:ln w="9525">
+          <a:ln xmlns:a="http://schemas.openxmlformats.org/drawingml/2006/main" w="9525">
             <a:solidFill>
               <a:srgbClr val="D8C48D"/>
             </a:solidFill>
@@ -3095,50 +3576,45 @@
           </a:ln>
         </p:spPr>
         <p:style>
-          <a:lnRef idx="0">
-            <a:scrgbClr r="0" g="0" b="0"/>
-          </a:lnRef>
-          <a:fillRef idx="0">
-            <a:scrgbClr r="0" g="0" b="0"/>
-          </a:fillRef>
-          <a:effectRef idx="4">
-            <a:scrgbClr r="0" g="0" b="0"/>
-          </a:effectRef>
-          <a:fontRef idx="major"/>
+          <a:lnRef xmlns:a="http://schemas.openxmlformats.org/drawingml/2006/main" idx="0"/>
+          <a:fillRef xmlns:a="http://schemas.openxmlformats.org/drawingml/2006/main" idx="0"/>
+          <a:effectRef xmlns:a="http://schemas.openxmlformats.org/drawingml/2006/main" idx="4"/>
+          <a:fontRef xmlns:a="http://schemas.openxmlformats.org/drawingml/2006/main" idx="major"/>
         </p:style>
       </p:sp>
       <p:sp>
         <p:nvSpPr>
           <p:cNvPr id="5" name="Rectángulo 4">
-            <a:extLst>
+            <a:extLst xmlns:a="http://schemas.openxmlformats.org/drawingml/2006/main">
               <a:ext uri="{FF2B5EF4-FFF2-40B4-BE49-F238E27FC236}">
                 <a16:creationId xmlns:a16="http://schemas.microsoft.com/office/drawing/2014/main" id="{4E9E5A45-0DB9-40E5-9BE5-787146AD3254}"/>
               </a:ext>
             </a:extLst>
           </p:cNvPr>
           <p:cNvSpPr>
-            <a:spLocks noGrp="1"/>
-          </p:cNvSpPr>
-          <p:nvPr/>
-        </p:nvSpPr>
-        <p:spPr>
-          <a:xfrm>
+            <a:spLocks xmlns:a="http://schemas.openxmlformats.org/drawingml/2006/main" noGrp="1"/>
+          </p:cNvSpPr>
+          <p:nvPr/>
+        </p:nvSpPr>
+        <p:spPr>
+          <a:xfrm xmlns:a="http://schemas.openxmlformats.org/drawingml/2006/main">
             <a:off x="723900" y="1581150"/>
             <a:ext cx="419100" cy="285750"/>
           </a:xfrm>
-          <a:prstGeom prst="rect">
-            <a:avLst/>
-          </a:prstGeom>
-          <a:noFill/>
-          <a:ln w="0">
-            <a:noFill/>
-          </a:ln>
-        </p:spPr>
-        <p:txBody>
-          <a:bodyPr anchor="ctr"/>
-          <a:lstStyle/>
-          <a:p>
-            <a:pPr>
+          <a:prstGeom xmlns:a="http://schemas.openxmlformats.org/drawingml/2006/main" prst="rect">
+            <a:avLst/>
+          </a:prstGeom>
+          <a:noFill xmlns:a="http://schemas.openxmlformats.org/drawingml/2006/main"/>
+          <a:ln xmlns:a="http://schemas.openxmlformats.org/drawingml/2006/main" w="0">
+            <a:noFill/>
+          </a:ln>
+        </p:spPr>
+        <p:txBody>
+          <a:bodyPr xmlns:a="http://schemas.openxmlformats.org/drawingml/2006/main" anchor="ctr"/>
+          <a:lstStyle xmlns:a="http://schemas.openxmlformats.org/drawingml/2006/main"/>
+          <a:p xmlns:a="http://schemas.openxmlformats.org/drawingml/2006/main">
+            <a:pPr>
+              <a:buNone/>
               <a:defRPr sz="975" b="1">
                 <a:solidFill>
                   <a:srgbClr val="D9A441"/>
@@ -3159,35 +3635,36 @@
       <p:sp>
         <p:nvSpPr>
           <p:cNvPr id="6" name="Rectángulo 5">
-            <a:extLst>
+            <a:extLst xmlns:a="http://schemas.openxmlformats.org/drawingml/2006/main">
               <a:ext uri="{FF2B5EF4-FFF2-40B4-BE49-F238E27FC236}">
                 <a16:creationId xmlns:a16="http://schemas.microsoft.com/office/drawing/2014/main" id="{E40C7DFE-33ED-454A-AB51-137E5FDD06E2}"/>
               </a:ext>
             </a:extLst>
           </p:cNvPr>
           <p:cNvSpPr>
-            <a:spLocks noGrp="1"/>
-          </p:cNvSpPr>
-          <p:nvPr/>
-        </p:nvSpPr>
-        <p:spPr>
-          <a:xfrm>
+            <a:spLocks xmlns:a="http://schemas.openxmlformats.org/drawingml/2006/main" noGrp="1"/>
+          </p:cNvSpPr>
+          <p:nvPr/>
+        </p:nvSpPr>
+        <p:spPr>
+          <a:xfrm xmlns:a="http://schemas.openxmlformats.org/drawingml/2006/main">
             <a:off x="1219200" y="1562100"/>
             <a:ext cx="1619250" cy="304800"/>
           </a:xfrm>
-          <a:prstGeom prst="rect">
-            <a:avLst/>
-          </a:prstGeom>
-          <a:noFill/>
-          <a:ln w="0">
-            <a:noFill/>
-          </a:ln>
-        </p:spPr>
-        <p:txBody>
-          <a:bodyPr anchor="ctr"/>
-          <a:lstStyle/>
-          <a:p>
-            <a:pPr>
+          <a:prstGeom xmlns:a="http://schemas.openxmlformats.org/drawingml/2006/main" prst="rect">
+            <a:avLst/>
+          </a:prstGeom>
+          <a:noFill xmlns:a="http://schemas.openxmlformats.org/drawingml/2006/main"/>
+          <a:ln xmlns:a="http://schemas.openxmlformats.org/drawingml/2006/main" w="0">
+            <a:noFill/>
+          </a:ln>
+        </p:spPr>
+        <p:txBody>
+          <a:bodyPr xmlns:a="http://schemas.openxmlformats.org/drawingml/2006/main" anchor="ctr"/>
+          <a:lstStyle xmlns:a="http://schemas.openxmlformats.org/drawingml/2006/main"/>
+          <a:p xmlns:a="http://schemas.openxmlformats.org/drawingml/2006/main">
+            <a:pPr>
+              <a:buNone/>
               <a:defRPr sz="1200" b="1">
                 <a:solidFill>
                   <a:srgbClr val="F5E7C3"/>
@@ -3208,27 +3685,27 @@
       <p:sp>
         <p:nvSpPr>
           <p:cNvPr id="7" name="Conector recto 6">
-            <a:extLst>
+            <a:extLst xmlns:a="http://schemas.openxmlformats.org/drawingml/2006/main">
               <a:ext uri="{FF2B5EF4-FFF2-40B4-BE49-F238E27FC236}">
                 <a16:creationId xmlns:a16="http://schemas.microsoft.com/office/drawing/2014/main" id="{713B4E51-C338-4275-8ED9-A48BAEF756DB}"/>
               </a:ext>
             </a:extLst>
           </p:cNvPr>
           <p:cNvSpPr>
-            <a:spLocks noGrp="1"/>
-          </p:cNvSpPr>
-          <p:nvPr/>
-        </p:nvSpPr>
-        <p:spPr>
-          <a:xfrm>
+            <a:spLocks xmlns:a="http://schemas.openxmlformats.org/drawingml/2006/main" noGrp="1"/>
+          </p:cNvSpPr>
+          <p:nvPr/>
+        </p:nvSpPr>
+        <p:spPr>
+          <a:xfrm xmlns:a="http://schemas.openxmlformats.org/drawingml/2006/main">
             <a:off x="723900" y="1971675"/>
             <a:ext cx="2152650" cy="9525"/>
           </a:xfrm>
-          <a:prstGeom prst="line">
-            <a:avLst/>
-          </a:prstGeom>
-          <a:noFill/>
-          <a:ln w="9525">
+          <a:prstGeom xmlns:a="http://schemas.openxmlformats.org/drawingml/2006/main" prst="line">
+            <a:avLst/>
+          </a:prstGeom>
+          <a:noFill xmlns:a="http://schemas.openxmlformats.org/drawingml/2006/main"/>
+          <a:ln xmlns:a="http://schemas.openxmlformats.org/drawingml/2006/main" w="9525">
             <a:solidFill>
               <a:srgbClr val="96A5A2"/>
             </a:solidFill>
@@ -3239,35 +3716,36 @@
       <p:sp>
         <p:nvSpPr>
           <p:cNvPr id="8" name="Rectángulo 7">
-            <a:extLst>
+            <a:extLst xmlns:a="http://schemas.openxmlformats.org/drawingml/2006/main">
               <a:ext uri="{FF2B5EF4-FFF2-40B4-BE49-F238E27FC236}">
                 <a16:creationId xmlns:a16="http://schemas.microsoft.com/office/drawing/2014/main" id="{80C421F1-9F2E-477F-BA2B-79164E95E194}"/>
               </a:ext>
             </a:extLst>
           </p:cNvPr>
           <p:cNvSpPr>
-            <a:spLocks noGrp="1"/>
-          </p:cNvSpPr>
-          <p:nvPr/>
-        </p:nvSpPr>
-        <p:spPr>
-          <a:xfrm>
+            <a:spLocks xmlns:a="http://schemas.openxmlformats.org/drawingml/2006/main" noGrp="1"/>
+          </p:cNvSpPr>
+          <p:nvPr/>
+        </p:nvSpPr>
+        <p:spPr>
+          <a:xfrm xmlns:a="http://schemas.openxmlformats.org/drawingml/2006/main">
             <a:off x="723900" y="2133600"/>
             <a:ext cx="2152650" cy="514350"/>
           </a:xfrm>
-          <a:prstGeom prst="rect">
-            <a:avLst/>
-          </a:prstGeom>
-          <a:noFill/>
-          <a:ln w="0">
-            <a:noFill/>
-          </a:ln>
-        </p:spPr>
-        <p:txBody>
-          <a:bodyPr anchor="ctr"/>
-          <a:lstStyle/>
-          <a:p>
-            <a:pPr>
+          <a:prstGeom xmlns:a="http://schemas.openxmlformats.org/drawingml/2006/main" prst="rect">
+            <a:avLst/>
+          </a:prstGeom>
+          <a:noFill xmlns:a="http://schemas.openxmlformats.org/drawingml/2006/main"/>
+          <a:ln xmlns:a="http://schemas.openxmlformats.org/drawingml/2006/main" w="0">
+            <a:noFill/>
+          </a:ln>
+        </p:spPr>
+        <p:txBody>
+          <a:bodyPr xmlns:a="http://schemas.openxmlformats.org/drawingml/2006/main" anchor="ctr"/>
+          <a:lstStyle xmlns:a="http://schemas.openxmlformats.org/drawingml/2006/main"/>
+          <a:p xmlns:a="http://schemas.openxmlformats.org/drawingml/2006/main">
+            <a:pPr>
+              <a:buNone/>
               <a:defRPr sz="1425" b="1">
                 <a:solidFill>
                   <a:srgbClr val="FFFFFF"/>
@@ -3288,35 +3766,36 @@
       <p:sp>
         <p:nvSpPr>
           <p:cNvPr id="9" name="Rectángulo 8">
-            <a:extLst>
+            <a:extLst xmlns:a="http://schemas.openxmlformats.org/drawingml/2006/main">
               <a:ext uri="{FF2B5EF4-FFF2-40B4-BE49-F238E27FC236}">
                 <a16:creationId xmlns:a16="http://schemas.microsoft.com/office/drawing/2014/main" id="{1537AC9D-01DD-431D-A0B8-2736697D5147}"/>
               </a:ext>
             </a:extLst>
           </p:cNvPr>
           <p:cNvSpPr>
-            <a:spLocks noGrp="1"/>
-          </p:cNvSpPr>
-          <p:nvPr/>
-        </p:nvSpPr>
-        <p:spPr>
-          <a:xfrm>
+            <a:spLocks xmlns:a="http://schemas.openxmlformats.org/drawingml/2006/main" noGrp="1"/>
+          </p:cNvSpPr>
+          <p:nvPr/>
+        </p:nvSpPr>
+        <p:spPr>
+          <a:xfrm xmlns:a="http://schemas.openxmlformats.org/drawingml/2006/main">
             <a:off x="723900" y="2771775"/>
             <a:ext cx="2152650" cy="952500"/>
           </a:xfrm>
-          <a:prstGeom prst="rect">
-            <a:avLst/>
-          </a:prstGeom>
-          <a:noFill/>
-          <a:ln w="0">
-            <a:noFill/>
-          </a:ln>
-        </p:spPr>
-        <p:txBody>
-          <a:bodyPr anchor="ctr"/>
-          <a:lstStyle/>
-          <a:p>
-            <a:pPr>
+          <a:prstGeom xmlns:a="http://schemas.openxmlformats.org/drawingml/2006/main" prst="rect">
+            <a:avLst/>
+          </a:prstGeom>
+          <a:noFill xmlns:a="http://schemas.openxmlformats.org/drawingml/2006/main"/>
+          <a:ln xmlns:a="http://schemas.openxmlformats.org/drawingml/2006/main" w="0">
+            <a:noFill/>
+          </a:ln>
+        </p:spPr>
+        <p:txBody>
+          <a:bodyPr xmlns:a="http://schemas.openxmlformats.org/drawingml/2006/main" anchor="ctr"/>
+          <a:lstStyle xmlns:a="http://schemas.openxmlformats.org/drawingml/2006/main"/>
+          <a:p xmlns:a="http://schemas.openxmlformats.org/drawingml/2006/main">
+            <a:pPr>
+              <a:buNone/>
               <a:defRPr sz="1350" b="1">
                 <a:solidFill>
                   <a:srgbClr val="F5E7C3"/>
@@ -3337,27 +3816,27 @@
       <p:sp>
         <p:nvSpPr>
           <p:cNvPr id="10" name="Conector recto 9">
-            <a:extLst>
+            <a:extLst xmlns:a="http://schemas.openxmlformats.org/drawingml/2006/main">
               <a:ext uri="{FF2B5EF4-FFF2-40B4-BE49-F238E27FC236}">
                 <a16:creationId xmlns:a16="http://schemas.microsoft.com/office/drawing/2014/main" id="{E31F0AC1-698A-4C06-85A6-017D121203CD}"/>
               </a:ext>
             </a:extLst>
           </p:cNvPr>
           <p:cNvSpPr>
-            <a:spLocks noGrp="1"/>
-          </p:cNvSpPr>
-          <p:nvPr/>
-        </p:nvSpPr>
-        <p:spPr>
-          <a:xfrm>
+            <a:spLocks xmlns:a="http://schemas.openxmlformats.org/drawingml/2006/main" noGrp="1"/>
+          </p:cNvSpPr>
+          <p:nvPr/>
+        </p:nvSpPr>
+        <p:spPr>
+          <a:xfrm xmlns:a="http://schemas.openxmlformats.org/drawingml/2006/main">
             <a:off x="723900" y="3857625"/>
             <a:ext cx="571500" cy="9525"/>
           </a:xfrm>
-          <a:prstGeom prst="line">
-            <a:avLst/>
-          </a:prstGeom>
-          <a:noFill/>
-          <a:ln w="28575">
+          <a:prstGeom xmlns:a="http://schemas.openxmlformats.org/drawingml/2006/main" prst="line">
+            <a:avLst/>
+          </a:prstGeom>
+          <a:noFill xmlns:a="http://schemas.openxmlformats.org/drawingml/2006/main"/>
+          <a:ln xmlns:a="http://schemas.openxmlformats.org/drawingml/2006/main" w="28575">
             <a:solidFill>
               <a:srgbClr val="D9A441"/>
             </a:solidFill>
@@ -3368,35 +3847,36 @@
       <p:sp>
         <p:nvSpPr>
           <p:cNvPr id="11" name="Rectángulo 10">
-            <a:extLst>
+            <a:extLst xmlns:a="http://schemas.openxmlformats.org/drawingml/2006/main">
               <a:ext uri="{FF2B5EF4-FFF2-40B4-BE49-F238E27FC236}">
                 <a16:creationId xmlns:a16="http://schemas.microsoft.com/office/drawing/2014/main" id="{51FA8C67-5C0F-4F4B-BCAC-CA72A523F22C}"/>
               </a:ext>
             </a:extLst>
           </p:cNvPr>
           <p:cNvSpPr>
-            <a:spLocks noGrp="1"/>
-          </p:cNvSpPr>
-          <p:nvPr/>
-        </p:nvSpPr>
-        <p:spPr>
-          <a:xfrm>
+            <a:spLocks xmlns:a="http://schemas.openxmlformats.org/drawingml/2006/main" noGrp="1"/>
+          </p:cNvSpPr>
+          <p:nvPr/>
+        </p:nvSpPr>
+        <p:spPr>
+          <a:xfrm xmlns:a="http://schemas.openxmlformats.org/drawingml/2006/main">
             <a:off x="723900" y="4057650"/>
             <a:ext cx="2152650" cy="1000125"/>
           </a:xfrm>
-          <a:prstGeom prst="rect">
-            <a:avLst/>
-          </a:prstGeom>
-          <a:noFill/>
-          <a:ln w="0">
-            <a:noFill/>
-          </a:ln>
-        </p:spPr>
-        <p:txBody>
-          <a:bodyPr anchor="ctr"/>
-          <a:lstStyle/>
-          <a:p>
-            <a:pPr>
+          <a:prstGeom xmlns:a="http://schemas.openxmlformats.org/drawingml/2006/main" prst="rect">
+            <a:avLst/>
+          </a:prstGeom>
+          <a:noFill xmlns:a="http://schemas.openxmlformats.org/drawingml/2006/main"/>
+          <a:ln xmlns:a="http://schemas.openxmlformats.org/drawingml/2006/main" w="0">
+            <a:noFill/>
+          </a:ln>
+        </p:spPr>
+        <p:txBody>
+          <a:bodyPr xmlns:a="http://schemas.openxmlformats.org/drawingml/2006/main" anchor="ctr"/>
+          <a:lstStyle xmlns:a="http://schemas.openxmlformats.org/drawingml/2006/main"/>
+          <a:p xmlns:a="http://schemas.openxmlformats.org/drawingml/2006/main">
+            <a:pPr>
+              <a:buNone/>
               <a:defRPr sz="1125" b="0">
                 <a:solidFill>
                   <a:srgbClr val="FFFFFF"/>
@@ -3417,31 +3897,31 @@
       <p:sp>
         <p:nvSpPr>
           <p:cNvPr id="12" name="Rectángulo: esquinas redondeadas 11">
-            <a:extLst>
+            <a:extLst xmlns:a="http://schemas.openxmlformats.org/drawingml/2006/main">
               <a:ext uri="{FF2B5EF4-FFF2-40B4-BE49-F238E27FC236}">
                 <a16:creationId xmlns:a16="http://schemas.microsoft.com/office/drawing/2014/main" id="{B54CCF2A-F82C-4629-9AEC-6C0E8321B467}"/>
               </a:ext>
             </a:extLst>
           </p:cNvPr>
           <p:cNvSpPr>
-            <a:spLocks noGrp="1"/>
-          </p:cNvSpPr>
-          <p:nvPr/>
-        </p:nvSpPr>
-        <p:spPr>
-          <a:xfrm>
+            <a:spLocks xmlns:a="http://schemas.openxmlformats.org/drawingml/2006/main" noGrp="1"/>
+          </p:cNvSpPr>
+          <p:nvPr/>
+        </p:nvSpPr>
+        <p:spPr>
+          <a:xfrm xmlns:a="http://schemas.openxmlformats.org/drawingml/2006/main">
             <a:off x="3333750" y="1381125"/>
             <a:ext cx="2533650" cy="3905250"/>
           </a:xfrm>
-          <a:prstGeom prst="roundRect">
+          <a:prstGeom xmlns:a="http://schemas.openxmlformats.org/drawingml/2006/main" prst="roundRect">
             <a:avLst>
               <a:gd name="adj" fmla="val 4511"/>
             </a:avLst>
           </a:prstGeom>
-          <a:solidFill>
+          <a:solidFill xmlns:a="http://schemas.openxmlformats.org/drawingml/2006/main">
             <a:srgbClr val="496B4A"/>
           </a:solidFill>
-          <a:ln w="9525">
+          <a:ln xmlns:a="http://schemas.openxmlformats.org/drawingml/2006/main" w="9525">
             <a:solidFill>
               <a:srgbClr val="D8C48D"/>
             </a:solidFill>
@@ -3449,50 +3929,45 @@
           </a:ln>
         </p:spPr>
         <p:style>
-          <a:lnRef idx="0">
-            <a:scrgbClr r="0" g="0" b="0"/>
-          </a:lnRef>
-          <a:fillRef idx="0">
-            <a:scrgbClr r="0" g="0" b="0"/>
-          </a:fillRef>
-          <a:effectRef idx="4">
-            <a:scrgbClr r="0" g="0" b="0"/>
-          </a:effectRef>
-          <a:fontRef idx="major"/>
+          <a:lnRef xmlns:a="http://schemas.openxmlformats.org/drawingml/2006/main" idx="0"/>
+          <a:fillRef xmlns:a="http://schemas.openxmlformats.org/drawingml/2006/main" idx="0"/>
+          <a:effectRef xmlns:a="http://schemas.openxmlformats.org/drawingml/2006/main" idx="4"/>
+          <a:fontRef xmlns:a="http://schemas.openxmlformats.org/drawingml/2006/main" idx="major"/>
         </p:style>
       </p:sp>
       <p:sp>
         <p:nvSpPr>
           <p:cNvPr id="13" name="Rectángulo 12">
-            <a:extLst>
+            <a:extLst xmlns:a="http://schemas.openxmlformats.org/drawingml/2006/main">
               <a:ext uri="{FF2B5EF4-FFF2-40B4-BE49-F238E27FC236}">
                 <a16:creationId xmlns:a16="http://schemas.microsoft.com/office/drawing/2014/main" id="{355A478B-DBB8-47C8-8164-6A9D50E1DFFD}"/>
               </a:ext>
             </a:extLst>
           </p:cNvPr>
           <p:cNvSpPr>
-            <a:spLocks noGrp="1"/>
-          </p:cNvSpPr>
-          <p:nvPr/>
-        </p:nvSpPr>
-        <p:spPr>
-          <a:xfrm>
+            <a:spLocks xmlns:a="http://schemas.openxmlformats.org/drawingml/2006/main" noGrp="1"/>
+          </p:cNvSpPr>
+          <p:nvPr/>
+        </p:nvSpPr>
+        <p:spPr>
+          <a:xfrm xmlns:a="http://schemas.openxmlformats.org/drawingml/2006/main">
             <a:off x="3524250" y="1581150"/>
             <a:ext cx="419100" cy="285750"/>
           </a:xfrm>
-          <a:prstGeom prst="rect">
-            <a:avLst/>
-          </a:prstGeom>
-          <a:noFill/>
-          <a:ln w="0">
-            <a:noFill/>
-          </a:ln>
-        </p:spPr>
-        <p:txBody>
-          <a:bodyPr anchor="ctr"/>
-          <a:lstStyle/>
-          <a:p>
-            <a:pPr>
+          <a:prstGeom xmlns:a="http://schemas.openxmlformats.org/drawingml/2006/main" prst="rect">
+            <a:avLst/>
+          </a:prstGeom>
+          <a:noFill xmlns:a="http://schemas.openxmlformats.org/drawingml/2006/main"/>
+          <a:ln xmlns:a="http://schemas.openxmlformats.org/drawingml/2006/main" w="0">
+            <a:noFill/>
+          </a:ln>
+        </p:spPr>
+        <p:txBody>
+          <a:bodyPr xmlns:a="http://schemas.openxmlformats.org/drawingml/2006/main" anchor="ctr"/>
+          <a:lstStyle xmlns:a="http://schemas.openxmlformats.org/drawingml/2006/main"/>
+          <a:p xmlns:a="http://schemas.openxmlformats.org/drawingml/2006/main">
+            <a:pPr>
+              <a:buNone/>
               <a:defRPr sz="975" b="1">
                 <a:solidFill>
                   <a:srgbClr val="D9A441"/>
@@ -3513,35 +3988,36 @@
       <p:sp>
         <p:nvSpPr>
           <p:cNvPr id="14" name="Rectángulo 13">
-            <a:extLst>
+            <a:extLst xmlns:a="http://schemas.openxmlformats.org/drawingml/2006/main">
               <a:ext uri="{FF2B5EF4-FFF2-40B4-BE49-F238E27FC236}">
                 <a16:creationId xmlns:a16="http://schemas.microsoft.com/office/drawing/2014/main" id="{E71B0A35-DB7C-48DB-9465-948C04C0742A}"/>
               </a:ext>
             </a:extLst>
           </p:cNvPr>
           <p:cNvSpPr>
-            <a:spLocks noGrp="1"/>
-          </p:cNvSpPr>
-          <p:nvPr/>
-        </p:nvSpPr>
-        <p:spPr>
-          <a:xfrm>
+            <a:spLocks xmlns:a="http://schemas.openxmlformats.org/drawingml/2006/main" noGrp="1"/>
+          </p:cNvSpPr>
+          <p:nvPr/>
+        </p:nvSpPr>
+        <p:spPr>
+          <a:xfrm xmlns:a="http://schemas.openxmlformats.org/drawingml/2006/main">
             <a:off x="4019550" y="1562100"/>
             <a:ext cx="1619250" cy="304800"/>
           </a:xfrm>
-          <a:prstGeom prst="rect">
-            <a:avLst/>
-          </a:prstGeom>
-          <a:noFill/>
-          <a:ln w="0">
-            <a:noFill/>
-          </a:ln>
-        </p:spPr>
-        <p:txBody>
-          <a:bodyPr anchor="ctr"/>
-          <a:lstStyle/>
-          <a:p>
-            <a:pPr>
+          <a:prstGeom xmlns:a="http://schemas.openxmlformats.org/drawingml/2006/main" prst="rect">
+            <a:avLst/>
+          </a:prstGeom>
+          <a:noFill xmlns:a="http://schemas.openxmlformats.org/drawingml/2006/main"/>
+          <a:ln xmlns:a="http://schemas.openxmlformats.org/drawingml/2006/main" w="0">
+            <a:noFill/>
+          </a:ln>
+        </p:spPr>
+        <p:txBody>
+          <a:bodyPr xmlns:a="http://schemas.openxmlformats.org/drawingml/2006/main" anchor="ctr"/>
+          <a:lstStyle xmlns:a="http://schemas.openxmlformats.org/drawingml/2006/main"/>
+          <a:p xmlns:a="http://schemas.openxmlformats.org/drawingml/2006/main">
+            <a:pPr>
+              <a:buNone/>
               <a:defRPr sz="1200" b="1">
                 <a:solidFill>
                   <a:srgbClr val="F5E7C3"/>
@@ -3562,27 +4038,27 @@
       <p:sp>
         <p:nvSpPr>
           <p:cNvPr id="15" name="Conector recto 14">
-            <a:extLst>
+            <a:extLst xmlns:a="http://schemas.openxmlformats.org/drawingml/2006/main">
               <a:ext uri="{FF2B5EF4-FFF2-40B4-BE49-F238E27FC236}">
                 <a16:creationId xmlns:a16="http://schemas.microsoft.com/office/drawing/2014/main" id="{66CA8D28-498A-402B-98C3-16AAF5309041}"/>
               </a:ext>
             </a:extLst>
           </p:cNvPr>
           <p:cNvSpPr>
-            <a:spLocks noGrp="1"/>
-          </p:cNvSpPr>
-          <p:nvPr/>
-        </p:nvSpPr>
-        <p:spPr>
-          <a:xfrm>
+            <a:spLocks xmlns:a="http://schemas.openxmlformats.org/drawingml/2006/main" noGrp="1"/>
+          </p:cNvSpPr>
+          <p:nvPr/>
+        </p:nvSpPr>
+        <p:spPr>
+          <a:xfrm xmlns:a="http://schemas.openxmlformats.org/drawingml/2006/main">
             <a:off x="3524250" y="1971675"/>
             <a:ext cx="2152650" cy="9525"/>
           </a:xfrm>
-          <a:prstGeom prst="line">
-            <a:avLst/>
-          </a:prstGeom>
-          <a:noFill/>
-          <a:ln w="9525">
+          <a:prstGeom xmlns:a="http://schemas.openxmlformats.org/drawingml/2006/main" prst="line">
+            <a:avLst/>
+          </a:prstGeom>
+          <a:noFill xmlns:a="http://schemas.openxmlformats.org/drawingml/2006/main"/>
+          <a:ln xmlns:a="http://schemas.openxmlformats.org/drawingml/2006/main" w="9525">
             <a:solidFill>
               <a:srgbClr val="96A5A2"/>
             </a:solidFill>
@@ -3593,35 +4069,36 @@
       <p:sp>
         <p:nvSpPr>
           <p:cNvPr id="16" name="Rectángulo 15">
-            <a:extLst>
+            <a:extLst xmlns:a="http://schemas.openxmlformats.org/drawingml/2006/main">
               <a:ext uri="{FF2B5EF4-FFF2-40B4-BE49-F238E27FC236}">
                 <a16:creationId xmlns:a16="http://schemas.microsoft.com/office/drawing/2014/main" id="{500BD432-5A8A-4615-A99B-AF730BB29017}"/>
               </a:ext>
             </a:extLst>
           </p:cNvPr>
           <p:cNvSpPr>
-            <a:spLocks noGrp="1"/>
-          </p:cNvSpPr>
-          <p:nvPr/>
-        </p:nvSpPr>
-        <p:spPr>
-          <a:xfrm>
+            <a:spLocks xmlns:a="http://schemas.openxmlformats.org/drawingml/2006/main" noGrp="1"/>
+          </p:cNvSpPr>
+          <p:nvPr/>
+        </p:nvSpPr>
+        <p:spPr>
+          <a:xfrm xmlns:a="http://schemas.openxmlformats.org/drawingml/2006/main">
             <a:off x="3524250" y="2133600"/>
             <a:ext cx="2152650" cy="514350"/>
           </a:xfrm>
-          <a:prstGeom prst="rect">
-            <a:avLst/>
-          </a:prstGeom>
-          <a:noFill/>
-          <a:ln w="0">
-            <a:noFill/>
-          </a:ln>
-        </p:spPr>
-        <p:txBody>
-          <a:bodyPr anchor="ctr"/>
-          <a:lstStyle/>
-          <a:p>
-            <a:pPr>
+          <a:prstGeom xmlns:a="http://schemas.openxmlformats.org/drawingml/2006/main" prst="rect">
+            <a:avLst/>
+          </a:prstGeom>
+          <a:noFill xmlns:a="http://schemas.openxmlformats.org/drawingml/2006/main"/>
+          <a:ln xmlns:a="http://schemas.openxmlformats.org/drawingml/2006/main" w="0">
+            <a:noFill/>
+          </a:ln>
+        </p:spPr>
+        <p:txBody>
+          <a:bodyPr xmlns:a="http://schemas.openxmlformats.org/drawingml/2006/main" anchor="ctr"/>
+          <a:lstStyle xmlns:a="http://schemas.openxmlformats.org/drawingml/2006/main"/>
+          <a:p xmlns:a="http://schemas.openxmlformats.org/drawingml/2006/main">
+            <a:pPr>
+              <a:buNone/>
               <a:defRPr sz="1425" b="1">
                 <a:solidFill>
                   <a:srgbClr val="FFFFFF"/>
@@ -3642,35 +4119,36 @@
       <p:sp>
         <p:nvSpPr>
           <p:cNvPr id="17" name="Rectángulo 16">
-            <a:extLst>
+            <a:extLst xmlns:a="http://schemas.openxmlformats.org/drawingml/2006/main">
               <a:ext uri="{FF2B5EF4-FFF2-40B4-BE49-F238E27FC236}">
                 <a16:creationId xmlns:a16="http://schemas.microsoft.com/office/drawing/2014/main" id="{2A29B886-2F11-434C-AEB0-140D65C3FF10}"/>
               </a:ext>
             </a:extLst>
           </p:cNvPr>
           <p:cNvSpPr>
-            <a:spLocks noGrp="1"/>
-          </p:cNvSpPr>
-          <p:nvPr/>
-        </p:nvSpPr>
-        <p:spPr>
-          <a:xfrm>
+            <a:spLocks xmlns:a="http://schemas.openxmlformats.org/drawingml/2006/main" noGrp="1"/>
+          </p:cNvSpPr>
+          <p:nvPr/>
+        </p:nvSpPr>
+        <p:spPr>
+          <a:xfrm xmlns:a="http://schemas.openxmlformats.org/drawingml/2006/main">
             <a:off x="3524250" y="2771775"/>
             <a:ext cx="2152650" cy="952500"/>
           </a:xfrm>
-          <a:prstGeom prst="rect">
-            <a:avLst/>
-          </a:prstGeom>
-          <a:noFill/>
-          <a:ln w="0">
-            <a:noFill/>
-          </a:ln>
-        </p:spPr>
-        <p:txBody>
-          <a:bodyPr anchor="ctr"/>
-          <a:lstStyle/>
-          <a:p>
-            <a:pPr>
+          <a:prstGeom xmlns:a="http://schemas.openxmlformats.org/drawingml/2006/main" prst="rect">
+            <a:avLst/>
+          </a:prstGeom>
+          <a:noFill xmlns:a="http://schemas.openxmlformats.org/drawingml/2006/main"/>
+          <a:ln xmlns:a="http://schemas.openxmlformats.org/drawingml/2006/main" w="0">
+            <a:noFill/>
+          </a:ln>
+        </p:spPr>
+        <p:txBody>
+          <a:bodyPr xmlns:a="http://schemas.openxmlformats.org/drawingml/2006/main" anchor="ctr"/>
+          <a:lstStyle xmlns:a="http://schemas.openxmlformats.org/drawingml/2006/main"/>
+          <a:p xmlns:a="http://schemas.openxmlformats.org/drawingml/2006/main">
+            <a:pPr>
+              <a:buNone/>
               <a:defRPr sz="1350" b="1">
                 <a:solidFill>
                   <a:srgbClr val="F5E7C3"/>
@@ -3691,27 +4169,27 @@
       <p:sp>
         <p:nvSpPr>
           <p:cNvPr id="18" name="Conector recto 17">
-            <a:extLst>
+            <a:extLst xmlns:a="http://schemas.openxmlformats.org/drawingml/2006/main">
               <a:ext uri="{FF2B5EF4-FFF2-40B4-BE49-F238E27FC236}">
                 <a16:creationId xmlns:a16="http://schemas.microsoft.com/office/drawing/2014/main" id="{58FF9ECC-73F3-426D-9AB0-734B1EDA3CB7}"/>
               </a:ext>
             </a:extLst>
           </p:cNvPr>
           <p:cNvSpPr>
-            <a:spLocks noGrp="1"/>
-          </p:cNvSpPr>
-          <p:nvPr/>
-        </p:nvSpPr>
-        <p:spPr>
-          <a:xfrm>
+            <a:spLocks xmlns:a="http://schemas.openxmlformats.org/drawingml/2006/main" noGrp="1"/>
+          </p:cNvSpPr>
+          <p:nvPr/>
+        </p:nvSpPr>
+        <p:spPr>
+          <a:xfrm xmlns:a="http://schemas.openxmlformats.org/drawingml/2006/main">
             <a:off x="3524250" y="3857625"/>
             <a:ext cx="571500" cy="9525"/>
           </a:xfrm>
-          <a:prstGeom prst="line">
-            <a:avLst/>
-          </a:prstGeom>
-          <a:noFill/>
-          <a:ln w="28575">
+          <a:prstGeom xmlns:a="http://schemas.openxmlformats.org/drawingml/2006/main" prst="line">
+            <a:avLst/>
+          </a:prstGeom>
+          <a:noFill xmlns:a="http://schemas.openxmlformats.org/drawingml/2006/main"/>
+          <a:ln xmlns:a="http://schemas.openxmlformats.org/drawingml/2006/main" w="28575">
             <a:solidFill>
               <a:srgbClr val="D9A441"/>
             </a:solidFill>
@@ -3722,35 +4200,36 @@
       <p:sp>
         <p:nvSpPr>
           <p:cNvPr id="19" name="Rectángulo 18">
-            <a:extLst>
+            <a:extLst xmlns:a="http://schemas.openxmlformats.org/drawingml/2006/main">
               <a:ext uri="{FF2B5EF4-FFF2-40B4-BE49-F238E27FC236}">
                 <a16:creationId xmlns:a16="http://schemas.microsoft.com/office/drawing/2014/main" id="{88D83548-307E-4D0D-A2BB-45A121312C82}"/>
               </a:ext>
             </a:extLst>
           </p:cNvPr>
           <p:cNvSpPr>
-            <a:spLocks noGrp="1"/>
-          </p:cNvSpPr>
-          <p:nvPr/>
-        </p:nvSpPr>
-        <p:spPr>
-          <a:xfrm>
+            <a:spLocks xmlns:a="http://schemas.openxmlformats.org/drawingml/2006/main" noGrp="1"/>
+          </p:cNvSpPr>
+          <p:nvPr/>
+        </p:nvSpPr>
+        <p:spPr>
+          <a:xfrm xmlns:a="http://schemas.openxmlformats.org/drawingml/2006/main">
             <a:off x="3524250" y="4057650"/>
             <a:ext cx="2152650" cy="1000125"/>
           </a:xfrm>
-          <a:prstGeom prst="rect">
-            <a:avLst/>
-          </a:prstGeom>
-          <a:noFill/>
-          <a:ln w="0">
-            <a:noFill/>
-          </a:ln>
-        </p:spPr>
-        <p:txBody>
-          <a:bodyPr anchor="ctr"/>
-          <a:lstStyle/>
-          <a:p>
-            <a:pPr>
+          <a:prstGeom xmlns:a="http://schemas.openxmlformats.org/drawingml/2006/main" prst="rect">
+            <a:avLst/>
+          </a:prstGeom>
+          <a:noFill xmlns:a="http://schemas.openxmlformats.org/drawingml/2006/main"/>
+          <a:ln xmlns:a="http://schemas.openxmlformats.org/drawingml/2006/main" w="0">
+            <a:noFill/>
+          </a:ln>
+        </p:spPr>
+        <p:txBody>
+          <a:bodyPr xmlns:a="http://schemas.openxmlformats.org/drawingml/2006/main" anchor="ctr"/>
+          <a:lstStyle xmlns:a="http://schemas.openxmlformats.org/drawingml/2006/main"/>
+          <a:p xmlns:a="http://schemas.openxmlformats.org/drawingml/2006/main">
+            <a:pPr>
+              <a:buNone/>
               <a:defRPr sz="1125" b="0">
                 <a:solidFill>
                   <a:srgbClr val="FFFFFF"/>
@@ -3771,31 +4250,31 @@
       <p:sp>
         <p:nvSpPr>
           <p:cNvPr id="20" name="Rectángulo: esquinas redondeadas 19">
-            <a:extLst>
+            <a:extLst xmlns:a="http://schemas.openxmlformats.org/drawingml/2006/main">
               <a:ext uri="{FF2B5EF4-FFF2-40B4-BE49-F238E27FC236}">
                 <a16:creationId xmlns:a16="http://schemas.microsoft.com/office/drawing/2014/main" id="{83F9E9AD-DC76-4724-B8B0-4CD903AF494D}"/>
               </a:ext>
             </a:extLst>
           </p:cNvPr>
           <p:cNvSpPr>
-            <a:spLocks noGrp="1"/>
-          </p:cNvSpPr>
-          <p:nvPr/>
-        </p:nvSpPr>
-        <p:spPr>
-          <a:xfrm>
+            <a:spLocks xmlns:a="http://schemas.openxmlformats.org/drawingml/2006/main" noGrp="1"/>
+          </p:cNvSpPr>
+          <p:nvPr/>
+        </p:nvSpPr>
+        <p:spPr>
+          <a:xfrm xmlns:a="http://schemas.openxmlformats.org/drawingml/2006/main">
             <a:off x="6134100" y="1381125"/>
             <a:ext cx="2533650" cy="3905250"/>
           </a:xfrm>
-          <a:prstGeom prst="roundRect">
+          <a:prstGeom xmlns:a="http://schemas.openxmlformats.org/drawingml/2006/main" prst="roundRect">
             <a:avLst>
               <a:gd name="adj" fmla="val 4511"/>
             </a:avLst>
           </a:prstGeom>
-          <a:solidFill>
+          <a:solidFill xmlns:a="http://schemas.openxmlformats.org/drawingml/2006/main">
             <a:srgbClr val="865B45"/>
           </a:solidFill>
-          <a:ln w="9525">
+          <a:ln xmlns:a="http://schemas.openxmlformats.org/drawingml/2006/main" w="9525">
             <a:solidFill>
               <a:srgbClr val="D8C48D"/>
             </a:solidFill>
@@ -3803,50 +4282,45 @@
           </a:ln>
         </p:spPr>
         <p:style>
-          <a:lnRef idx="0">
-            <a:scrgbClr r="0" g="0" b="0"/>
-          </a:lnRef>
-          <a:fillRef idx="0">
-            <a:scrgbClr r="0" g="0" b="0"/>
-          </a:fillRef>
-          <a:effectRef idx="4">
-            <a:scrgbClr r="0" g="0" b="0"/>
-          </a:effectRef>
-          <a:fontRef idx="major"/>
+          <a:lnRef xmlns:a="http://schemas.openxmlformats.org/drawingml/2006/main" idx="0"/>
+          <a:fillRef xmlns:a="http://schemas.openxmlformats.org/drawingml/2006/main" idx="0"/>
+          <a:effectRef xmlns:a="http://schemas.openxmlformats.org/drawingml/2006/main" idx="4"/>
+          <a:fontRef xmlns:a="http://schemas.openxmlformats.org/drawingml/2006/main" idx="major"/>
         </p:style>
       </p:sp>
       <p:sp>
         <p:nvSpPr>
           <p:cNvPr id="21" name="Rectángulo 20">
-            <a:extLst>
+            <a:extLst xmlns:a="http://schemas.openxmlformats.org/drawingml/2006/main">
               <a:ext uri="{FF2B5EF4-FFF2-40B4-BE49-F238E27FC236}">
                 <a16:creationId xmlns:a16="http://schemas.microsoft.com/office/drawing/2014/main" id="{D36563D4-1A9D-44B1-8E7D-442814D58A57}"/>
               </a:ext>
             </a:extLst>
           </p:cNvPr>
           <p:cNvSpPr>
-            <a:spLocks noGrp="1"/>
-          </p:cNvSpPr>
-          <p:nvPr/>
-        </p:nvSpPr>
-        <p:spPr>
-          <a:xfrm>
+            <a:spLocks xmlns:a="http://schemas.openxmlformats.org/drawingml/2006/main" noGrp="1"/>
+          </p:cNvSpPr>
+          <p:nvPr/>
+        </p:nvSpPr>
+        <p:spPr>
+          <a:xfrm xmlns:a="http://schemas.openxmlformats.org/drawingml/2006/main">
             <a:off x="6324600" y="1581150"/>
             <a:ext cx="419100" cy="285750"/>
           </a:xfrm>
-          <a:prstGeom prst="rect">
-            <a:avLst/>
-          </a:prstGeom>
-          <a:noFill/>
-          <a:ln w="0">
-            <a:noFill/>
-          </a:ln>
-        </p:spPr>
-        <p:txBody>
-          <a:bodyPr anchor="ctr"/>
-          <a:lstStyle/>
-          <a:p>
-            <a:pPr>
+          <a:prstGeom xmlns:a="http://schemas.openxmlformats.org/drawingml/2006/main" prst="rect">
+            <a:avLst/>
+          </a:prstGeom>
+          <a:noFill xmlns:a="http://schemas.openxmlformats.org/drawingml/2006/main"/>
+          <a:ln xmlns:a="http://schemas.openxmlformats.org/drawingml/2006/main" w="0">
+            <a:noFill/>
+          </a:ln>
+        </p:spPr>
+        <p:txBody>
+          <a:bodyPr xmlns:a="http://schemas.openxmlformats.org/drawingml/2006/main" anchor="ctr"/>
+          <a:lstStyle xmlns:a="http://schemas.openxmlformats.org/drawingml/2006/main"/>
+          <a:p xmlns:a="http://schemas.openxmlformats.org/drawingml/2006/main">
+            <a:pPr>
+              <a:buNone/>
               <a:defRPr sz="975" b="1">
                 <a:solidFill>
                   <a:srgbClr val="D9A441"/>
@@ -3867,35 +4341,36 @@
       <p:sp>
         <p:nvSpPr>
           <p:cNvPr id="22" name="Rectángulo 21">
-            <a:extLst>
+            <a:extLst xmlns:a="http://schemas.openxmlformats.org/drawingml/2006/main">
               <a:ext uri="{FF2B5EF4-FFF2-40B4-BE49-F238E27FC236}">
                 <a16:creationId xmlns:a16="http://schemas.microsoft.com/office/drawing/2014/main" id="{727E3E34-3C0F-4D35-A6B6-B7F48852A0B6}"/>
               </a:ext>
             </a:extLst>
           </p:cNvPr>
           <p:cNvSpPr>
-            <a:spLocks noGrp="1"/>
-          </p:cNvSpPr>
-          <p:nvPr/>
-        </p:nvSpPr>
-        <p:spPr>
-          <a:xfrm>
+            <a:spLocks xmlns:a="http://schemas.openxmlformats.org/drawingml/2006/main" noGrp="1"/>
+          </p:cNvSpPr>
+          <p:nvPr/>
+        </p:nvSpPr>
+        <p:spPr>
+          <a:xfrm xmlns:a="http://schemas.openxmlformats.org/drawingml/2006/main">
             <a:off x="6819900" y="1562100"/>
             <a:ext cx="1619250" cy="304800"/>
           </a:xfrm>
-          <a:prstGeom prst="rect">
-            <a:avLst/>
-          </a:prstGeom>
-          <a:noFill/>
-          <a:ln w="0">
-            <a:noFill/>
-          </a:ln>
-        </p:spPr>
-        <p:txBody>
-          <a:bodyPr anchor="ctr"/>
-          <a:lstStyle/>
-          <a:p>
-            <a:pPr>
+          <a:prstGeom xmlns:a="http://schemas.openxmlformats.org/drawingml/2006/main" prst="rect">
+            <a:avLst/>
+          </a:prstGeom>
+          <a:noFill xmlns:a="http://schemas.openxmlformats.org/drawingml/2006/main"/>
+          <a:ln xmlns:a="http://schemas.openxmlformats.org/drawingml/2006/main" w="0">
+            <a:noFill/>
+          </a:ln>
+        </p:spPr>
+        <p:txBody>
+          <a:bodyPr xmlns:a="http://schemas.openxmlformats.org/drawingml/2006/main" anchor="ctr"/>
+          <a:lstStyle xmlns:a="http://schemas.openxmlformats.org/drawingml/2006/main"/>
+          <a:p xmlns:a="http://schemas.openxmlformats.org/drawingml/2006/main">
+            <a:pPr>
+              <a:buNone/>
               <a:defRPr sz="1200" b="1">
                 <a:solidFill>
                   <a:srgbClr val="F5E7C3"/>
@@ -3916,27 +4391,27 @@
       <p:sp>
         <p:nvSpPr>
           <p:cNvPr id="23" name="Conector recto 22">
-            <a:extLst>
+            <a:extLst xmlns:a="http://schemas.openxmlformats.org/drawingml/2006/main">
               <a:ext uri="{FF2B5EF4-FFF2-40B4-BE49-F238E27FC236}">
                 <a16:creationId xmlns:a16="http://schemas.microsoft.com/office/drawing/2014/main" id="{721D9E58-FFC0-47B8-98D6-BC3CC419F081}"/>
               </a:ext>
             </a:extLst>
           </p:cNvPr>
           <p:cNvSpPr>
-            <a:spLocks noGrp="1"/>
-          </p:cNvSpPr>
-          <p:nvPr/>
-        </p:nvSpPr>
-        <p:spPr>
-          <a:xfrm>
+            <a:spLocks xmlns:a="http://schemas.openxmlformats.org/drawingml/2006/main" noGrp="1"/>
+          </p:cNvSpPr>
+          <p:nvPr/>
+        </p:nvSpPr>
+        <p:spPr>
+          <a:xfrm xmlns:a="http://schemas.openxmlformats.org/drawingml/2006/main">
             <a:off x="6324600" y="1971675"/>
             <a:ext cx="2152650" cy="9525"/>
           </a:xfrm>
-          <a:prstGeom prst="line">
-            <a:avLst/>
-          </a:prstGeom>
-          <a:noFill/>
-          <a:ln w="9525">
+          <a:prstGeom xmlns:a="http://schemas.openxmlformats.org/drawingml/2006/main" prst="line">
+            <a:avLst/>
+          </a:prstGeom>
+          <a:noFill xmlns:a="http://schemas.openxmlformats.org/drawingml/2006/main"/>
+          <a:ln xmlns:a="http://schemas.openxmlformats.org/drawingml/2006/main" w="9525">
             <a:solidFill>
               <a:srgbClr val="96A5A2"/>
             </a:solidFill>
@@ -3947,35 +4422,36 @@
       <p:sp>
         <p:nvSpPr>
           <p:cNvPr id="24" name="Rectángulo 23">
-            <a:extLst>
+            <a:extLst xmlns:a="http://schemas.openxmlformats.org/drawingml/2006/main">
               <a:ext uri="{FF2B5EF4-FFF2-40B4-BE49-F238E27FC236}">
                 <a16:creationId xmlns:a16="http://schemas.microsoft.com/office/drawing/2014/main" id="{300E4868-92F9-40B4-9D0E-435EAB60A5D4}"/>
               </a:ext>
             </a:extLst>
           </p:cNvPr>
           <p:cNvSpPr>
-            <a:spLocks noGrp="1"/>
-          </p:cNvSpPr>
-          <p:nvPr/>
-        </p:nvSpPr>
-        <p:spPr>
-          <a:xfrm>
+            <a:spLocks xmlns:a="http://schemas.openxmlformats.org/drawingml/2006/main" noGrp="1"/>
+          </p:cNvSpPr>
+          <p:nvPr/>
+        </p:nvSpPr>
+        <p:spPr>
+          <a:xfrm xmlns:a="http://schemas.openxmlformats.org/drawingml/2006/main">
             <a:off x="6324600" y="2133600"/>
             <a:ext cx="2152650" cy="514350"/>
           </a:xfrm>
-          <a:prstGeom prst="rect">
-            <a:avLst/>
-          </a:prstGeom>
-          <a:noFill/>
-          <a:ln w="0">
-            <a:noFill/>
-          </a:ln>
-        </p:spPr>
-        <p:txBody>
-          <a:bodyPr anchor="ctr"/>
-          <a:lstStyle/>
-          <a:p>
-            <a:pPr>
+          <a:prstGeom xmlns:a="http://schemas.openxmlformats.org/drawingml/2006/main" prst="rect">
+            <a:avLst/>
+          </a:prstGeom>
+          <a:noFill xmlns:a="http://schemas.openxmlformats.org/drawingml/2006/main"/>
+          <a:ln xmlns:a="http://schemas.openxmlformats.org/drawingml/2006/main" w="0">
+            <a:noFill/>
+          </a:ln>
+        </p:spPr>
+        <p:txBody>
+          <a:bodyPr xmlns:a="http://schemas.openxmlformats.org/drawingml/2006/main" anchor="ctr"/>
+          <a:lstStyle xmlns:a="http://schemas.openxmlformats.org/drawingml/2006/main"/>
+          <a:p xmlns:a="http://schemas.openxmlformats.org/drawingml/2006/main">
+            <a:pPr>
+              <a:buNone/>
               <a:defRPr sz="1425" b="1">
                 <a:solidFill>
                   <a:srgbClr val="FFFFFF"/>
@@ -3996,35 +4472,36 @@
       <p:sp>
         <p:nvSpPr>
           <p:cNvPr id="25" name="Rectángulo 24">
-            <a:extLst>
+            <a:extLst xmlns:a="http://schemas.openxmlformats.org/drawingml/2006/main">
               <a:ext uri="{FF2B5EF4-FFF2-40B4-BE49-F238E27FC236}">
                 <a16:creationId xmlns:a16="http://schemas.microsoft.com/office/drawing/2014/main" id="{BC582428-796B-4095-98B6-3C2A6FDD46FD}"/>
               </a:ext>
             </a:extLst>
           </p:cNvPr>
           <p:cNvSpPr>
-            <a:spLocks noGrp="1"/>
-          </p:cNvSpPr>
-          <p:nvPr/>
-        </p:nvSpPr>
-        <p:spPr>
-          <a:xfrm>
+            <a:spLocks xmlns:a="http://schemas.openxmlformats.org/drawingml/2006/main" noGrp="1"/>
+          </p:cNvSpPr>
+          <p:nvPr/>
+        </p:nvSpPr>
+        <p:spPr>
+          <a:xfrm xmlns:a="http://schemas.openxmlformats.org/drawingml/2006/main">
             <a:off x="6324600" y="2771775"/>
             <a:ext cx="2152650" cy="952500"/>
           </a:xfrm>
-          <a:prstGeom prst="rect">
-            <a:avLst/>
-          </a:prstGeom>
-          <a:noFill/>
-          <a:ln w="0">
-            <a:noFill/>
-          </a:ln>
-        </p:spPr>
-        <p:txBody>
-          <a:bodyPr anchor="ctr"/>
-          <a:lstStyle/>
-          <a:p>
-            <a:pPr>
+          <a:prstGeom xmlns:a="http://schemas.openxmlformats.org/drawingml/2006/main" prst="rect">
+            <a:avLst/>
+          </a:prstGeom>
+          <a:noFill xmlns:a="http://schemas.openxmlformats.org/drawingml/2006/main"/>
+          <a:ln xmlns:a="http://schemas.openxmlformats.org/drawingml/2006/main" w="0">
+            <a:noFill/>
+          </a:ln>
+        </p:spPr>
+        <p:txBody>
+          <a:bodyPr xmlns:a="http://schemas.openxmlformats.org/drawingml/2006/main" anchor="ctr"/>
+          <a:lstStyle xmlns:a="http://schemas.openxmlformats.org/drawingml/2006/main"/>
+          <a:p xmlns:a="http://schemas.openxmlformats.org/drawingml/2006/main">
+            <a:pPr>
+              <a:buNone/>
               <a:defRPr sz="1350" b="1">
                 <a:solidFill>
                   <a:srgbClr val="F5E7C3"/>
@@ -4045,27 +4522,27 @@
       <p:sp>
         <p:nvSpPr>
           <p:cNvPr id="26" name="Conector recto 25">
-            <a:extLst>
+            <a:extLst xmlns:a="http://schemas.openxmlformats.org/drawingml/2006/main">
               <a:ext uri="{FF2B5EF4-FFF2-40B4-BE49-F238E27FC236}">
                 <a16:creationId xmlns:a16="http://schemas.microsoft.com/office/drawing/2014/main" id="{20EA01E7-7751-4CD8-9B07-E89134EDD688}"/>
               </a:ext>
             </a:extLst>
           </p:cNvPr>
           <p:cNvSpPr>
-            <a:spLocks noGrp="1"/>
-          </p:cNvSpPr>
-          <p:nvPr/>
-        </p:nvSpPr>
-        <p:spPr>
-          <a:xfrm>
+            <a:spLocks xmlns:a="http://schemas.openxmlformats.org/drawingml/2006/main" noGrp="1"/>
+          </p:cNvSpPr>
+          <p:nvPr/>
+        </p:nvSpPr>
+        <p:spPr>
+          <a:xfrm xmlns:a="http://schemas.openxmlformats.org/drawingml/2006/main">
             <a:off x="6324600" y="3857625"/>
             <a:ext cx="571500" cy="9525"/>
           </a:xfrm>
-          <a:prstGeom prst="line">
-            <a:avLst/>
-          </a:prstGeom>
-          <a:noFill/>
-          <a:ln w="28575">
+          <a:prstGeom xmlns:a="http://schemas.openxmlformats.org/drawingml/2006/main" prst="line">
+            <a:avLst/>
+          </a:prstGeom>
+          <a:noFill xmlns:a="http://schemas.openxmlformats.org/drawingml/2006/main"/>
+          <a:ln xmlns:a="http://schemas.openxmlformats.org/drawingml/2006/main" w="28575">
             <a:solidFill>
               <a:srgbClr val="D9A441"/>
             </a:solidFill>
@@ -4076,35 +4553,36 @@
       <p:sp>
         <p:nvSpPr>
           <p:cNvPr id="27" name="Rectángulo 26">
-            <a:extLst>
+            <a:extLst xmlns:a="http://schemas.openxmlformats.org/drawingml/2006/main">
               <a:ext uri="{FF2B5EF4-FFF2-40B4-BE49-F238E27FC236}">
                 <a16:creationId xmlns:a16="http://schemas.microsoft.com/office/drawing/2014/main" id="{77EED197-C142-4BC9-AC15-FD8B4BE9CC63}"/>
               </a:ext>
             </a:extLst>
           </p:cNvPr>
           <p:cNvSpPr>
-            <a:spLocks noGrp="1"/>
-          </p:cNvSpPr>
-          <p:nvPr/>
-        </p:nvSpPr>
-        <p:spPr>
-          <a:xfrm>
+            <a:spLocks xmlns:a="http://schemas.openxmlformats.org/drawingml/2006/main" noGrp="1"/>
+          </p:cNvSpPr>
+          <p:nvPr/>
+        </p:nvSpPr>
+        <p:spPr>
+          <a:xfrm xmlns:a="http://schemas.openxmlformats.org/drawingml/2006/main">
             <a:off x="6324600" y="4057650"/>
             <a:ext cx="2152650" cy="1000125"/>
           </a:xfrm>
-          <a:prstGeom prst="rect">
-            <a:avLst/>
-          </a:prstGeom>
-          <a:noFill/>
-          <a:ln w="0">
-            <a:noFill/>
-          </a:ln>
-        </p:spPr>
-        <p:txBody>
-          <a:bodyPr anchor="ctr"/>
-          <a:lstStyle/>
-          <a:p>
-            <a:pPr>
+          <a:prstGeom xmlns:a="http://schemas.openxmlformats.org/drawingml/2006/main" prst="rect">
+            <a:avLst/>
+          </a:prstGeom>
+          <a:noFill xmlns:a="http://schemas.openxmlformats.org/drawingml/2006/main"/>
+          <a:ln xmlns:a="http://schemas.openxmlformats.org/drawingml/2006/main" w="0">
+            <a:noFill/>
+          </a:ln>
+        </p:spPr>
+        <p:txBody>
+          <a:bodyPr xmlns:a="http://schemas.openxmlformats.org/drawingml/2006/main" anchor="ctr"/>
+          <a:lstStyle xmlns:a="http://schemas.openxmlformats.org/drawingml/2006/main"/>
+          <a:p xmlns:a="http://schemas.openxmlformats.org/drawingml/2006/main">
+            <a:pPr>
+              <a:buNone/>
               <a:defRPr sz="1125" b="0">
                 <a:solidFill>
                   <a:srgbClr val="FFFFFF"/>
@@ -4125,31 +4603,31 @@
       <p:sp>
         <p:nvSpPr>
           <p:cNvPr id="28" name="Rectángulo: esquinas redondeadas 27">
-            <a:extLst>
+            <a:extLst xmlns:a="http://schemas.openxmlformats.org/drawingml/2006/main">
               <a:ext uri="{FF2B5EF4-FFF2-40B4-BE49-F238E27FC236}">
                 <a16:creationId xmlns:a16="http://schemas.microsoft.com/office/drawing/2014/main" id="{77FC9282-B573-472C-9171-60922622F414}"/>
               </a:ext>
             </a:extLst>
           </p:cNvPr>
           <p:cNvSpPr>
-            <a:spLocks noGrp="1"/>
-          </p:cNvSpPr>
-          <p:nvPr/>
-        </p:nvSpPr>
-        <p:spPr>
-          <a:xfrm>
+            <a:spLocks xmlns:a="http://schemas.openxmlformats.org/drawingml/2006/main" noGrp="1"/>
+          </p:cNvSpPr>
+          <p:nvPr/>
+        </p:nvSpPr>
+        <p:spPr>
+          <a:xfrm xmlns:a="http://schemas.openxmlformats.org/drawingml/2006/main">
             <a:off x="8934450" y="1381125"/>
             <a:ext cx="2533650" cy="3905250"/>
           </a:xfrm>
-          <a:prstGeom prst="roundRect">
+          <a:prstGeom xmlns:a="http://schemas.openxmlformats.org/drawingml/2006/main" prst="roundRect">
             <a:avLst>
               <a:gd name="adj" fmla="val 4511"/>
             </a:avLst>
           </a:prstGeom>
-          <a:solidFill>
+          <a:solidFill xmlns:a="http://schemas.openxmlformats.org/drawingml/2006/main">
             <a:srgbClr val="5A5135"/>
           </a:solidFill>
-          <a:ln w="9525">
+          <a:ln xmlns:a="http://schemas.openxmlformats.org/drawingml/2006/main" w="9525">
             <a:solidFill>
               <a:srgbClr val="D8C48D"/>
             </a:solidFill>
@@ -4157,50 +4635,45 @@
           </a:ln>
         </p:spPr>
         <p:style>
-          <a:lnRef idx="0">
-            <a:scrgbClr r="0" g="0" b="0"/>
-          </a:lnRef>
-          <a:fillRef idx="0">
-            <a:scrgbClr r="0" g="0" b="0"/>
-          </a:fillRef>
-          <a:effectRef idx="4">
-            <a:scrgbClr r="0" g="0" b="0"/>
-          </a:effectRef>
-          <a:fontRef idx="major"/>
+          <a:lnRef xmlns:a="http://schemas.openxmlformats.org/drawingml/2006/main" idx="0"/>
+          <a:fillRef xmlns:a="http://schemas.openxmlformats.org/drawingml/2006/main" idx="0"/>
+          <a:effectRef xmlns:a="http://schemas.openxmlformats.org/drawingml/2006/main" idx="4"/>
+          <a:fontRef xmlns:a="http://schemas.openxmlformats.org/drawingml/2006/main" idx="major"/>
         </p:style>
       </p:sp>
       <p:sp>
         <p:nvSpPr>
           <p:cNvPr id="29" name="Rectángulo 28">
-            <a:extLst>
+            <a:extLst xmlns:a="http://schemas.openxmlformats.org/drawingml/2006/main">
               <a:ext uri="{FF2B5EF4-FFF2-40B4-BE49-F238E27FC236}">
                 <a16:creationId xmlns:a16="http://schemas.microsoft.com/office/drawing/2014/main" id="{2AC27A7E-3684-497B-92CE-AF102E6E0113}"/>
               </a:ext>
             </a:extLst>
           </p:cNvPr>
           <p:cNvSpPr>
-            <a:spLocks noGrp="1"/>
-          </p:cNvSpPr>
-          <p:nvPr/>
-        </p:nvSpPr>
-        <p:spPr>
-          <a:xfrm>
+            <a:spLocks xmlns:a="http://schemas.openxmlformats.org/drawingml/2006/main" noGrp="1"/>
+          </p:cNvSpPr>
+          <p:nvPr/>
+        </p:nvSpPr>
+        <p:spPr>
+          <a:xfrm xmlns:a="http://schemas.openxmlformats.org/drawingml/2006/main">
             <a:off x="9124950" y="1581150"/>
             <a:ext cx="419100" cy="285750"/>
           </a:xfrm>
-          <a:prstGeom prst="rect">
-            <a:avLst/>
-          </a:prstGeom>
-          <a:noFill/>
-          <a:ln w="0">
-            <a:noFill/>
-          </a:ln>
-        </p:spPr>
-        <p:txBody>
-          <a:bodyPr anchor="ctr"/>
-          <a:lstStyle/>
-          <a:p>
-            <a:pPr>
+          <a:prstGeom xmlns:a="http://schemas.openxmlformats.org/drawingml/2006/main" prst="rect">
+            <a:avLst/>
+          </a:prstGeom>
+          <a:noFill xmlns:a="http://schemas.openxmlformats.org/drawingml/2006/main"/>
+          <a:ln xmlns:a="http://schemas.openxmlformats.org/drawingml/2006/main" w="0">
+            <a:noFill/>
+          </a:ln>
+        </p:spPr>
+        <p:txBody>
+          <a:bodyPr xmlns:a="http://schemas.openxmlformats.org/drawingml/2006/main" anchor="ctr"/>
+          <a:lstStyle xmlns:a="http://schemas.openxmlformats.org/drawingml/2006/main"/>
+          <a:p xmlns:a="http://schemas.openxmlformats.org/drawingml/2006/main">
+            <a:pPr>
+              <a:buNone/>
               <a:defRPr sz="975" b="1">
                 <a:solidFill>
                   <a:srgbClr val="D9A441"/>
@@ -4221,35 +4694,36 @@
       <p:sp>
         <p:nvSpPr>
           <p:cNvPr id="30" name="Rectángulo 29">
-            <a:extLst>
+            <a:extLst xmlns:a="http://schemas.openxmlformats.org/drawingml/2006/main">
               <a:ext uri="{FF2B5EF4-FFF2-40B4-BE49-F238E27FC236}">
                 <a16:creationId xmlns:a16="http://schemas.microsoft.com/office/drawing/2014/main" id="{541B0600-63A3-4D50-8DCD-C2A91BC9D679}"/>
               </a:ext>
             </a:extLst>
           </p:cNvPr>
           <p:cNvSpPr>
-            <a:spLocks noGrp="1"/>
-          </p:cNvSpPr>
-          <p:nvPr/>
-        </p:nvSpPr>
-        <p:spPr>
-          <a:xfrm>
+            <a:spLocks xmlns:a="http://schemas.openxmlformats.org/drawingml/2006/main" noGrp="1"/>
+          </p:cNvSpPr>
+          <p:nvPr/>
+        </p:nvSpPr>
+        <p:spPr>
+          <a:xfrm xmlns:a="http://schemas.openxmlformats.org/drawingml/2006/main">
             <a:off x="9620250" y="1562100"/>
             <a:ext cx="1619250" cy="304800"/>
           </a:xfrm>
-          <a:prstGeom prst="rect">
-            <a:avLst/>
-          </a:prstGeom>
-          <a:noFill/>
-          <a:ln w="0">
-            <a:noFill/>
-          </a:ln>
-        </p:spPr>
-        <p:txBody>
-          <a:bodyPr anchor="ctr"/>
-          <a:lstStyle/>
-          <a:p>
-            <a:pPr>
+          <a:prstGeom xmlns:a="http://schemas.openxmlformats.org/drawingml/2006/main" prst="rect">
+            <a:avLst/>
+          </a:prstGeom>
+          <a:noFill xmlns:a="http://schemas.openxmlformats.org/drawingml/2006/main"/>
+          <a:ln xmlns:a="http://schemas.openxmlformats.org/drawingml/2006/main" w="0">
+            <a:noFill/>
+          </a:ln>
+        </p:spPr>
+        <p:txBody>
+          <a:bodyPr xmlns:a="http://schemas.openxmlformats.org/drawingml/2006/main" anchor="ctr"/>
+          <a:lstStyle xmlns:a="http://schemas.openxmlformats.org/drawingml/2006/main"/>
+          <a:p xmlns:a="http://schemas.openxmlformats.org/drawingml/2006/main">
+            <a:pPr>
+              <a:buNone/>
               <a:defRPr sz="1200" b="1">
                 <a:solidFill>
                   <a:srgbClr val="F5E7C3"/>
@@ -4270,27 +4744,27 @@
       <p:sp>
         <p:nvSpPr>
           <p:cNvPr id="31" name="Conector recto 30">
-            <a:extLst>
+            <a:extLst xmlns:a="http://schemas.openxmlformats.org/drawingml/2006/main">
               <a:ext uri="{FF2B5EF4-FFF2-40B4-BE49-F238E27FC236}">
                 <a16:creationId xmlns:a16="http://schemas.microsoft.com/office/drawing/2014/main" id="{CD0F8830-070D-4550-BAC0-0FCBBE3D8134}"/>
               </a:ext>
             </a:extLst>
           </p:cNvPr>
           <p:cNvSpPr>
-            <a:spLocks noGrp="1"/>
-          </p:cNvSpPr>
-          <p:nvPr/>
-        </p:nvSpPr>
-        <p:spPr>
-          <a:xfrm>
+            <a:spLocks xmlns:a="http://schemas.openxmlformats.org/drawingml/2006/main" noGrp="1"/>
+          </p:cNvSpPr>
+          <p:nvPr/>
+        </p:nvSpPr>
+        <p:spPr>
+          <a:xfrm xmlns:a="http://schemas.openxmlformats.org/drawingml/2006/main">
             <a:off x="9124950" y="1971675"/>
             <a:ext cx="2152650" cy="9525"/>
           </a:xfrm>
-          <a:prstGeom prst="line">
-            <a:avLst/>
-          </a:prstGeom>
-          <a:noFill/>
-          <a:ln w="9525">
+          <a:prstGeom xmlns:a="http://schemas.openxmlformats.org/drawingml/2006/main" prst="line">
+            <a:avLst/>
+          </a:prstGeom>
+          <a:noFill xmlns:a="http://schemas.openxmlformats.org/drawingml/2006/main"/>
+          <a:ln xmlns:a="http://schemas.openxmlformats.org/drawingml/2006/main" w="9525">
             <a:solidFill>
               <a:srgbClr val="96A5A2"/>
             </a:solidFill>
@@ -4301,35 +4775,36 @@
       <p:sp>
         <p:nvSpPr>
           <p:cNvPr id="32" name="Rectángulo 31">
-            <a:extLst>
+            <a:extLst xmlns:a="http://schemas.openxmlformats.org/drawingml/2006/main">
               <a:ext uri="{FF2B5EF4-FFF2-40B4-BE49-F238E27FC236}">
                 <a16:creationId xmlns:a16="http://schemas.microsoft.com/office/drawing/2014/main" id="{2F68BC15-077A-4086-B47D-446BC43F3C05}"/>
               </a:ext>
             </a:extLst>
           </p:cNvPr>
           <p:cNvSpPr>
-            <a:spLocks noGrp="1"/>
-          </p:cNvSpPr>
-          <p:nvPr/>
-        </p:nvSpPr>
-        <p:spPr>
-          <a:xfrm>
+            <a:spLocks xmlns:a="http://schemas.openxmlformats.org/drawingml/2006/main" noGrp="1"/>
+          </p:cNvSpPr>
+          <p:nvPr/>
+        </p:nvSpPr>
+        <p:spPr>
+          <a:xfrm xmlns:a="http://schemas.openxmlformats.org/drawingml/2006/main">
             <a:off x="9124950" y="2133600"/>
             <a:ext cx="2152650" cy="514350"/>
           </a:xfrm>
-          <a:prstGeom prst="rect">
-            <a:avLst/>
-          </a:prstGeom>
-          <a:noFill/>
-          <a:ln w="0">
-            <a:noFill/>
-          </a:ln>
-        </p:spPr>
-        <p:txBody>
-          <a:bodyPr anchor="ctr"/>
-          <a:lstStyle/>
-          <a:p>
-            <a:pPr>
+          <a:prstGeom xmlns:a="http://schemas.openxmlformats.org/drawingml/2006/main" prst="rect">
+            <a:avLst/>
+          </a:prstGeom>
+          <a:noFill xmlns:a="http://schemas.openxmlformats.org/drawingml/2006/main"/>
+          <a:ln xmlns:a="http://schemas.openxmlformats.org/drawingml/2006/main" w="0">
+            <a:noFill/>
+          </a:ln>
+        </p:spPr>
+        <p:txBody>
+          <a:bodyPr xmlns:a="http://schemas.openxmlformats.org/drawingml/2006/main" anchor="ctr"/>
+          <a:lstStyle xmlns:a="http://schemas.openxmlformats.org/drawingml/2006/main"/>
+          <a:p xmlns:a="http://schemas.openxmlformats.org/drawingml/2006/main">
+            <a:pPr>
+              <a:buNone/>
               <a:defRPr sz="1425" b="1">
                 <a:solidFill>
                   <a:srgbClr val="FFFFFF"/>
@@ -4350,35 +4825,36 @@
       <p:sp>
         <p:nvSpPr>
           <p:cNvPr id="33" name="Rectángulo 32">
-            <a:extLst>
+            <a:extLst xmlns:a="http://schemas.openxmlformats.org/drawingml/2006/main">
               <a:ext uri="{FF2B5EF4-FFF2-40B4-BE49-F238E27FC236}">
                 <a16:creationId xmlns:a16="http://schemas.microsoft.com/office/drawing/2014/main" id="{9B1D6005-D34A-4E37-9CFF-143BEC9BF1F3}"/>
               </a:ext>
             </a:extLst>
           </p:cNvPr>
           <p:cNvSpPr>
-            <a:spLocks noGrp="1"/>
-          </p:cNvSpPr>
-          <p:nvPr/>
-        </p:nvSpPr>
-        <p:spPr>
-          <a:xfrm>
+            <a:spLocks xmlns:a="http://schemas.openxmlformats.org/drawingml/2006/main" noGrp="1"/>
+          </p:cNvSpPr>
+          <p:nvPr/>
+        </p:nvSpPr>
+        <p:spPr>
+          <a:xfrm xmlns:a="http://schemas.openxmlformats.org/drawingml/2006/main">
             <a:off x="9124950" y="2771775"/>
             <a:ext cx="2152650" cy="952500"/>
           </a:xfrm>
-          <a:prstGeom prst="rect">
-            <a:avLst/>
-          </a:prstGeom>
-          <a:noFill/>
-          <a:ln w="0">
-            <a:noFill/>
-          </a:ln>
-        </p:spPr>
-        <p:txBody>
-          <a:bodyPr anchor="ctr"/>
-          <a:lstStyle/>
-          <a:p>
-            <a:pPr>
+          <a:prstGeom xmlns:a="http://schemas.openxmlformats.org/drawingml/2006/main" prst="rect">
+            <a:avLst/>
+          </a:prstGeom>
+          <a:noFill xmlns:a="http://schemas.openxmlformats.org/drawingml/2006/main"/>
+          <a:ln xmlns:a="http://schemas.openxmlformats.org/drawingml/2006/main" w="0">
+            <a:noFill/>
+          </a:ln>
+        </p:spPr>
+        <p:txBody>
+          <a:bodyPr xmlns:a="http://schemas.openxmlformats.org/drawingml/2006/main" anchor="ctr"/>
+          <a:lstStyle xmlns:a="http://schemas.openxmlformats.org/drawingml/2006/main"/>
+          <a:p xmlns:a="http://schemas.openxmlformats.org/drawingml/2006/main">
+            <a:pPr>
+              <a:buNone/>
               <a:defRPr sz="1350" b="1">
                 <a:solidFill>
                   <a:srgbClr val="F5E7C3"/>
@@ -4399,27 +4875,27 @@
       <p:sp>
         <p:nvSpPr>
           <p:cNvPr id="34" name="Conector recto 33">
-            <a:extLst>
+            <a:extLst xmlns:a="http://schemas.openxmlformats.org/drawingml/2006/main">
               <a:ext uri="{FF2B5EF4-FFF2-40B4-BE49-F238E27FC236}">
                 <a16:creationId xmlns:a16="http://schemas.microsoft.com/office/drawing/2014/main" id="{097B30E3-4B9F-42F8-A9F7-556491E3086E}"/>
               </a:ext>
             </a:extLst>
           </p:cNvPr>
           <p:cNvSpPr>
-            <a:spLocks noGrp="1"/>
-          </p:cNvSpPr>
-          <p:nvPr/>
-        </p:nvSpPr>
-        <p:spPr>
-          <a:xfrm>
+            <a:spLocks xmlns:a="http://schemas.openxmlformats.org/drawingml/2006/main" noGrp="1"/>
+          </p:cNvSpPr>
+          <p:nvPr/>
+        </p:nvSpPr>
+        <p:spPr>
+          <a:xfrm xmlns:a="http://schemas.openxmlformats.org/drawingml/2006/main">
             <a:off x="9124950" y="3857625"/>
             <a:ext cx="571500" cy="9525"/>
           </a:xfrm>
-          <a:prstGeom prst="line">
-            <a:avLst/>
-          </a:prstGeom>
-          <a:noFill/>
-          <a:ln w="28575">
+          <a:prstGeom xmlns:a="http://schemas.openxmlformats.org/drawingml/2006/main" prst="line">
+            <a:avLst/>
+          </a:prstGeom>
+          <a:noFill xmlns:a="http://schemas.openxmlformats.org/drawingml/2006/main"/>
+          <a:ln xmlns:a="http://schemas.openxmlformats.org/drawingml/2006/main" w="28575">
             <a:solidFill>
               <a:srgbClr val="D9A441"/>
             </a:solidFill>
@@ -4430,35 +4906,36 @@
       <p:sp>
         <p:nvSpPr>
           <p:cNvPr id="35" name="Rectángulo 34">
-            <a:extLst>
+            <a:extLst xmlns:a="http://schemas.openxmlformats.org/drawingml/2006/main">
               <a:ext uri="{FF2B5EF4-FFF2-40B4-BE49-F238E27FC236}">
                 <a16:creationId xmlns:a16="http://schemas.microsoft.com/office/drawing/2014/main" id="{695C0E6E-C3AE-4CF8-8FEA-6B5576C7A4CE}"/>
               </a:ext>
             </a:extLst>
           </p:cNvPr>
           <p:cNvSpPr>
-            <a:spLocks noGrp="1"/>
-          </p:cNvSpPr>
-          <p:nvPr/>
-        </p:nvSpPr>
-        <p:spPr>
-          <a:xfrm>
+            <a:spLocks xmlns:a="http://schemas.openxmlformats.org/drawingml/2006/main" noGrp="1"/>
+          </p:cNvSpPr>
+          <p:nvPr/>
+        </p:nvSpPr>
+        <p:spPr>
+          <a:xfrm xmlns:a="http://schemas.openxmlformats.org/drawingml/2006/main">
             <a:off x="9124950" y="4057650"/>
             <a:ext cx="2152650" cy="1000125"/>
           </a:xfrm>
-          <a:prstGeom prst="rect">
-            <a:avLst/>
-          </a:prstGeom>
-          <a:noFill/>
-          <a:ln w="0">
-            <a:noFill/>
-          </a:ln>
-        </p:spPr>
-        <p:txBody>
-          <a:bodyPr anchor="ctr"/>
-          <a:lstStyle/>
-          <a:p>
-            <a:pPr>
+          <a:prstGeom xmlns:a="http://schemas.openxmlformats.org/drawingml/2006/main" prst="rect">
+            <a:avLst/>
+          </a:prstGeom>
+          <a:noFill xmlns:a="http://schemas.openxmlformats.org/drawingml/2006/main"/>
+          <a:ln xmlns:a="http://schemas.openxmlformats.org/drawingml/2006/main" w="0">
+            <a:noFill/>
+          </a:ln>
+        </p:spPr>
+        <p:txBody>
+          <a:bodyPr xmlns:a="http://schemas.openxmlformats.org/drawingml/2006/main" anchor="ctr"/>
+          <a:lstStyle xmlns:a="http://schemas.openxmlformats.org/drawingml/2006/main"/>
+          <a:p xmlns:a="http://schemas.openxmlformats.org/drawingml/2006/main">
+            <a:pPr>
+              <a:buNone/>
               <a:defRPr sz="1125" b="0">
                 <a:solidFill>
                   <a:srgbClr val="FFFFFF"/>
@@ -4479,35 +4956,36 @@
       <p:sp>
         <p:nvSpPr>
           <p:cNvPr id="36" name="Rectángulo 35">
-            <a:extLst>
+            <a:extLst xmlns:a="http://schemas.openxmlformats.org/drawingml/2006/main">
               <a:ext uri="{FF2B5EF4-FFF2-40B4-BE49-F238E27FC236}">
                 <a16:creationId xmlns:a16="http://schemas.microsoft.com/office/drawing/2014/main" id="{B381F95A-49F1-4757-9BCD-58948874F0D9}"/>
               </a:ext>
             </a:extLst>
           </p:cNvPr>
           <p:cNvSpPr>
-            <a:spLocks noGrp="1"/>
-          </p:cNvSpPr>
-          <p:nvPr/>
-        </p:nvSpPr>
-        <p:spPr>
-          <a:xfrm>
+            <a:spLocks xmlns:a="http://schemas.openxmlformats.org/drawingml/2006/main" noGrp="1"/>
+          </p:cNvSpPr>
+          <p:nvPr/>
+        </p:nvSpPr>
+        <p:spPr>
+          <a:xfrm xmlns:a="http://schemas.openxmlformats.org/drawingml/2006/main">
             <a:off x="533400" y="5581650"/>
             <a:ext cx="1143000" cy="228600"/>
           </a:xfrm>
-          <a:prstGeom prst="rect">
-            <a:avLst/>
-          </a:prstGeom>
-          <a:noFill/>
-          <a:ln w="0">
-            <a:noFill/>
-          </a:ln>
-        </p:spPr>
-        <p:txBody>
-          <a:bodyPr anchor="ctr"/>
-          <a:lstStyle/>
-          <a:p>
-            <a:pPr>
+          <a:prstGeom xmlns:a="http://schemas.openxmlformats.org/drawingml/2006/main" prst="rect">
+            <a:avLst/>
+          </a:prstGeom>
+          <a:noFill xmlns:a="http://schemas.openxmlformats.org/drawingml/2006/main"/>
+          <a:ln xmlns:a="http://schemas.openxmlformats.org/drawingml/2006/main" w="0">
+            <a:noFill/>
+          </a:ln>
+        </p:spPr>
+        <p:txBody>
+          <a:bodyPr xmlns:a="http://schemas.openxmlformats.org/drawingml/2006/main" anchor="ctr"/>
+          <a:lstStyle xmlns:a="http://schemas.openxmlformats.org/drawingml/2006/main"/>
+          <a:p xmlns:a="http://schemas.openxmlformats.org/drawingml/2006/main">
+            <a:pPr>
+              <a:buNone/>
               <a:defRPr sz="1050" b="1">
                 <a:solidFill>
                   <a:srgbClr val="D9A441"/>
@@ -4528,35 +5006,36 @@
       <p:sp>
         <p:nvSpPr>
           <p:cNvPr id="37" name="Rectángulo 36">
-            <a:extLst>
+            <a:extLst xmlns:a="http://schemas.openxmlformats.org/drawingml/2006/main">
               <a:ext uri="{FF2B5EF4-FFF2-40B4-BE49-F238E27FC236}">
                 <a16:creationId xmlns:a16="http://schemas.microsoft.com/office/drawing/2014/main" id="{1C5AD733-368F-4750-80C9-D90C06620B37}"/>
               </a:ext>
             </a:extLst>
           </p:cNvPr>
           <p:cNvSpPr>
-            <a:spLocks noGrp="1"/>
-          </p:cNvSpPr>
-          <p:nvPr/>
-        </p:nvSpPr>
-        <p:spPr>
-          <a:xfrm>
+            <a:spLocks xmlns:a="http://schemas.openxmlformats.org/drawingml/2006/main" noGrp="1"/>
+          </p:cNvSpPr>
+          <p:nvPr/>
+        </p:nvSpPr>
+        <p:spPr>
+          <a:xfrm xmlns:a="http://schemas.openxmlformats.org/drawingml/2006/main">
             <a:off x="1676400" y="5495925"/>
             <a:ext cx="9982200" cy="419100"/>
           </a:xfrm>
-          <a:prstGeom prst="rect">
-            <a:avLst/>
-          </a:prstGeom>
-          <a:noFill/>
-          <a:ln w="0">
-            <a:noFill/>
-          </a:ln>
-        </p:spPr>
-        <p:txBody>
-          <a:bodyPr anchor="ctr"/>
-          <a:lstStyle/>
-          <a:p>
-            <a:pPr>
+          <a:prstGeom xmlns:a="http://schemas.openxmlformats.org/drawingml/2006/main" prst="rect">
+            <a:avLst/>
+          </a:prstGeom>
+          <a:noFill xmlns:a="http://schemas.openxmlformats.org/drawingml/2006/main"/>
+          <a:ln xmlns:a="http://schemas.openxmlformats.org/drawingml/2006/main" w="0">
+            <a:noFill/>
+          </a:ln>
+        </p:spPr>
+        <p:txBody>
+          <a:bodyPr xmlns:a="http://schemas.openxmlformats.org/drawingml/2006/main" anchor="ctr"/>
+          <a:lstStyle xmlns:a="http://schemas.openxmlformats.org/drawingml/2006/main"/>
+          <a:p xmlns:a="http://schemas.openxmlformats.org/drawingml/2006/main">
+            <a:pPr>
+              <a:buNone/>
               <a:defRPr sz="1425" b="1">
                 <a:solidFill>
                   <a:srgbClr val="07151F"/>
@@ -4577,35 +5056,36 @@
       <p:sp>
         <p:nvSpPr>
           <p:cNvPr id="38" name="Rectángulo 37">
-            <a:extLst>
+            <a:extLst xmlns:a="http://schemas.openxmlformats.org/drawingml/2006/main">
               <a:ext uri="{FF2B5EF4-FFF2-40B4-BE49-F238E27FC236}">
                 <a16:creationId xmlns:a16="http://schemas.microsoft.com/office/drawing/2014/main" id="{10B79631-8116-4707-9F97-E11C327DF760}"/>
               </a:ext>
             </a:extLst>
           </p:cNvPr>
           <p:cNvSpPr>
-            <a:spLocks noGrp="1"/>
-          </p:cNvSpPr>
-          <p:nvPr/>
-        </p:nvSpPr>
-        <p:spPr>
-          <a:xfrm>
+            <a:spLocks xmlns:a="http://schemas.openxmlformats.org/drawingml/2006/main" noGrp="1"/>
+          </p:cNvSpPr>
+          <p:nvPr/>
+        </p:nvSpPr>
+        <p:spPr>
+          <a:xfrm xmlns:a="http://schemas.openxmlformats.org/drawingml/2006/main">
             <a:off x="533400" y="6076950"/>
             <a:ext cx="10668000" cy="323850"/>
           </a:xfrm>
-          <a:prstGeom prst="rect">
-            <a:avLst/>
-          </a:prstGeom>
-          <a:noFill/>
-          <a:ln w="0">
-            <a:noFill/>
-          </a:ln>
-        </p:spPr>
-        <p:txBody>
-          <a:bodyPr anchor="ctr"/>
-          <a:lstStyle/>
-          <a:p>
-            <a:pPr>
+          <a:prstGeom xmlns:a="http://schemas.openxmlformats.org/drawingml/2006/main" prst="rect">
+            <a:avLst/>
+          </a:prstGeom>
+          <a:noFill xmlns:a="http://schemas.openxmlformats.org/drawingml/2006/main"/>
+          <a:ln xmlns:a="http://schemas.openxmlformats.org/drawingml/2006/main" w="0">
+            <a:noFill/>
+          </a:ln>
+        </p:spPr>
+        <p:txBody>
+          <a:bodyPr xmlns:a="http://schemas.openxmlformats.org/drawingml/2006/main" anchor="ctr"/>
+          <a:lstStyle xmlns:a="http://schemas.openxmlformats.org/drawingml/2006/main"/>
+          <a:p xmlns:a="http://schemas.openxmlformats.org/drawingml/2006/main">
+            <a:pPr>
+              <a:buNone/>
               <a:defRPr sz="1350" b="0">
                 <a:solidFill>
                   <a:srgbClr val="40565E"/>
@@ -4626,35 +5106,36 @@
       <p:sp>
         <p:nvSpPr>
           <p:cNvPr id="39" name="Rectángulo 38">
-            <a:extLst>
+            <a:extLst xmlns:a="http://schemas.openxmlformats.org/drawingml/2006/main">
               <a:ext uri="{FF2B5EF4-FFF2-40B4-BE49-F238E27FC236}">
                 <a16:creationId xmlns:a16="http://schemas.microsoft.com/office/drawing/2014/main" id="{4360E03B-D8D8-40B4-A0BC-61403AB2C6AE}"/>
               </a:ext>
             </a:extLst>
           </p:cNvPr>
           <p:cNvSpPr>
-            <a:spLocks noGrp="1"/>
-          </p:cNvSpPr>
-          <p:nvPr/>
-        </p:nvSpPr>
-        <p:spPr>
-          <a:xfrm>
+            <a:spLocks xmlns:a="http://schemas.openxmlformats.org/drawingml/2006/main" noGrp="1"/>
+          </p:cNvSpPr>
+          <p:nvPr/>
+        </p:nvSpPr>
+        <p:spPr>
+          <a:xfrm xmlns:a="http://schemas.openxmlformats.org/drawingml/2006/main">
             <a:off x="11334750" y="6429375"/>
             <a:ext cx="400050" cy="171450"/>
           </a:xfrm>
-          <a:prstGeom prst="rect">
-            <a:avLst/>
-          </a:prstGeom>
-          <a:noFill/>
-          <a:ln w="0">
-            <a:noFill/>
-          </a:ln>
-        </p:spPr>
-        <p:txBody>
-          <a:bodyPr anchor="ctr"/>
-          <a:lstStyle/>
-          <a:p>
-            <a:pPr>
+          <a:prstGeom xmlns:a="http://schemas.openxmlformats.org/drawingml/2006/main" prst="rect">
+            <a:avLst/>
+          </a:prstGeom>
+          <a:noFill xmlns:a="http://schemas.openxmlformats.org/drawingml/2006/main"/>
+          <a:ln xmlns:a="http://schemas.openxmlformats.org/drawingml/2006/main" w="0">
+            <a:noFill/>
+          </a:ln>
+        </p:spPr>
+        <p:txBody>
+          <a:bodyPr xmlns:a="http://schemas.openxmlformats.org/drawingml/2006/main" anchor="ctr"/>
+          <a:lstStyle xmlns:a="http://schemas.openxmlformats.org/drawingml/2006/main"/>
+          <a:p xmlns:a="http://schemas.openxmlformats.org/drawingml/2006/main">
+            <a:pPr>
+              <a:buNone/>
               <a:defRPr sz="825" b="0">
                 <a:solidFill>
                   <a:srgbClr val="B8C3C7"/>
@@ -4679,21 +5160,17 @@
       </p:ext>
     </p:extLst>
   </p:cSld>
-  <p:clrMapOvr>
-    <a:masterClrMapping/>
-  </p:clrMapOvr>
 </p:sld>
 </file>
 
 <file path=ppt/slides/slide3.xml><?xml version="1.0" encoding="utf-8"?>
-<p:sld xmlns:a="http://schemas.openxmlformats.org/drawingml/2006/main" xmlns:r="http://schemas.openxmlformats.org/officeDocument/2006/relationships" xmlns:p="http://schemas.openxmlformats.org/presentationml/2006/main">
+<p:sld xmlns:p="http://schemas.openxmlformats.org/presentationml/2006/main">
   <p:cSld>
     <p:bg>
       <p:bgPr>
-        <a:solidFill>
+        <a:solidFill xmlns:a="http://schemas.openxmlformats.org/drawingml/2006/main">
           <a:srgbClr val="07151F"/>
         </a:solidFill>
-        <a:effectLst/>
       </p:bgPr>
     </p:bg>
     <p:spTree>
@@ -4703,45 +5180,41 @@
         <p:nvPr/>
       </p:nvGrpSpPr>
       <p:grpSpPr>
-        <a:xfrm>
-          <a:off x="0" y="0"/>
-          <a:ext cx="0" cy="0"/>
-          <a:chOff x="0" y="0"/>
-          <a:chExt cx="0" cy="0"/>
-        </a:xfrm>
+        <a:xfrm xmlns:a="http://schemas.openxmlformats.org/drawingml/2006/main"/>
       </p:grpSpPr>
       <p:sp>
         <p:nvSpPr>
           <p:cNvPr id="43" name="Rectángulo 42">
-            <a:extLst>
+            <a:extLst xmlns:a="http://schemas.openxmlformats.org/drawingml/2006/main">
               <a:ext uri="{FF2B5EF4-FFF2-40B4-BE49-F238E27FC236}">
                 <a16:creationId xmlns:a16="http://schemas.microsoft.com/office/drawing/2014/main" id="{53C88EF1-7990-4A69-ABBC-6CF451A06446}"/>
               </a:ext>
             </a:extLst>
           </p:cNvPr>
           <p:cNvSpPr>
-            <a:spLocks noGrp="1"/>
-          </p:cNvSpPr>
-          <p:nvPr/>
-        </p:nvSpPr>
-        <p:spPr>
-          <a:xfrm>
+            <a:spLocks xmlns:a="http://schemas.openxmlformats.org/drawingml/2006/main" noGrp="1"/>
+          </p:cNvSpPr>
+          <p:nvPr/>
+        </p:nvSpPr>
+        <p:spPr>
+          <a:xfrm xmlns:a="http://schemas.openxmlformats.org/drawingml/2006/main">
             <a:off x="514350" y="247650"/>
             <a:ext cx="7429500" cy="400050"/>
           </a:xfrm>
-          <a:prstGeom prst="rect">
-            <a:avLst/>
-          </a:prstGeom>
-          <a:noFill/>
-          <a:ln w="0">
-            <a:noFill/>
-          </a:ln>
-        </p:spPr>
-        <p:txBody>
-          <a:bodyPr anchor="ctr"/>
-          <a:lstStyle/>
-          <a:p>
-            <a:pPr>
+          <a:prstGeom xmlns:a="http://schemas.openxmlformats.org/drawingml/2006/main" prst="rect">
+            <a:avLst/>
+          </a:prstGeom>
+          <a:noFill xmlns:a="http://schemas.openxmlformats.org/drawingml/2006/main"/>
+          <a:ln xmlns:a="http://schemas.openxmlformats.org/drawingml/2006/main" w="0">
+            <a:noFill/>
+          </a:ln>
+        </p:spPr>
+        <p:txBody>
+          <a:bodyPr xmlns:a="http://schemas.openxmlformats.org/drawingml/2006/main" anchor="ctr"/>
+          <a:lstStyle xmlns:a="http://schemas.openxmlformats.org/drawingml/2006/main"/>
+          <a:p xmlns:a="http://schemas.openxmlformats.org/drawingml/2006/main">
+            <a:pPr>
+              <a:buNone/>
               <a:defRPr sz="2250" b="1">
                 <a:solidFill>
                   <a:srgbClr val="FFFFFF"/>
@@ -4762,35 +5235,36 @@
       <p:sp>
         <p:nvSpPr>
           <p:cNvPr id="2" name="Rectángulo 1">
-            <a:extLst>
+            <a:extLst xmlns:a="http://schemas.openxmlformats.org/drawingml/2006/main">
               <a:ext uri="{FF2B5EF4-FFF2-40B4-BE49-F238E27FC236}">
                 <a16:creationId xmlns:a16="http://schemas.microsoft.com/office/drawing/2014/main" id="{92328298-5735-44A1-9D3B-60B29C4F75F3}"/>
               </a:ext>
             </a:extLst>
           </p:cNvPr>
           <p:cNvSpPr>
-            <a:spLocks noGrp="1"/>
-          </p:cNvSpPr>
-          <p:nvPr/>
-        </p:nvSpPr>
-        <p:spPr>
-          <a:xfrm>
+            <a:spLocks xmlns:a="http://schemas.openxmlformats.org/drawingml/2006/main" noGrp="1"/>
+          </p:cNvSpPr>
+          <p:nvPr/>
+        </p:nvSpPr>
+        <p:spPr>
+          <a:xfrm xmlns:a="http://schemas.openxmlformats.org/drawingml/2006/main">
             <a:off x="533400" y="666750"/>
             <a:ext cx="8763000" cy="266700"/>
           </a:xfrm>
-          <a:prstGeom prst="rect">
-            <a:avLst/>
-          </a:prstGeom>
-          <a:noFill/>
-          <a:ln w="0">
-            <a:noFill/>
-          </a:ln>
-        </p:spPr>
-        <p:txBody>
-          <a:bodyPr anchor="ctr"/>
-          <a:lstStyle/>
-          <a:p>
-            <a:pPr>
+          <a:prstGeom xmlns:a="http://schemas.openxmlformats.org/drawingml/2006/main" prst="rect">
+            <a:avLst/>
+          </a:prstGeom>
+          <a:noFill xmlns:a="http://schemas.openxmlformats.org/drawingml/2006/main"/>
+          <a:ln xmlns:a="http://schemas.openxmlformats.org/drawingml/2006/main" w="0">
+            <a:noFill/>
+          </a:ln>
+        </p:spPr>
+        <p:txBody>
+          <a:bodyPr xmlns:a="http://schemas.openxmlformats.org/drawingml/2006/main" anchor="ctr"/>
+          <a:lstStyle xmlns:a="http://schemas.openxmlformats.org/drawingml/2006/main"/>
+          <a:p xmlns:a="http://schemas.openxmlformats.org/drawingml/2006/main">
+            <a:pPr>
+              <a:buNone/>
               <a:defRPr sz="1200" b="0">
                 <a:solidFill>
                   <a:srgbClr val="F5E7C3"/>
@@ -4811,27 +5285,27 @@
       <p:sp>
         <p:nvSpPr>
           <p:cNvPr id="3" name="Conector recto 2">
-            <a:extLst>
+            <a:extLst xmlns:a="http://schemas.openxmlformats.org/drawingml/2006/main">
               <a:ext uri="{FF2B5EF4-FFF2-40B4-BE49-F238E27FC236}">
                 <a16:creationId xmlns:a16="http://schemas.microsoft.com/office/drawing/2014/main" id="{10BC4743-C41F-4DB3-AE82-190DDB79EDC3}"/>
               </a:ext>
             </a:extLst>
           </p:cNvPr>
           <p:cNvSpPr>
-            <a:spLocks noGrp="1"/>
-          </p:cNvSpPr>
-          <p:nvPr/>
-        </p:nvSpPr>
-        <p:spPr>
-          <a:xfrm>
+            <a:spLocks xmlns:a="http://schemas.openxmlformats.org/drawingml/2006/main" noGrp="1"/>
+          </p:cNvSpPr>
+          <p:nvPr/>
+        </p:nvSpPr>
+        <p:spPr>
+          <a:xfrm xmlns:a="http://schemas.openxmlformats.org/drawingml/2006/main">
             <a:off x="533400" y="1066800"/>
             <a:ext cx="11125200" cy="9525"/>
           </a:xfrm>
-          <a:prstGeom prst="line">
-            <a:avLst/>
-          </a:prstGeom>
-          <a:noFill/>
-          <a:ln w="28575">
+          <a:prstGeom xmlns:a="http://schemas.openxmlformats.org/drawingml/2006/main" prst="line">
+            <a:avLst/>
+          </a:prstGeom>
+          <a:noFill xmlns:a="http://schemas.openxmlformats.org/drawingml/2006/main"/>
+          <a:ln xmlns:a="http://schemas.openxmlformats.org/drawingml/2006/main" w="28575">
             <a:solidFill>
               <a:srgbClr val="D9A441"/>
             </a:solidFill>
@@ -4842,27 +5316,27 @@
       <p:sp>
         <p:nvSpPr>
           <p:cNvPr id="4" name="Conector recto 3">
-            <a:extLst>
+            <a:extLst xmlns:a="http://schemas.openxmlformats.org/drawingml/2006/main">
               <a:ext uri="{FF2B5EF4-FFF2-40B4-BE49-F238E27FC236}">
                 <a16:creationId xmlns:a16="http://schemas.microsoft.com/office/drawing/2014/main" id="{6375B53B-3AA1-4460-8323-A486114CD6C2}"/>
               </a:ext>
             </a:extLst>
           </p:cNvPr>
           <p:cNvSpPr>
-            <a:spLocks noGrp="1"/>
-          </p:cNvSpPr>
-          <p:nvPr/>
-        </p:nvSpPr>
-        <p:spPr>
-          <a:xfrm>
+            <a:spLocks xmlns:a="http://schemas.openxmlformats.org/drawingml/2006/main" noGrp="1"/>
+          </p:cNvSpPr>
+          <p:nvPr/>
+        </p:nvSpPr>
+        <p:spPr>
+          <a:xfrm xmlns:a="http://schemas.openxmlformats.org/drawingml/2006/main">
             <a:off x="1257300" y="1619250"/>
             <a:ext cx="9525" cy="4000500"/>
           </a:xfrm>
-          <a:prstGeom prst="line">
-            <a:avLst/>
-          </a:prstGeom>
-          <a:noFill/>
-          <a:ln w="28575">
+          <a:prstGeom xmlns:a="http://schemas.openxmlformats.org/drawingml/2006/main" prst="line">
+            <a:avLst/>
+          </a:prstGeom>
+          <a:noFill xmlns:a="http://schemas.openxmlformats.org/drawingml/2006/main"/>
+          <a:ln xmlns:a="http://schemas.openxmlformats.org/drawingml/2006/main" w="28575">
             <a:solidFill>
               <a:srgbClr val="627984"/>
             </a:solidFill>
@@ -4873,29 +5347,29 @@
       <p:sp>
         <p:nvSpPr>
           <p:cNvPr id="5" name="Elipse 4">
-            <a:extLst>
+            <a:extLst xmlns:a="http://schemas.openxmlformats.org/drawingml/2006/main">
               <a:ext uri="{FF2B5EF4-FFF2-40B4-BE49-F238E27FC236}">
                 <a16:creationId xmlns:a16="http://schemas.microsoft.com/office/drawing/2014/main" id="{E8FF985D-7012-4049-8855-F4E7978EF42E}"/>
               </a:ext>
             </a:extLst>
           </p:cNvPr>
           <p:cNvSpPr>
-            <a:spLocks noGrp="1"/>
-          </p:cNvSpPr>
-          <p:nvPr/>
-        </p:nvSpPr>
-        <p:spPr>
-          <a:xfrm>
+            <a:spLocks xmlns:a="http://schemas.openxmlformats.org/drawingml/2006/main" noGrp="1"/>
+          </p:cNvSpPr>
+          <p:nvPr/>
+        </p:nvSpPr>
+        <p:spPr>
+          <a:xfrm xmlns:a="http://schemas.openxmlformats.org/drawingml/2006/main">
             <a:off x="1085850" y="1447800"/>
             <a:ext cx="361950" cy="361950"/>
           </a:xfrm>
-          <a:prstGeom prst="ellipse">
-            <a:avLst/>
-          </a:prstGeom>
-          <a:solidFill>
+          <a:prstGeom xmlns:a="http://schemas.openxmlformats.org/drawingml/2006/main" prst="ellipse">
+            <a:avLst/>
+          </a:prstGeom>
+          <a:solidFill xmlns:a="http://schemas.openxmlformats.org/drawingml/2006/main">
             <a:srgbClr val="D9A441"/>
           </a:solidFill>
-          <a:ln w="9525">
+          <a:ln xmlns:a="http://schemas.openxmlformats.org/drawingml/2006/main" w="9525">
             <a:solidFill>
               <a:srgbClr val="F5E7C3"/>
             </a:solidFill>
@@ -4905,35 +5379,36 @@
       <p:sp>
         <p:nvSpPr>
           <p:cNvPr id="6" name="Rectángulo 5">
-            <a:extLst>
+            <a:extLst xmlns:a="http://schemas.openxmlformats.org/drawingml/2006/main">
               <a:ext uri="{FF2B5EF4-FFF2-40B4-BE49-F238E27FC236}">
                 <a16:creationId xmlns:a16="http://schemas.microsoft.com/office/drawing/2014/main" id="{BCCD8C92-E8A4-4942-8D70-4FEB732106B1}"/>
               </a:ext>
             </a:extLst>
           </p:cNvPr>
           <p:cNvSpPr>
-            <a:spLocks noGrp="1"/>
-          </p:cNvSpPr>
-          <p:nvPr/>
-        </p:nvSpPr>
-        <p:spPr>
-          <a:xfrm>
+            <a:spLocks xmlns:a="http://schemas.openxmlformats.org/drawingml/2006/main" noGrp="1"/>
+          </p:cNvSpPr>
+          <p:nvPr/>
+        </p:nvSpPr>
+        <p:spPr>
+          <a:xfrm xmlns:a="http://schemas.openxmlformats.org/drawingml/2006/main">
             <a:off x="1085850" y="1466850"/>
             <a:ext cx="361950" cy="323850"/>
           </a:xfrm>
-          <a:prstGeom prst="rect">
-            <a:avLst/>
-          </a:prstGeom>
-          <a:noFill/>
-          <a:ln w="0">
-            <a:noFill/>
-          </a:ln>
-        </p:spPr>
-        <p:txBody>
-          <a:bodyPr anchor="ctr"/>
-          <a:lstStyle/>
-          <a:p>
-            <a:pPr>
+          <a:prstGeom xmlns:a="http://schemas.openxmlformats.org/drawingml/2006/main" prst="rect">
+            <a:avLst/>
+          </a:prstGeom>
+          <a:noFill xmlns:a="http://schemas.openxmlformats.org/drawingml/2006/main"/>
+          <a:ln xmlns:a="http://schemas.openxmlformats.org/drawingml/2006/main" w="0">
+            <a:noFill/>
+          </a:ln>
+        </p:spPr>
+        <p:txBody>
+          <a:bodyPr xmlns:a="http://schemas.openxmlformats.org/drawingml/2006/main" anchor="ctr"/>
+          <a:lstStyle xmlns:a="http://schemas.openxmlformats.org/drawingml/2006/main"/>
+          <a:p xmlns:a="http://schemas.openxmlformats.org/drawingml/2006/main">
+            <a:pPr>
+              <a:buNone/>
               <a:defRPr sz="1125" b="1">
                 <a:solidFill>
                   <a:srgbClr val="FFFFFF"/>
@@ -4954,35 +5429,36 @@
       <p:sp>
         <p:nvSpPr>
           <p:cNvPr id="7" name="Rectángulo 6">
-            <a:extLst>
+            <a:extLst xmlns:a="http://schemas.openxmlformats.org/drawingml/2006/main">
               <a:ext uri="{FF2B5EF4-FFF2-40B4-BE49-F238E27FC236}">
                 <a16:creationId xmlns:a16="http://schemas.microsoft.com/office/drawing/2014/main" id="{7D28D4B5-83E9-4A6C-BA6E-7AF1E1332809}"/>
               </a:ext>
             </a:extLst>
           </p:cNvPr>
           <p:cNvSpPr>
-            <a:spLocks noGrp="1"/>
-          </p:cNvSpPr>
-          <p:nvPr/>
-        </p:nvSpPr>
-        <p:spPr>
-          <a:xfrm>
+            <a:spLocks xmlns:a="http://schemas.openxmlformats.org/drawingml/2006/main" noGrp="1"/>
+          </p:cNvSpPr>
+          <p:nvPr/>
+        </p:nvSpPr>
+        <p:spPr>
+          <a:xfrm xmlns:a="http://schemas.openxmlformats.org/drawingml/2006/main">
             <a:off x="533400" y="1466850"/>
             <a:ext cx="457200" cy="304800"/>
           </a:xfrm>
-          <a:prstGeom prst="rect">
-            <a:avLst/>
-          </a:prstGeom>
-          <a:noFill/>
-          <a:ln w="0">
-            <a:noFill/>
-          </a:ln>
-        </p:spPr>
-        <p:txBody>
-          <a:bodyPr anchor="ctr"/>
-          <a:lstStyle/>
-          <a:p>
-            <a:pPr>
+          <a:prstGeom xmlns:a="http://schemas.openxmlformats.org/drawingml/2006/main" prst="rect">
+            <a:avLst/>
+          </a:prstGeom>
+          <a:noFill xmlns:a="http://schemas.openxmlformats.org/drawingml/2006/main"/>
+          <a:ln xmlns:a="http://schemas.openxmlformats.org/drawingml/2006/main" w="0">
+            <a:noFill/>
+          </a:ln>
+        </p:spPr>
+        <p:txBody>
+          <a:bodyPr xmlns:a="http://schemas.openxmlformats.org/drawingml/2006/main" anchor="ctr"/>
+          <a:lstStyle xmlns:a="http://schemas.openxmlformats.org/drawingml/2006/main"/>
+          <a:p xmlns:a="http://schemas.openxmlformats.org/drawingml/2006/main">
+            <a:pPr>
+              <a:buNone/>
               <a:defRPr sz="975" b="1">
                 <a:solidFill>
                   <a:srgbClr val="AAB9BC"/>
@@ -5003,35 +5479,36 @@
       <p:sp>
         <p:nvSpPr>
           <p:cNvPr id="8" name="Rectángulo 7">
-            <a:extLst>
+            <a:extLst xmlns:a="http://schemas.openxmlformats.org/drawingml/2006/main">
               <a:ext uri="{FF2B5EF4-FFF2-40B4-BE49-F238E27FC236}">
                 <a16:creationId xmlns:a16="http://schemas.microsoft.com/office/drawing/2014/main" id="{B2EA4705-1FF4-4311-96DC-0AAD55DB29FE}"/>
               </a:ext>
             </a:extLst>
           </p:cNvPr>
           <p:cNvSpPr>
-            <a:spLocks noGrp="1"/>
-          </p:cNvSpPr>
-          <p:nvPr/>
-        </p:nvSpPr>
-        <p:spPr>
-          <a:xfrm>
+            <a:spLocks xmlns:a="http://schemas.openxmlformats.org/drawingml/2006/main" noGrp="1"/>
+          </p:cNvSpPr>
+          <p:nvPr/>
+        </p:nvSpPr>
+        <p:spPr>
+          <a:xfrm xmlns:a="http://schemas.openxmlformats.org/drawingml/2006/main">
             <a:off x="1752600" y="1352550"/>
             <a:ext cx="1809750" cy="285750"/>
           </a:xfrm>
-          <a:prstGeom prst="rect">
-            <a:avLst/>
-          </a:prstGeom>
-          <a:noFill/>
-          <a:ln w="0">
-            <a:noFill/>
-          </a:ln>
-        </p:spPr>
-        <p:txBody>
-          <a:bodyPr anchor="ctr"/>
-          <a:lstStyle/>
-          <a:p>
-            <a:pPr>
+          <a:prstGeom xmlns:a="http://schemas.openxmlformats.org/drawingml/2006/main" prst="rect">
+            <a:avLst/>
+          </a:prstGeom>
+          <a:noFill xmlns:a="http://schemas.openxmlformats.org/drawingml/2006/main"/>
+          <a:ln xmlns:a="http://schemas.openxmlformats.org/drawingml/2006/main" w="0">
+            <a:noFill/>
+          </a:ln>
+        </p:spPr>
+        <p:txBody>
+          <a:bodyPr xmlns:a="http://schemas.openxmlformats.org/drawingml/2006/main" anchor="ctr"/>
+          <a:lstStyle xmlns:a="http://schemas.openxmlformats.org/drawingml/2006/main"/>
+          <a:p xmlns:a="http://schemas.openxmlformats.org/drawingml/2006/main">
+            <a:pPr>
+              <a:buNone/>
               <a:defRPr sz="1350" b="1">
                 <a:solidFill>
                   <a:srgbClr val="D9A441"/>
@@ -5052,35 +5529,36 @@
       <p:sp>
         <p:nvSpPr>
           <p:cNvPr id="9" name="Rectángulo 8">
-            <a:extLst>
+            <a:extLst xmlns:a="http://schemas.openxmlformats.org/drawingml/2006/main">
               <a:ext uri="{FF2B5EF4-FFF2-40B4-BE49-F238E27FC236}">
                 <a16:creationId xmlns:a16="http://schemas.microsoft.com/office/drawing/2014/main" id="{477E6774-15D6-4800-8AA4-01B6AE426F62}"/>
               </a:ext>
             </a:extLst>
           </p:cNvPr>
           <p:cNvSpPr>
-            <a:spLocks noGrp="1"/>
-          </p:cNvSpPr>
-          <p:nvPr/>
-        </p:nvSpPr>
-        <p:spPr>
-          <a:xfrm>
+            <a:spLocks xmlns:a="http://schemas.openxmlformats.org/drawingml/2006/main" noGrp="1"/>
+          </p:cNvSpPr>
+          <p:nvPr/>
+        </p:nvSpPr>
+        <p:spPr>
+          <a:xfrm xmlns:a="http://schemas.openxmlformats.org/drawingml/2006/main">
             <a:off x="1752600" y="1647825"/>
             <a:ext cx="4286250" cy="457200"/>
           </a:xfrm>
-          <a:prstGeom prst="rect">
-            <a:avLst/>
-          </a:prstGeom>
-          <a:noFill/>
-          <a:ln w="0">
-            <a:noFill/>
-          </a:ln>
-        </p:spPr>
-        <p:txBody>
-          <a:bodyPr anchor="ctr"/>
-          <a:lstStyle/>
-          <a:p>
-            <a:pPr>
+          <a:prstGeom xmlns:a="http://schemas.openxmlformats.org/drawingml/2006/main" prst="rect">
+            <a:avLst/>
+          </a:prstGeom>
+          <a:noFill xmlns:a="http://schemas.openxmlformats.org/drawingml/2006/main"/>
+          <a:ln xmlns:a="http://schemas.openxmlformats.org/drawingml/2006/main" w="0">
+            <a:noFill/>
+          </a:ln>
+        </p:spPr>
+        <p:txBody>
+          <a:bodyPr xmlns:a="http://schemas.openxmlformats.org/drawingml/2006/main" anchor="ctr"/>
+          <a:lstStyle xmlns:a="http://schemas.openxmlformats.org/drawingml/2006/main"/>
+          <a:p xmlns:a="http://schemas.openxmlformats.org/drawingml/2006/main">
+            <a:pPr>
+              <a:buNone/>
               <a:defRPr sz="1125" b="0">
                 <a:solidFill>
                   <a:srgbClr val="FFFFFF"/>
@@ -5101,28 +5579,28 @@
       <p:sp>
         <p:nvSpPr>
           <p:cNvPr id="10" name="Rectángulo: esquinas redondeadas 9">
-            <a:extLst>
+            <a:extLst xmlns:a="http://schemas.openxmlformats.org/drawingml/2006/main">
               <a:ext uri="{FF2B5EF4-FFF2-40B4-BE49-F238E27FC236}">
                 <a16:creationId xmlns:a16="http://schemas.microsoft.com/office/drawing/2014/main" id="{2093CDD0-60C3-4498-B8E9-DFB2374BE143}"/>
               </a:ext>
             </a:extLst>
           </p:cNvPr>
           <p:cNvSpPr>
-            <a:spLocks noGrp="1"/>
-          </p:cNvSpPr>
-          <p:nvPr/>
-        </p:nvSpPr>
-        <p:spPr>
-          <a:xfrm>
+            <a:spLocks xmlns:a="http://schemas.openxmlformats.org/drawingml/2006/main" noGrp="1"/>
+          </p:cNvSpPr>
+          <p:nvPr/>
+        </p:nvSpPr>
+        <p:spPr>
+          <a:xfrm xmlns:a="http://schemas.openxmlformats.org/drawingml/2006/main">
             <a:off x="6524625" y="1352550"/>
             <a:ext cx="4953000" cy="666750"/>
           </a:xfrm>
-          <a:prstGeom prst="roundRect">
+          <a:prstGeom xmlns:a="http://schemas.openxmlformats.org/drawingml/2006/main" prst="roundRect">
             <a:avLst>
               <a:gd name="adj" fmla="val 17143"/>
             </a:avLst>
           </a:prstGeom>
-          <a:ln w="9525">
+          <a:ln xmlns:a="http://schemas.openxmlformats.org/drawingml/2006/main" w="9525">
             <a:solidFill>
               <a:srgbClr val="6E8790"/>
             </a:solidFill>
@@ -5133,35 +5611,36 @@
       <p:sp>
         <p:nvSpPr>
           <p:cNvPr id="11" name="Rectángulo 10">
-            <a:extLst>
+            <a:extLst xmlns:a="http://schemas.openxmlformats.org/drawingml/2006/main">
               <a:ext uri="{FF2B5EF4-FFF2-40B4-BE49-F238E27FC236}">
                 <a16:creationId xmlns:a16="http://schemas.microsoft.com/office/drawing/2014/main" id="{3A81FBB7-1C20-4A8B-B498-33B54ED26EF9}"/>
               </a:ext>
             </a:extLst>
           </p:cNvPr>
           <p:cNvSpPr>
-            <a:spLocks noGrp="1"/>
-          </p:cNvSpPr>
-          <p:nvPr/>
-        </p:nvSpPr>
-        <p:spPr>
-          <a:xfrm>
+            <a:spLocks xmlns:a="http://schemas.openxmlformats.org/drawingml/2006/main" noGrp="1"/>
+          </p:cNvSpPr>
+          <p:nvPr/>
+        </p:nvSpPr>
+        <p:spPr>
+          <a:xfrm xmlns:a="http://schemas.openxmlformats.org/drawingml/2006/main">
             <a:off x="6743700" y="1447800"/>
             <a:ext cx="4514850" cy="476250"/>
           </a:xfrm>
-          <a:prstGeom prst="rect">
-            <a:avLst/>
-          </a:prstGeom>
-          <a:noFill/>
-          <a:ln w="0">
-            <a:noFill/>
-          </a:ln>
-        </p:spPr>
-        <p:txBody>
-          <a:bodyPr anchor="ctr"/>
-          <a:lstStyle/>
-          <a:p>
-            <a:pPr>
+          <a:prstGeom xmlns:a="http://schemas.openxmlformats.org/drawingml/2006/main" prst="rect">
+            <a:avLst/>
+          </a:prstGeom>
+          <a:noFill xmlns:a="http://schemas.openxmlformats.org/drawingml/2006/main"/>
+          <a:ln xmlns:a="http://schemas.openxmlformats.org/drawingml/2006/main" w="0">
+            <a:noFill/>
+          </a:ln>
+        </p:spPr>
+        <p:txBody>
+          <a:bodyPr xmlns:a="http://schemas.openxmlformats.org/drawingml/2006/main" anchor="ctr"/>
+          <a:lstStyle xmlns:a="http://schemas.openxmlformats.org/drawingml/2006/main"/>
+          <a:p xmlns:a="http://schemas.openxmlformats.org/drawingml/2006/main">
+            <a:pPr>
+              <a:buNone/>
               <a:defRPr sz="1275" b="1">
                 <a:solidFill>
                   <a:srgbClr val="F5E7C3"/>
@@ -5182,29 +5661,29 @@
       <p:sp>
         <p:nvSpPr>
           <p:cNvPr id="12" name="Elipse 11">
-            <a:extLst>
+            <a:extLst xmlns:a="http://schemas.openxmlformats.org/drawingml/2006/main">
               <a:ext uri="{FF2B5EF4-FFF2-40B4-BE49-F238E27FC236}">
                 <a16:creationId xmlns:a16="http://schemas.microsoft.com/office/drawing/2014/main" id="{82CE6E74-11DE-4371-9707-7D819C30048E}"/>
               </a:ext>
             </a:extLst>
           </p:cNvPr>
           <p:cNvSpPr>
-            <a:spLocks noGrp="1"/>
-          </p:cNvSpPr>
-          <p:nvPr/>
-        </p:nvSpPr>
-        <p:spPr>
-          <a:xfrm>
+            <a:spLocks xmlns:a="http://schemas.openxmlformats.org/drawingml/2006/main" noGrp="1"/>
+          </p:cNvSpPr>
+          <p:nvPr/>
+        </p:nvSpPr>
+        <p:spPr>
+          <a:xfrm xmlns:a="http://schemas.openxmlformats.org/drawingml/2006/main">
             <a:off x="1085850" y="2362200"/>
             <a:ext cx="361950" cy="361950"/>
           </a:xfrm>
-          <a:prstGeom prst="ellipse">
-            <a:avLst/>
-          </a:prstGeom>
-          <a:solidFill>
+          <a:prstGeom xmlns:a="http://schemas.openxmlformats.org/drawingml/2006/main" prst="ellipse">
+            <a:avLst/>
+          </a:prstGeom>
+          <a:solidFill xmlns:a="http://schemas.openxmlformats.org/drawingml/2006/main">
             <a:srgbClr val="D9A441"/>
           </a:solidFill>
-          <a:ln w="9525">
+          <a:ln xmlns:a="http://schemas.openxmlformats.org/drawingml/2006/main" w="9525">
             <a:solidFill>
               <a:srgbClr val="F5E7C3"/>
             </a:solidFill>
@@ -5214,35 +5693,36 @@
       <p:sp>
         <p:nvSpPr>
           <p:cNvPr id="13" name="Rectángulo 12">
-            <a:extLst>
+            <a:extLst xmlns:a="http://schemas.openxmlformats.org/drawingml/2006/main">
               <a:ext uri="{FF2B5EF4-FFF2-40B4-BE49-F238E27FC236}">
                 <a16:creationId xmlns:a16="http://schemas.microsoft.com/office/drawing/2014/main" id="{6E14E9C9-CBA7-46E4-9814-7F335CF54272}"/>
               </a:ext>
             </a:extLst>
           </p:cNvPr>
           <p:cNvSpPr>
-            <a:spLocks noGrp="1"/>
-          </p:cNvSpPr>
-          <p:nvPr/>
-        </p:nvSpPr>
-        <p:spPr>
-          <a:xfrm>
+            <a:spLocks xmlns:a="http://schemas.openxmlformats.org/drawingml/2006/main" noGrp="1"/>
+          </p:cNvSpPr>
+          <p:nvPr/>
+        </p:nvSpPr>
+        <p:spPr>
+          <a:xfrm xmlns:a="http://schemas.openxmlformats.org/drawingml/2006/main">
             <a:off x="1085850" y="2381250"/>
             <a:ext cx="361950" cy="323850"/>
           </a:xfrm>
-          <a:prstGeom prst="rect">
-            <a:avLst/>
-          </a:prstGeom>
-          <a:noFill/>
-          <a:ln w="0">
-            <a:noFill/>
-          </a:ln>
-        </p:spPr>
-        <p:txBody>
-          <a:bodyPr anchor="ctr"/>
-          <a:lstStyle/>
-          <a:p>
-            <a:pPr>
+          <a:prstGeom xmlns:a="http://schemas.openxmlformats.org/drawingml/2006/main" prst="rect">
+            <a:avLst/>
+          </a:prstGeom>
+          <a:noFill xmlns:a="http://schemas.openxmlformats.org/drawingml/2006/main"/>
+          <a:ln xmlns:a="http://schemas.openxmlformats.org/drawingml/2006/main" w="0">
+            <a:noFill/>
+          </a:ln>
+        </p:spPr>
+        <p:txBody>
+          <a:bodyPr xmlns:a="http://schemas.openxmlformats.org/drawingml/2006/main" anchor="ctr"/>
+          <a:lstStyle xmlns:a="http://schemas.openxmlformats.org/drawingml/2006/main"/>
+          <a:p xmlns:a="http://schemas.openxmlformats.org/drawingml/2006/main">
+            <a:pPr>
+              <a:buNone/>
               <a:defRPr sz="1125" b="1">
                 <a:solidFill>
                   <a:srgbClr val="FFFFFF"/>
@@ -5263,35 +5743,36 @@
       <p:sp>
         <p:nvSpPr>
           <p:cNvPr id="14" name="Rectángulo 13">
-            <a:extLst>
+            <a:extLst xmlns:a="http://schemas.openxmlformats.org/drawingml/2006/main">
               <a:ext uri="{FF2B5EF4-FFF2-40B4-BE49-F238E27FC236}">
                 <a16:creationId xmlns:a16="http://schemas.microsoft.com/office/drawing/2014/main" id="{E292DDD7-9BF5-4785-AA91-207E5346E5FA}"/>
               </a:ext>
             </a:extLst>
           </p:cNvPr>
           <p:cNvSpPr>
-            <a:spLocks noGrp="1"/>
-          </p:cNvSpPr>
-          <p:nvPr/>
-        </p:nvSpPr>
-        <p:spPr>
-          <a:xfrm>
+            <a:spLocks xmlns:a="http://schemas.openxmlformats.org/drawingml/2006/main" noGrp="1"/>
+          </p:cNvSpPr>
+          <p:nvPr/>
+        </p:nvSpPr>
+        <p:spPr>
+          <a:xfrm xmlns:a="http://schemas.openxmlformats.org/drawingml/2006/main">
             <a:off x="533400" y="2381250"/>
             <a:ext cx="457200" cy="304800"/>
           </a:xfrm>
-          <a:prstGeom prst="rect">
-            <a:avLst/>
-          </a:prstGeom>
-          <a:noFill/>
-          <a:ln w="0">
-            <a:noFill/>
-          </a:ln>
-        </p:spPr>
-        <p:txBody>
-          <a:bodyPr anchor="ctr"/>
-          <a:lstStyle/>
-          <a:p>
-            <a:pPr>
+          <a:prstGeom xmlns:a="http://schemas.openxmlformats.org/drawingml/2006/main" prst="rect">
+            <a:avLst/>
+          </a:prstGeom>
+          <a:noFill xmlns:a="http://schemas.openxmlformats.org/drawingml/2006/main"/>
+          <a:ln xmlns:a="http://schemas.openxmlformats.org/drawingml/2006/main" w="0">
+            <a:noFill/>
+          </a:ln>
+        </p:spPr>
+        <p:txBody>
+          <a:bodyPr xmlns:a="http://schemas.openxmlformats.org/drawingml/2006/main" anchor="ctr"/>
+          <a:lstStyle xmlns:a="http://schemas.openxmlformats.org/drawingml/2006/main"/>
+          <a:p xmlns:a="http://schemas.openxmlformats.org/drawingml/2006/main">
+            <a:pPr>
+              <a:buNone/>
               <a:defRPr sz="975" b="1">
                 <a:solidFill>
                   <a:srgbClr val="AAB9BC"/>
@@ -5312,35 +5793,36 @@
       <p:sp>
         <p:nvSpPr>
           <p:cNvPr id="15" name="Rectángulo 14">
-            <a:extLst>
+            <a:extLst xmlns:a="http://schemas.openxmlformats.org/drawingml/2006/main">
               <a:ext uri="{FF2B5EF4-FFF2-40B4-BE49-F238E27FC236}">
                 <a16:creationId xmlns:a16="http://schemas.microsoft.com/office/drawing/2014/main" id="{A514BB4A-2401-4F6B-BDB3-187145CB7CF1}"/>
               </a:ext>
             </a:extLst>
           </p:cNvPr>
           <p:cNvSpPr>
-            <a:spLocks noGrp="1"/>
-          </p:cNvSpPr>
-          <p:nvPr/>
-        </p:nvSpPr>
-        <p:spPr>
-          <a:xfrm>
+            <a:spLocks xmlns:a="http://schemas.openxmlformats.org/drawingml/2006/main" noGrp="1"/>
+          </p:cNvSpPr>
+          <p:nvPr/>
+        </p:nvSpPr>
+        <p:spPr>
+          <a:xfrm xmlns:a="http://schemas.openxmlformats.org/drawingml/2006/main">
             <a:off x="1752600" y="2266950"/>
             <a:ext cx="1809750" cy="285750"/>
           </a:xfrm>
-          <a:prstGeom prst="rect">
-            <a:avLst/>
-          </a:prstGeom>
-          <a:noFill/>
-          <a:ln w="0">
-            <a:noFill/>
-          </a:ln>
-        </p:spPr>
-        <p:txBody>
-          <a:bodyPr anchor="ctr"/>
-          <a:lstStyle/>
-          <a:p>
-            <a:pPr>
+          <a:prstGeom xmlns:a="http://schemas.openxmlformats.org/drawingml/2006/main" prst="rect">
+            <a:avLst/>
+          </a:prstGeom>
+          <a:noFill xmlns:a="http://schemas.openxmlformats.org/drawingml/2006/main"/>
+          <a:ln xmlns:a="http://schemas.openxmlformats.org/drawingml/2006/main" w="0">
+            <a:noFill/>
+          </a:ln>
+        </p:spPr>
+        <p:txBody>
+          <a:bodyPr xmlns:a="http://schemas.openxmlformats.org/drawingml/2006/main" anchor="ctr"/>
+          <a:lstStyle xmlns:a="http://schemas.openxmlformats.org/drawingml/2006/main"/>
+          <a:p xmlns:a="http://schemas.openxmlformats.org/drawingml/2006/main">
+            <a:pPr>
+              <a:buNone/>
               <a:defRPr sz="1350" b="1">
                 <a:solidFill>
                   <a:srgbClr val="D9A441"/>
@@ -5361,35 +5843,36 @@
       <p:sp>
         <p:nvSpPr>
           <p:cNvPr id="16" name="Rectángulo 15">
-            <a:extLst>
+            <a:extLst xmlns:a="http://schemas.openxmlformats.org/drawingml/2006/main">
               <a:ext uri="{FF2B5EF4-FFF2-40B4-BE49-F238E27FC236}">
                 <a16:creationId xmlns:a16="http://schemas.microsoft.com/office/drawing/2014/main" id="{98ED842D-F6DE-40B3-A888-6D81AA91D890}"/>
               </a:ext>
             </a:extLst>
           </p:cNvPr>
           <p:cNvSpPr>
-            <a:spLocks noGrp="1"/>
-          </p:cNvSpPr>
-          <p:nvPr/>
-        </p:nvSpPr>
-        <p:spPr>
-          <a:xfrm>
+            <a:spLocks xmlns:a="http://schemas.openxmlformats.org/drawingml/2006/main" noGrp="1"/>
+          </p:cNvSpPr>
+          <p:nvPr/>
+        </p:nvSpPr>
+        <p:spPr>
+          <a:xfrm xmlns:a="http://schemas.openxmlformats.org/drawingml/2006/main">
             <a:off x="1752600" y="2562225"/>
             <a:ext cx="4286250" cy="457200"/>
           </a:xfrm>
-          <a:prstGeom prst="rect">
-            <a:avLst/>
-          </a:prstGeom>
-          <a:noFill/>
-          <a:ln w="0">
-            <a:noFill/>
-          </a:ln>
-        </p:spPr>
-        <p:txBody>
-          <a:bodyPr anchor="ctr"/>
-          <a:lstStyle/>
-          <a:p>
-            <a:pPr>
+          <a:prstGeom xmlns:a="http://schemas.openxmlformats.org/drawingml/2006/main" prst="rect">
+            <a:avLst/>
+          </a:prstGeom>
+          <a:noFill xmlns:a="http://schemas.openxmlformats.org/drawingml/2006/main"/>
+          <a:ln xmlns:a="http://schemas.openxmlformats.org/drawingml/2006/main" w="0">
+            <a:noFill/>
+          </a:ln>
+        </p:spPr>
+        <p:txBody>
+          <a:bodyPr xmlns:a="http://schemas.openxmlformats.org/drawingml/2006/main" anchor="ctr"/>
+          <a:lstStyle xmlns:a="http://schemas.openxmlformats.org/drawingml/2006/main"/>
+          <a:p xmlns:a="http://schemas.openxmlformats.org/drawingml/2006/main">
+            <a:pPr>
+              <a:buNone/>
               <a:defRPr sz="1125" b="0">
                 <a:solidFill>
                   <a:srgbClr val="FFFFFF"/>
@@ -5410,28 +5893,28 @@
       <p:sp>
         <p:nvSpPr>
           <p:cNvPr id="17" name="Rectángulo: esquinas redondeadas 16">
-            <a:extLst>
+            <a:extLst xmlns:a="http://schemas.openxmlformats.org/drawingml/2006/main">
               <a:ext uri="{FF2B5EF4-FFF2-40B4-BE49-F238E27FC236}">
                 <a16:creationId xmlns:a16="http://schemas.microsoft.com/office/drawing/2014/main" id="{844D3CC3-83C2-4555-AA49-17F6F0358EF9}"/>
               </a:ext>
             </a:extLst>
           </p:cNvPr>
           <p:cNvSpPr>
-            <a:spLocks noGrp="1"/>
-          </p:cNvSpPr>
-          <p:nvPr/>
-        </p:nvSpPr>
-        <p:spPr>
-          <a:xfrm>
+            <a:spLocks xmlns:a="http://schemas.openxmlformats.org/drawingml/2006/main" noGrp="1"/>
+          </p:cNvSpPr>
+          <p:nvPr/>
+        </p:nvSpPr>
+        <p:spPr>
+          <a:xfrm xmlns:a="http://schemas.openxmlformats.org/drawingml/2006/main">
             <a:off x="6524625" y="2266950"/>
             <a:ext cx="4953000" cy="666750"/>
           </a:xfrm>
-          <a:prstGeom prst="roundRect">
+          <a:prstGeom xmlns:a="http://schemas.openxmlformats.org/drawingml/2006/main" prst="roundRect">
             <a:avLst>
               <a:gd name="adj" fmla="val 17143"/>
             </a:avLst>
           </a:prstGeom>
-          <a:ln w="9525">
+          <a:ln xmlns:a="http://schemas.openxmlformats.org/drawingml/2006/main" w="9525">
             <a:solidFill>
               <a:srgbClr val="6E8790"/>
             </a:solidFill>
@@ -5442,35 +5925,36 @@
       <p:sp>
         <p:nvSpPr>
           <p:cNvPr id="18" name="Rectángulo 17">
-            <a:extLst>
+            <a:extLst xmlns:a="http://schemas.openxmlformats.org/drawingml/2006/main">
               <a:ext uri="{FF2B5EF4-FFF2-40B4-BE49-F238E27FC236}">
                 <a16:creationId xmlns:a16="http://schemas.microsoft.com/office/drawing/2014/main" id="{70419300-4ED5-4180-85A1-517F52DFD2FB}"/>
               </a:ext>
             </a:extLst>
           </p:cNvPr>
           <p:cNvSpPr>
-            <a:spLocks noGrp="1"/>
-          </p:cNvSpPr>
-          <p:nvPr/>
-        </p:nvSpPr>
-        <p:spPr>
-          <a:xfrm>
+            <a:spLocks xmlns:a="http://schemas.openxmlformats.org/drawingml/2006/main" noGrp="1"/>
+          </p:cNvSpPr>
+          <p:nvPr/>
+        </p:nvSpPr>
+        <p:spPr>
+          <a:xfrm xmlns:a="http://schemas.openxmlformats.org/drawingml/2006/main">
             <a:off x="6743700" y="2362200"/>
             <a:ext cx="4514850" cy="476250"/>
           </a:xfrm>
-          <a:prstGeom prst="rect">
-            <a:avLst/>
-          </a:prstGeom>
-          <a:noFill/>
-          <a:ln w="0">
-            <a:noFill/>
-          </a:ln>
-        </p:spPr>
-        <p:txBody>
-          <a:bodyPr anchor="ctr"/>
-          <a:lstStyle/>
-          <a:p>
-            <a:pPr>
+          <a:prstGeom xmlns:a="http://schemas.openxmlformats.org/drawingml/2006/main" prst="rect">
+            <a:avLst/>
+          </a:prstGeom>
+          <a:noFill xmlns:a="http://schemas.openxmlformats.org/drawingml/2006/main"/>
+          <a:ln xmlns:a="http://schemas.openxmlformats.org/drawingml/2006/main" w="0">
+            <a:noFill/>
+          </a:ln>
+        </p:spPr>
+        <p:txBody>
+          <a:bodyPr xmlns:a="http://schemas.openxmlformats.org/drawingml/2006/main" anchor="ctr"/>
+          <a:lstStyle xmlns:a="http://schemas.openxmlformats.org/drawingml/2006/main"/>
+          <a:p xmlns:a="http://schemas.openxmlformats.org/drawingml/2006/main">
+            <a:pPr>
+              <a:buNone/>
               <a:defRPr sz="1275" b="1">
                 <a:solidFill>
                   <a:srgbClr val="F5E7C3"/>
@@ -5491,29 +5975,29 @@
       <p:sp>
         <p:nvSpPr>
           <p:cNvPr id="19" name="Elipse 18">
-            <a:extLst>
+            <a:extLst xmlns:a="http://schemas.openxmlformats.org/drawingml/2006/main">
               <a:ext uri="{FF2B5EF4-FFF2-40B4-BE49-F238E27FC236}">
                 <a16:creationId xmlns:a16="http://schemas.microsoft.com/office/drawing/2014/main" id="{21440157-A5B3-4220-B61D-9DB2AB3DCF44}"/>
               </a:ext>
             </a:extLst>
           </p:cNvPr>
           <p:cNvSpPr>
-            <a:spLocks noGrp="1"/>
-          </p:cNvSpPr>
-          <p:nvPr/>
-        </p:nvSpPr>
-        <p:spPr>
-          <a:xfrm>
+            <a:spLocks xmlns:a="http://schemas.openxmlformats.org/drawingml/2006/main" noGrp="1"/>
+          </p:cNvSpPr>
+          <p:nvPr/>
+        </p:nvSpPr>
+        <p:spPr>
+          <a:xfrm xmlns:a="http://schemas.openxmlformats.org/drawingml/2006/main">
             <a:off x="1085850" y="3276600"/>
             <a:ext cx="361950" cy="361950"/>
           </a:xfrm>
-          <a:prstGeom prst="ellipse">
-            <a:avLst/>
-          </a:prstGeom>
-          <a:solidFill>
+          <a:prstGeom xmlns:a="http://schemas.openxmlformats.org/drawingml/2006/main" prst="ellipse">
+            <a:avLst/>
+          </a:prstGeom>
+          <a:solidFill xmlns:a="http://schemas.openxmlformats.org/drawingml/2006/main">
             <a:srgbClr val="D9A441"/>
           </a:solidFill>
-          <a:ln w="9525">
+          <a:ln xmlns:a="http://schemas.openxmlformats.org/drawingml/2006/main" w="9525">
             <a:solidFill>
               <a:srgbClr val="F5E7C3"/>
             </a:solidFill>
@@ -5523,35 +6007,36 @@
       <p:sp>
         <p:nvSpPr>
           <p:cNvPr id="20" name="Rectángulo 19">
-            <a:extLst>
+            <a:extLst xmlns:a="http://schemas.openxmlformats.org/drawingml/2006/main">
               <a:ext uri="{FF2B5EF4-FFF2-40B4-BE49-F238E27FC236}">
                 <a16:creationId xmlns:a16="http://schemas.microsoft.com/office/drawing/2014/main" id="{98DCD944-D80F-4335-93F8-2FBC2D625A33}"/>
               </a:ext>
             </a:extLst>
           </p:cNvPr>
           <p:cNvSpPr>
-            <a:spLocks noGrp="1"/>
-          </p:cNvSpPr>
-          <p:nvPr/>
-        </p:nvSpPr>
-        <p:spPr>
-          <a:xfrm>
+            <a:spLocks xmlns:a="http://schemas.openxmlformats.org/drawingml/2006/main" noGrp="1"/>
+          </p:cNvSpPr>
+          <p:nvPr/>
+        </p:nvSpPr>
+        <p:spPr>
+          <a:xfrm xmlns:a="http://schemas.openxmlformats.org/drawingml/2006/main">
             <a:off x="1085850" y="3295650"/>
             <a:ext cx="361950" cy="323850"/>
           </a:xfrm>
-          <a:prstGeom prst="rect">
-            <a:avLst/>
-          </a:prstGeom>
-          <a:noFill/>
-          <a:ln w="0">
-            <a:noFill/>
-          </a:ln>
-        </p:spPr>
-        <p:txBody>
-          <a:bodyPr anchor="ctr"/>
-          <a:lstStyle/>
-          <a:p>
-            <a:pPr>
+          <a:prstGeom xmlns:a="http://schemas.openxmlformats.org/drawingml/2006/main" prst="rect">
+            <a:avLst/>
+          </a:prstGeom>
+          <a:noFill xmlns:a="http://schemas.openxmlformats.org/drawingml/2006/main"/>
+          <a:ln xmlns:a="http://schemas.openxmlformats.org/drawingml/2006/main" w="0">
+            <a:noFill/>
+          </a:ln>
+        </p:spPr>
+        <p:txBody>
+          <a:bodyPr xmlns:a="http://schemas.openxmlformats.org/drawingml/2006/main" anchor="ctr"/>
+          <a:lstStyle xmlns:a="http://schemas.openxmlformats.org/drawingml/2006/main"/>
+          <a:p xmlns:a="http://schemas.openxmlformats.org/drawingml/2006/main">
+            <a:pPr>
+              <a:buNone/>
               <a:defRPr sz="1125" b="1">
                 <a:solidFill>
                   <a:srgbClr val="FFFFFF"/>
@@ -5572,35 +6057,36 @@
       <p:sp>
         <p:nvSpPr>
           <p:cNvPr id="21" name="Rectángulo 20">
-            <a:extLst>
+            <a:extLst xmlns:a="http://schemas.openxmlformats.org/drawingml/2006/main">
               <a:ext uri="{FF2B5EF4-FFF2-40B4-BE49-F238E27FC236}">
                 <a16:creationId xmlns:a16="http://schemas.microsoft.com/office/drawing/2014/main" id="{3195E1D4-5B20-49BE-92FF-51BA140D50C1}"/>
               </a:ext>
             </a:extLst>
           </p:cNvPr>
           <p:cNvSpPr>
-            <a:spLocks noGrp="1"/>
-          </p:cNvSpPr>
-          <p:nvPr/>
-        </p:nvSpPr>
-        <p:spPr>
-          <a:xfrm>
+            <a:spLocks xmlns:a="http://schemas.openxmlformats.org/drawingml/2006/main" noGrp="1"/>
+          </p:cNvSpPr>
+          <p:nvPr/>
+        </p:nvSpPr>
+        <p:spPr>
+          <a:xfrm xmlns:a="http://schemas.openxmlformats.org/drawingml/2006/main">
             <a:off x="533400" y="3295650"/>
             <a:ext cx="457200" cy="304800"/>
           </a:xfrm>
-          <a:prstGeom prst="rect">
-            <a:avLst/>
-          </a:prstGeom>
-          <a:noFill/>
-          <a:ln w="0">
-            <a:noFill/>
-          </a:ln>
-        </p:spPr>
-        <p:txBody>
-          <a:bodyPr anchor="ctr"/>
-          <a:lstStyle/>
-          <a:p>
-            <a:pPr>
+          <a:prstGeom xmlns:a="http://schemas.openxmlformats.org/drawingml/2006/main" prst="rect">
+            <a:avLst/>
+          </a:prstGeom>
+          <a:noFill xmlns:a="http://schemas.openxmlformats.org/drawingml/2006/main"/>
+          <a:ln xmlns:a="http://schemas.openxmlformats.org/drawingml/2006/main" w="0">
+            <a:noFill/>
+          </a:ln>
+        </p:spPr>
+        <p:txBody>
+          <a:bodyPr xmlns:a="http://schemas.openxmlformats.org/drawingml/2006/main" anchor="ctr"/>
+          <a:lstStyle xmlns:a="http://schemas.openxmlformats.org/drawingml/2006/main"/>
+          <a:p xmlns:a="http://schemas.openxmlformats.org/drawingml/2006/main">
+            <a:pPr>
+              <a:buNone/>
               <a:defRPr sz="975" b="1">
                 <a:solidFill>
                   <a:srgbClr val="AAB9BC"/>
@@ -5621,35 +6107,36 @@
       <p:sp>
         <p:nvSpPr>
           <p:cNvPr id="22" name="Rectángulo 21">
-            <a:extLst>
+            <a:extLst xmlns:a="http://schemas.openxmlformats.org/drawingml/2006/main">
               <a:ext uri="{FF2B5EF4-FFF2-40B4-BE49-F238E27FC236}">
                 <a16:creationId xmlns:a16="http://schemas.microsoft.com/office/drawing/2014/main" id="{15AF171C-7201-47F1-AED5-9E8D281081A1}"/>
               </a:ext>
             </a:extLst>
           </p:cNvPr>
           <p:cNvSpPr>
-            <a:spLocks noGrp="1"/>
-          </p:cNvSpPr>
-          <p:nvPr/>
-        </p:nvSpPr>
-        <p:spPr>
-          <a:xfrm>
+            <a:spLocks xmlns:a="http://schemas.openxmlformats.org/drawingml/2006/main" noGrp="1"/>
+          </p:cNvSpPr>
+          <p:nvPr/>
+        </p:nvSpPr>
+        <p:spPr>
+          <a:xfrm xmlns:a="http://schemas.openxmlformats.org/drawingml/2006/main">
             <a:off x="1752600" y="3181350"/>
             <a:ext cx="1809750" cy="285750"/>
           </a:xfrm>
-          <a:prstGeom prst="rect">
-            <a:avLst/>
-          </a:prstGeom>
-          <a:noFill/>
-          <a:ln w="0">
-            <a:noFill/>
-          </a:ln>
-        </p:spPr>
-        <p:txBody>
-          <a:bodyPr anchor="ctr"/>
-          <a:lstStyle/>
-          <a:p>
-            <a:pPr>
+          <a:prstGeom xmlns:a="http://schemas.openxmlformats.org/drawingml/2006/main" prst="rect">
+            <a:avLst/>
+          </a:prstGeom>
+          <a:noFill xmlns:a="http://schemas.openxmlformats.org/drawingml/2006/main"/>
+          <a:ln xmlns:a="http://schemas.openxmlformats.org/drawingml/2006/main" w="0">
+            <a:noFill/>
+          </a:ln>
+        </p:spPr>
+        <p:txBody>
+          <a:bodyPr xmlns:a="http://schemas.openxmlformats.org/drawingml/2006/main" anchor="ctr"/>
+          <a:lstStyle xmlns:a="http://schemas.openxmlformats.org/drawingml/2006/main"/>
+          <a:p xmlns:a="http://schemas.openxmlformats.org/drawingml/2006/main">
+            <a:pPr>
+              <a:buNone/>
               <a:defRPr sz="1350" b="1">
                 <a:solidFill>
                   <a:srgbClr val="D9A441"/>
@@ -5670,35 +6157,36 @@
       <p:sp>
         <p:nvSpPr>
           <p:cNvPr id="23" name="Rectángulo 22">
-            <a:extLst>
+            <a:extLst xmlns:a="http://schemas.openxmlformats.org/drawingml/2006/main">
               <a:ext uri="{FF2B5EF4-FFF2-40B4-BE49-F238E27FC236}">
                 <a16:creationId xmlns:a16="http://schemas.microsoft.com/office/drawing/2014/main" id="{5685EC69-1FED-4758-B7B9-83DB3A0BB403}"/>
               </a:ext>
             </a:extLst>
           </p:cNvPr>
           <p:cNvSpPr>
-            <a:spLocks noGrp="1"/>
-          </p:cNvSpPr>
-          <p:nvPr/>
-        </p:nvSpPr>
-        <p:spPr>
-          <a:xfrm>
+            <a:spLocks xmlns:a="http://schemas.openxmlformats.org/drawingml/2006/main" noGrp="1"/>
+          </p:cNvSpPr>
+          <p:nvPr/>
+        </p:nvSpPr>
+        <p:spPr>
+          <a:xfrm xmlns:a="http://schemas.openxmlformats.org/drawingml/2006/main">
             <a:off x="1752600" y="3476625"/>
             <a:ext cx="4286250" cy="457200"/>
           </a:xfrm>
-          <a:prstGeom prst="rect">
-            <a:avLst/>
-          </a:prstGeom>
-          <a:noFill/>
-          <a:ln w="0">
-            <a:noFill/>
-          </a:ln>
-        </p:spPr>
-        <p:txBody>
-          <a:bodyPr anchor="ctr"/>
-          <a:lstStyle/>
-          <a:p>
-            <a:pPr>
+          <a:prstGeom xmlns:a="http://schemas.openxmlformats.org/drawingml/2006/main" prst="rect">
+            <a:avLst/>
+          </a:prstGeom>
+          <a:noFill xmlns:a="http://schemas.openxmlformats.org/drawingml/2006/main"/>
+          <a:ln xmlns:a="http://schemas.openxmlformats.org/drawingml/2006/main" w="0">
+            <a:noFill/>
+          </a:ln>
+        </p:spPr>
+        <p:txBody>
+          <a:bodyPr xmlns:a="http://schemas.openxmlformats.org/drawingml/2006/main" anchor="ctr"/>
+          <a:lstStyle xmlns:a="http://schemas.openxmlformats.org/drawingml/2006/main"/>
+          <a:p xmlns:a="http://schemas.openxmlformats.org/drawingml/2006/main">
+            <a:pPr>
+              <a:buNone/>
               <a:defRPr sz="1125" b="0">
                 <a:solidFill>
                   <a:srgbClr val="FFFFFF"/>
@@ -5719,28 +6207,28 @@
       <p:sp>
         <p:nvSpPr>
           <p:cNvPr id="24" name="Rectángulo: esquinas redondeadas 23">
-            <a:extLst>
+            <a:extLst xmlns:a="http://schemas.openxmlformats.org/drawingml/2006/main">
               <a:ext uri="{FF2B5EF4-FFF2-40B4-BE49-F238E27FC236}">
                 <a16:creationId xmlns:a16="http://schemas.microsoft.com/office/drawing/2014/main" id="{906FFFBE-D862-49A8-9A23-FFDE300EF90F}"/>
               </a:ext>
             </a:extLst>
           </p:cNvPr>
           <p:cNvSpPr>
-            <a:spLocks noGrp="1"/>
-          </p:cNvSpPr>
-          <p:nvPr/>
-        </p:nvSpPr>
-        <p:spPr>
-          <a:xfrm>
+            <a:spLocks xmlns:a="http://schemas.openxmlformats.org/drawingml/2006/main" noGrp="1"/>
+          </p:cNvSpPr>
+          <p:nvPr/>
+        </p:nvSpPr>
+        <p:spPr>
+          <a:xfrm xmlns:a="http://schemas.openxmlformats.org/drawingml/2006/main">
             <a:off x="6524625" y="3181350"/>
             <a:ext cx="4953000" cy="666750"/>
           </a:xfrm>
-          <a:prstGeom prst="roundRect">
+          <a:prstGeom xmlns:a="http://schemas.openxmlformats.org/drawingml/2006/main" prst="roundRect">
             <a:avLst>
               <a:gd name="adj" fmla="val 17143"/>
             </a:avLst>
           </a:prstGeom>
-          <a:ln w="9525">
+          <a:ln xmlns:a="http://schemas.openxmlformats.org/drawingml/2006/main" w="9525">
             <a:solidFill>
               <a:srgbClr val="6E8790"/>
             </a:solidFill>
@@ -5751,35 +6239,36 @@
       <p:sp>
         <p:nvSpPr>
           <p:cNvPr id="25" name="Rectángulo 24">
-            <a:extLst>
+            <a:extLst xmlns:a="http://schemas.openxmlformats.org/drawingml/2006/main">
               <a:ext uri="{FF2B5EF4-FFF2-40B4-BE49-F238E27FC236}">
                 <a16:creationId xmlns:a16="http://schemas.microsoft.com/office/drawing/2014/main" id="{7CFFC0D1-2720-4CFD-8F95-8EB2A021B3FE}"/>
               </a:ext>
             </a:extLst>
           </p:cNvPr>
           <p:cNvSpPr>
-            <a:spLocks noGrp="1"/>
-          </p:cNvSpPr>
-          <p:nvPr/>
-        </p:nvSpPr>
-        <p:spPr>
-          <a:xfrm>
+            <a:spLocks xmlns:a="http://schemas.openxmlformats.org/drawingml/2006/main" noGrp="1"/>
+          </p:cNvSpPr>
+          <p:nvPr/>
+        </p:nvSpPr>
+        <p:spPr>
+          <a:xfrm xmlns:a="http://schemas.openxmlformats.org/drawingml/2006/main">
             <a:off x="6743700" y="3276600"/>
             <a:ext cx="4514850" cy="476250"/>
           </a:xfrm>
-          <a:prstGeom prst="rect">
-            <a:avLst/>
-          </a:prstGeom>
-          <a:noFill/>
-          <a:ln w="0">
-            <a:noFill/>
-          </a:ln>
-        </p:spPr>
-        <p:txBody>
-          <a:bodyPr anchor="ctr"/>
-          <a:lstStyle/>
-          <a:p>
-            <a:pPr>
+          <a:prstGeom xmlns:a="http://schemas.openxmlformats.org/drawingml/2006/main" prst="rect">
+            <a:avLst/>
+          </a:prstGeom>
+          <a:noFill xmlns:a="http://schemas.openxmlformats.org/drawingml/2006/main"/>
+          <a:ln xmlns:a="http://schemas.openxmlformats.org/drawingml/2006/main" w="0">
+            <a:noFill/>
+          </a:ln>
+        </p:spPr>
+        <p:txBody>
+          <a:bodyPr xmlns:a="http://schemas.openxmlformats.org/drawingml/2006/main" anchor="ctr"/>
+          <a:lstStyle xmlns:a="http://schemas.openxmlformats.org/drawingml/2006/main"/>
+          <a:p xmlns:a="http://schemas.openxmlformats.org/drawingml/2006/main">
+            <a:pPr>
+              <a:buNone/>
               <a:defRPr sz="1275" b="1">
                 <a:solidFill>
                   <a:srgbClr val="F5E7C3"/>
@@ -5800,29 +6289,29 @@
       <p:sp>
         <p:nvSpPr>
           <p:cNvPr id="26" name="Elipse 25">
-            <a:extLst>
+            <a:extLst xmlns:a="http://schemas.openxmlformats.org/drawingml/2006/main">
               <a:ext uri="{FF2B5EF4-FFF2-40B4-BE49-F238E27FC236}">
                 <a16:creationId xmlns:a16="http://schemas.microsoft.com/office/drawing/2014/main" id="{6E6643F4-6238-46E9-8AB2-F53E1FDCA93E}"/>
               </a:ext>
             </a:extLst>
           </p:cNvPr>
           <p:cNvSpPr>
-            <a:spLocks noGrp="1"/>
-          </p:cNvSpPr>
-          <p:nvPr/>
-        </p:nvSpPr>
-        <p:spPr>
-          <a:xfrm>
+            <a:spLocks xmlns:a="http://schemas.openxmlformats.org/drawingml/2006/main" noGrp="1"/>
+          </p:cNvSpPr>
+          <p:nvPr/>
+        </p:nvSpPr>
+        <p:spPr>
+          <a:xfrm xmlns:a="http://schemas.openxmlformats.org/drawingml/2006/main">
             <a:off x="1085850" y="4191000"/>
             <a:ext cx="361950" cy="361950"/>
           </a:xfrm>
-          <a:prstGeom prst="ellipse">
-            <a:avLst/>
-          </a:prstGeom>
-          <a:solidFill>
+          <a:prstGeom xmlns:a="http://schemas.openxmlformats.org/drawingml/2006/main" prst="ellipse">
+            <a:avLst/>
+          </a:prstGeom>
+          <a:solidFill xmlns:a="http://schemas.openxmlformats.org/drawingml/2006/main">
             <a:srgbClr val="D9A441"/>
           </a:solidFill>
-          <a:ln w="9525">
+          <a:ln xmlns:a="http://schemas.openxmlformats.org/drawingml/2006/main" w="9525">
             <a:solidFill>
               <a:srgbClr val="F5E7C3"/>
             </a:solidFill>
@@ -5832,35 +6321,36 @@
       <p:sp>
         <p:nvSpPr>
           <p:cNvPr id="27" name="Rectángulo 26">
-            <a:extLst>
+            <a:extLst xmlns:a="http://schemas.openxmlformats.org/drawingml/2006/main">
               <a:ext uri="{FF2B5EF4-FFF2-40B4-BE49-F238E27FC236}">
                 <a16:creationId xmlns:a16="http://schemas.microsoft.com/office/drawing/2014/main" id="{87CC754A-24A1-4F48-96FC-75E0CBD33137}"/>
               </a:ext>
             </a:extLst>
           </p:cNvPr>
           <p:cNvSpPr>
-            <a:spLocks noGrp="1"/>
-          </p:cNvSpPr>
-          <p:nvPr/>
-        </p:nvSpPr>
-        <p:spPr>
-          <a:xfrm>
+            <a:spLocks xmlns:a="http://schemas.openxmlformats.org/drawingml/2006/main" noGrp="1"/>
+          </p:cNvSpPr>
+          <p:nvPr/>
+        </p:nvSpPr>
+        <p:spPr>
+          <a:xfrm xmlns:a="http://schemas.openxmlformats.org/drawingml/2006/main">
             <a:off x="1085850" y="4210050"/>
             <a:ext cx="361950" cy="323850"/>
           </a:xfrm>
-          <a:prstGeom prst="rect">
-            <a:avLst/>
-          </a:prstGeom>
-          <a:noFill/>
-          <a:ln w="0">
-            <a:noFill/>
-          </a:ln>
-        </p:spPr>
-        <p:txBody>
-          <a:bodyPr anchor="ctr"/>
-          <a:lstStyle/>
-          <a:p>
-            <a:pPr>
+          <a:prstGeom xmlns:a="http://schemas.openxmlformats.org/drawingml/2006/main" prst="rect">
+            <a:avLst/>
+          </a:prstGeom>
+          <a:noFill xmlns:a="http://schemas.openxmlformats.org/drawingml/2006/main"/>
+          <a:ln xmlns:a="http://schemas.openxmlformats.org/drawingml/2006/main" w="0">
+            <a:noFill/>
+          </a:ln>
+        </p:spPr>
+        <p:txBody>
+          <a:bodyPr xmlns:a="http://schemas.openxmlformats.org/drawingml/2006/main" anchor="ctr"/>
+          <a:lstStyle xmlns:a="http://schemas.openxmlformats.org/drawingml/2006/main"/>
+          <a:p xmlns:a="http://schemas.openxmlformats.org/drawingml/2006/main">
+            <a:pPr>
+              <a:buNone/>
               <a:defRPr sz="1125" b="1">
                 <a:solidFill>
                   <a:srgbClr val="FFFFFF"/>
@@ -5881,35 +6371,36 @@
       <p:sp>
         <p:nvSpPr>
           <p:cNvPr id="28" name="Rectángulo 27">
-            <a:extLst>
+            <a:extLst xmlns:a="http://schemas.openxmlformats.org/drawingml/2006/main">
               <a:ext uri="{FF2B5EF4-FFF2-40B4-BE49-F238E27FC236}">
                 <a16:creationId xmlns:a16="http://schemas.microsoft.com/office/drawing/2014/main" id="{F2300832-27E6-4A62-B815-CC398E774590}"/>
               </a:ext>
             </a:extLst>
           </p:cNvPr>
           <p:cNvSpPr>
-            <a:spLocks noGrp="1"/>
-          </p:cNvSpPr>
-          <p:nvPr/>
-        </p:nvSpPr>
-        <p:spPr>
-          <a:xfrm>
+            <a:spLocks xmlns:a="http://schemas.openxmlformats.org/drawingml/2006/main" noGrp="1"/>
+          </p:cNvSpPr>
+          <p:nvPr/>
+        </p:nvSpPr>
+        <p:spPr>
+          <a:xfrm xmlns:a="http://schemas.openxmlformats.org/drawingml/2006/main">
             <a:off x="533400" y="4210050"/>
             <a:ext cx="457200" cy="304800"/>
           </a:xfrm>
-          <a:prstGeom prst="rect">
-            <a:avLst/>
-          </a:prstGeom>
-          <a:noFill/>
-          <a:ln w="0">
-            <a:noFill/>
-          </a:ln>
-        </p:spPr>
-        <p:txBody>
-          <a:bodyPr anchor="ctr"/>
-          <a:lstStyle/>
-          <a:p>
-            <a:pPr>
+          <a:prstGeom xmlns:a="http://schemas.openxmlformats.org/drawingml/2006/main" prst="rect">
+            <a:avLst/>
+          </a:prstGeom>
+          <a:noFill xmlns:a="http://schemas.openxmlformats.org/drawingml/2006/main"/>
+          <a:ln xmlns:a="http://schemas.openxmlformats.org/drawingml/2006/main" w="0">
+            <a:noFill/>
+          </a:ln>
+        </p:spPr>
+        <p:txBody>
+          <a:bodyPr xmlns:a="http://schemas.openxmlformats.org/drawingml/2006/main" anchor="ctr"/>
+          <a:lstStyle xmlns:a="http://schemas.openxmlformats.org/drawingml/2006/main"/>
+          <a:p xmlns:a="http://schemas.openxmlformats.org/drawingml/2006/main">
+            <a:pPr>
+              <a:buNone/>
               <a:defRPr sz="975" b="1">
                 <a:solidFill>
                   <a:srgbClr val="AAB9BC"/>
@@ -5930,35 +6421,36 @@
       <p:sp>
         <p:nvSpPr>
           <p:cNvPr id="29" name="Rectángulo 28">
-            <a:extLst>
+            <a:extLst xmlns:a="http://schemas.openxmlformats.org/drawingml/2006/main">
               <a:ext uri="{FF2B5EF4-FFF2-40B4-BE49-F238E27FC236}">
                 <a16:creationId xmlns:a16="http://schemas.microsoft.com/office/drawing/2014/main" id="{7834DC01-F13F-45A7-B827-2EFCF258C64C}"/>
               </a:ext>
             </a:extLst>
           </p:cNvPr>
           <p:cNvSpPr>
-            <a:spLocks noGrp="1"/>
-          </p:cNvSpPr>
-          <p:nvPr/>
-        </p:nvSpPr>
-        <p:spPr>
-          <a:xfrm>
+            <a:spLocks xmlns:a="http://schemas.openxmlformats.org/drawingml/2006/main" noGrp="1"/>
+          </p:cNvSpPr>
+          <p:nvPr/>
+        </p:nvSpPr>
+        <p:spPr>
+          <a:xfrm xmlns:a="http://schemas.openxmlformats.org/drawingml/2006/main">
             <a:off x="1752600" y="4095750"/>
             <a:ext cx="1809750" cy="285750"/>
           </a:xfrm>
-          <a:prstGeom prst="rect">
-            <a:avLst/>
-          </a:prstGeom>
-          <a:noFill/>
-          <a:ln w="0">
-            <a:noFill/>
-          </a:ln>
-        </p:spPr>
-        <p:txBody>
-          <a:bodyPr anchor="ctr"/>
-          <a:lstStyle/>
-          <a:p>
-            <a:pPr>
+          <a:prstGeom xmlns:a="http://schemas.openxmlformats.org/drawingml/2006/main" prst="rect">
+            <a:avLst/>
+          </a:prstGeom>
+          <a:noFill xmlns:a="http://schemas.openxmlformats.org/drawingml/2006/main"/>
+          <a:ln xmlns:a="http://schemas.openxmlformats.org/drawingml/2006/main" w="0">
+            <a:noFill/>
+          </a:ln>
+        </p:spPr>
+        <p:txBody>
+          <a:bodyPr xmlns:a="http://schemas.openxmlformats.org/drawingml/2006/main" anchor="ctr"/>
+          <a:lstStyle xmlns:a="http://schemas.openxmlformats.org/drawingml/2006/main"/>
+          <a:p xmlns:a="http://schemas.openxmlformats.org/drawingml/2006/main">
+            <a:pPr>
+              <a:buNone/>
               <a:defRPr sz="1350" b="1">
                 <a:solidFill>
                   <a:srgbClr val="D9A441"/>
@@ -5979,35 +6471,36 @@
       <p:sp>
         <p:nvSpPr>
           <p:cNvPr id="30" name="Rectángulo 29">
-            <a:extLst>
+            <a:extLst xmlns:a="http://schemas.openxmlformats.org/drawingml/2006/main">
               <a:ext uri="{FF2B5EF4-FFF2-40B4-BE49-F238E27FC236}">
                 <a16:creationId xmlns:a16="http://schemas.microsoft.com/office/drawing/2014/main" id="{E215B0C6-630D-414B-854B-6049BC88FB9C}"/>
               </a:ext>
             </a:extLst>
           </p:cNvPr>
           <p:cNvSpPr>
-            <a:spLocks noGrp="1"/>
-          </p:cNvSpPr>
-          <p:nvPr/>
-        </p:nvSpPr>
-        <p:spPr>
-          <a:xfrm>
+            <a:spLocks xmlns:a="http://schemas.openxmlformats.org/drawingml/2006/main" noGrp="1"/>
+          </p:cNvSpPr>
+          <p:nvPr/>
+        </p:nvSpPr>
+        <p:spPr>
+          <a:xfrm xmlns:a="http://schemas.openxmlformats.org/drawingml/2006/main">
             <a:off x="1752600" y="4391025"/>
             <a:ext cx="4286250" cy="457200"/>
           </a:xfrm>
-          <a:prstGeom prst="rect">
-            <a:avLst/>
-          </a:prstGeom>
-          <a:noFill/>
-          <a:ln w="0">
-            <a:noFill/>
-          </a:ln>
-        </p:spPr>
-        <p:txBody>
-          <a:bodyPr anchor="ctr"/>
-          <a:lstStyle/>
-          <a:p>
-            <a:pPr>
+          <a:prstGeom xmlns:a="http://schemas.openxmlformats.org/drawingml/2006/main" prst="rect">
+            <a:avLst/>
+          </a:prstGeom>
+          <a:noFill xmlns:a="http://schemas.openxmlformats.org/drawingml/2006/main"/>
+          <a:ln xmlns:a="http://schemas.openxmlformats.org/drawingml/2006/main" w="0">
+            <a:noFill/>
+          </a:ln>
+        </p:spPr>
+        <p:txBody>
+          <a:bodyPr xmlns:a="http://schemas.openxmlformats.org/drawingml/2006/main" anchor="ctr"/>
+          <a:lstStyle xmlns:a="http://schemas.openxmlformats.org/drawingml/2006/main"/>
+          <a:p xmlns:a="http://schemas.openxmlformats.org/drawingml/2006/main">
+            <a:pPr>
+              <a:buNone/>
               <a:defRPr sz="1125" b="0">
                 <a:solidFill>
                   <a:srgbClr val="FFFFFF"/>
@@ -6028,28 +6521,28 @@
       <p:sp>
         <p:nvSpPr>
           <p:cNvPr id="31" name="Rectángulo: esquinas redondeadas 30">
-            <a:extLst>
+            <a:extLst xmlns:a="http://schemas.openxmlformats.org/drawingml/2006/main">
               <a:ext uri="{FF2B5EF4-FFF2-40B4-BE49-F238E27FC236}">
                 <a16:creationId xmlns:a16="http://schemas.microsoft.com/office/drawing/2014/main" id="{4DE7B454-0DF5-46AF-8F41-F50C714721A7}"/>
               </a:ext>
             </a:extLst>
           </p:cNvPr>
           <p:cNvSpPr>
-            <a:spLocks noGrp="1"/>
-          </p:cNvSpPr>
-          <p:nvPr/>
-        </p:nvSpPr>
-        <p:spPr>
-          <a:xfrm>
+            <a:spLocks xmlns:a="http://schemas.openxmlformats.org/drawingml/2006/main" noGrp="1"/>
+          </p:cNvSpPr>
+          <p:nvPr/>
+        </p:nvSpPr>
+        <p:spPr>
+          <a:xfrm xmlns:a="http://schemas.openxmlformats.org/drawingml/2006/main">
             <a:off x="6524625" y="4095750"/>
             <a:ext cx="4953000" cy="666750"/>
           </a:xfrm>
-          <a:prstGeom prst="roundRect">
+          <a:prstGeom xmlns:a="http://schemas.openxmlformats.org/drawingml/2006/main" prst="roundRect">
             <a:avLst>
               <a:gd name="adj" fmla="val 17143"/>
             </a:avLst>
           </a:prstGeom>
-          <a:ln w="9525">
+          <a:ln xmlns:a="http://schemas.openxmlformats.org/drawingml/2006/main" w="9525">
             <a:solidFill>
               <a:srgbClr val="6E8790"/>
             </a:solidFill>
@@ -6060,35 +6553,36 @@
       <p:sp>
         <p:nvSpPr>
           <p:cNvPr id="32" name="Rectángulo 31">
-            <a:extLst>
+            <a:extLst xmlns:a="http://schemas.openxmlformats.org/drawingml/2006/main">
               <a:ext uri="{FF2B5EF4-FFF2-40B4-BE49-F238E27FC236}">
                 <a16:creationId xmlns:a16="http://schemas.microsoft.com/office/drawing/2014/main" id="{3F3B248E-9AFD-4821-9A04-E4B2993BE154}"/>
               </a:ext>
             </a:extLst>
           </p:cNvPr>
           <p:cNvSpPr>
-            <a:spLocks noGrp="1"/>
-          </p:cNvSpPr>
-          <p:nvPr/>
-        </p:nvSpPr>
-        <p:spPr>
-          <a:xfrm>
+            <a:spLocks xmlns:a="http://schemas.openxmlformats.org/drawingml/2006/main" noGrp="1"/>
+          </p:cNvSpPr>
+          <p:nvPr/>
+        </p:nvSpPr>
+        <p:spPr>
+          <a:xfrm xmlns:a="http://schemas.openxmlformats.org/drawingml/2006/main">
             <a:off x="6743700" y="4191000"/>
             <a:ext cx="4514850" cy="476250"/>
           </a:xfrm>
-          <a:prstGeom prst="rect">
-            <a:avLst/>
-          </a:prstGeom>
-          <a:noFill/>
-          <a:ln w="0">
-            <a:noFill/>
-          </a:ln>
-        </p:spPr>
-        <p:txBody>
-          <a:bodyPr anchor="ctr"/>
-          <a:lstStyle/>
-          <a:p>
-            <a:pPr>
+          <a:prstGeom xmlns:a="http://schemas.openxmlformats.org/drawingml/2006/main" prst="rect">
+            <a:avLst/>
+          </a:prstGeom>
+          <a:noFill xmlns:a="http://schemas.openxmlformats.org/drawingml/2006/main"/>
+          <a:ln xmlns:a="http://schemas.openxmlformats.org/drawingml/2006/main" w="0">
+            <a:noFill/>
+          </a:ln>
+        </p:spPr>
+        <p:txBody>
+          <a:bodyPr xmlns:a="http://schemas.openxmlformats.org/drawingml/2006/main" anchor="ctr"/>
+          <a:lstStyle xmlns:a="http://schemas.openxmlformats.org/drawingml/2006/main"/>
+          <a:p xmlns:a="http://schemas.openxmlformats.org/drawingml/2006/main">
+            <a:pPr>
+              <a:buNone/>
               <a:defRPr sz="1275" b="1">
                 <a:solidFill>
                   <a:srgbClr val="F5E7C3"/>
@@ -6109,29 +6603,29 @@
       <p:sp>
         <p:nvSpPr>
           <p:cNvPr id="33" name="Elipse 32">
-            <a:extLst>
+            <a:extLst xmlns:a="http://schemas.openxmlformats.org/drawingml/2006/main">
               <a:ext uri="{FF2B5EF4-FFF2-40B4-BE49-F238E27FC236}">
                 <a16:creationId xmlns:a16="http://schemas.microsoft.com/office/drawing/2014/main" id="{E1ED5C02-4073-4A3B-AF10-4A0648C33BEB}"/>
               </a:ext>
             </a:extLst>
           </p:cNvPr>
           <p:cNvSpPr>
-            <a:spLocks noGrp="1"/>
-          </p:cNvSpPr>
-          <p:nvPr/>
-        </p:nvSpPr>
-        <p:spPr>
-          <a:xfrm>
+            <a:spLocks xmlns:a="http://schemas.openxmlformats.org/drawingml/2006/main" noGrp="1"/>
+          </p:cNvSpPr>
+          <p:nvPr/>
+        </p:nvSpPr>
+        <p:spPr>
+          <a:xfrm xmlns:a="http://schemas.openxmlformats.org/drawingml/2006/main">
             <a:off x="1085850" y="5105400"/>
             <a:ext cx="361950" cy="361950"/>
           </a:xfrm>
-          <a:prstGeom prst="ellipse">
-            <a:avLst/>
-          </a:prstGeom>
-          <a:solidFill>
+          <a:prstGeom xmlns:a="http://schemas.openxmlformats.org/drawingml/2006/main" prst="ellipse">
+            <a:avLst/>
+          </a:prstGeom>
+          <a:solidFill xmlns:a="http://schemas.openxmlformats.org/drawingml/2006/main">
             <a:srgbClr val="496B4A"/>
           </a:solidFill>
-          <a:ln w="9525">
+          <a:ln xmlns:a="http://schemas.openxmlformats.org/drawingml/2006/main" w="9525">
             <a:solidFill>
               <a:srgbClr val="F5E7C3"/>
             </a:solidFill>
@@ -6141,35 +6635,36 @@
       <p:sp>
         <p:nvSpPr>
           <p:cNvPr id="34" name="Rectángulo 33">
-            <a:extLst>
+            <a:extLst xmlns:a="http://schemas.openxmlformats.org/drawingml/2006/main">
               <a:ext uri="{FF2B5EF4-FFF2-40B4-BE49-F238E27FC236}">
                 <a16:creationId xmlns:a16="http://schemas.microsoft.com/office/drawing/2014/main" id="{F49ADBB0-2D51-41F5-9F5F-40B5F266BCDB}"/>
               </a:ext>
             </a:extLst>
           </p:cNvPr>
           <p:cNvSpPr>
-            <a:spLocks noGrp="1"/>
-          </p:cNvSpPr>
-          <p:nvPr/>
-        </p:nvSpPr>
-        <p:spPr>
-          <a:xfrm>
+            <a:spLocks xmlns:a="http://schemas.openxmlformats.org/drawingml/2006/main" noGrp="1"/>
+          </p:cNvSpPr>
+          <p:nvPr/>
+        </p:nvSpPr>
+        <p:spPr>
+          <a:xfrm xmlns:a="http://schemas.openxmlformats.org/drawingml/2006/main">
             <a:off x="1085850" y="5124450"/>
             <a:ext cx="361950" cy="323850"/>
           </a:xfrm>
-          <a:prstGeom prst="rect">
-            <a:avLst/>
-          </a:prstGeom>
-          <a:noFill/>
-          <a:ln w="0">
-            <a:noFill/>
-          </a:ln>
-        </p:spPr>
-        <p:txBody>
-          <a:bodyPr anchor="ctr"/>
-          <a:lstStyle/>
-          <a:p>
-            <a:pPr>
+          <a:prstGeom xmlns:a="http://schemas.openxmlformats.org/drawingml/2006/main" prst="rect">
+            <a:avLst/>
+          </a:prstGeom>
+          <a:noFill xmlns:a="http://schemas.openxmlformats.org/drawingml/2006/main"/>
+          <a:ln xmlns:a="http://schemas.openxmlformats.org/drawingml/2006/main" w="0">
+            <a:noFill/>
+          </a:ln>
+        </p:spPr>
+        <p:txBody>
+          <a:bodyPr xmlns:a="http://schemas.openxmlformats.org/drawingml/2006/main" anchor="ctr"/>
+          <a:lstStyle xmlns:a="http://schemas.openxmlformats.org/drawingml/2006/main"/>
+          <a:p xmlns:a="http://schemas.openxmlformats.org/drawingml/2006/main">
+            <a:pPr>
+              <a:buNone/>
               <a:defRPr sz="1125" b="1">
                 <a:solidFill>
                   <a:srgbClr val="FFFFFF"/>
@@ -6190,35 +6685,36 @@
       <p:sp>
         <p:nvSpPr>
           <p:cNvPr id="35" name="Rectángulo 34">
-            <a:extLst>
+            <a:extLst xmlns:a="http://schemas.openxmlformats.org/drawingml/2006/main">
               <a:ext uri="{FF2B5EF4-FFF2-40B4-BE49-F238E27FC236}">
                 <a16:creationId xmlns:a16="http://schemas.microsoft.com/office/drawing/2014/main" id="{336EC6DF-7239-4253-9ACE-80243B2976E6}"/>
               </a:ext>
             </a:extLst>
           </p:cNvPr>
           <p:cNvSpPr>
-            <a:spLocks noGrp="1"/>
-          </p:cNvSpPr>
-          <p:nvPr/>
-        </p:nvSpPr>
-        <p:spPr>
-          <a:xfrm>
+            <a:spLocks xmlns:a="http://schemas.openxmlformats.org/drawingml/2006/main" noGrp="1"/>
+          </p:cNvSpPr>
+          <p:nvPr/>
+        </p:nvSpPr>
+        <p:spPr>
+          <a:xfrm xmlns:a="http://schemas.openxmlformats.org/drawingml/2006/main">
             <a:off x="533400" y="5124450"/>
             <a:ext cx="457200" cy="304800"/>
           </a:xfrm>
-          <a:prstGeom prst="rect">
-            <a:avLst/>
-          </a:prstGeom>
-          <a:noFill/>
-          <a:ln w="0">
-            <a:noFill/>
-          </a:ln>
-        </p:spPr>
-        <p:txBody>
-          <a:bodyPr anchor="ctr"/>
-          <a:lstStyle/>
-          <a:p>
-            <a:pPr>
+          <a:prstGeom xmlns:a="http://schemas.openxmlformats.org/drawingml/2006/main" prst="rect">
+            <a:avLst/>
+          </a:prstGeom>
+          <a:noFill xmlns:a="http://schemas.openxmlformats.org/drawingml/2006/main"/>
+          <a:ln xmlns:a="http://schemas.openxmlformats.org/drawingml/2006/main" w="0">
+            <a:noFill/>
+          </a:ln>
+        </p:spPr>
+        <p:txBody>
+          <a:bodyPr xmlns:a="http://schemas.openxmlformats.org/drawingml/2006/main" anchor="ctr"/>
+          <a:lstStyle xmlns:a="http://schemas.openxmlformats.org/drawingml/2006/main"/>
+          <a:p xmlns:a="http://schemas.openxmlformats.org/drawingml/2006/main">
+            <a:pPr>
+              <a:buNone/>
               <a:defRPr sz="975" b="1">
                 <a:solidFill>
                   <a:srgbClr val="AAB9BC"/>
@@ -6239,35 +6735,36 @@
       <p:sp>
         <p:nvSpPr>
           <p:cNvPr id="36" name="Rectángulo 35">
-            <a:extLst>
+            <a:extLst xmlns:a="http://schemas.openxmlformats.org/drawingml/2006/main">
               <a:ext uri="{FF2B5EF4-FFF2-40B4-BE49-F238E27FC236}">
                 <a16:creationId xmlns:a16="http://schemas.microsoft.com/office/drawing/2014/main" id="{89AB0ED0-9F6F-4E16-8BD6-1E0D0433FD62}"/>
               </a:ext>
             </a:extLst>
           </p:cNvPr>
           <p:cNvSpPr>
-            <a:spLocks noGrp="1"/>
-          </p:cNvSpPr>
-          <p:nvPr/>
-        </p:nvSpPr>
-        <p:spPr>
-          <a:xfrm>
+            <a:spLocks xmlns:a="http://schemas.openxmlformats.org/drawingml/2006/main" noGrp="1"/>
+          </p:cNvSpPr>
+          <p:nvPr/>
+        </p:nvSpPr>
+        <p:spPr>
+          <a:xfrm xmlns:a="http://schemas.openxmlformats.org/drawingml/2006/main">
             <a:off x="1752600" y="5010150"/>
             <a:ext cx="1809750" cy="285750"/>
           </a:xfrm>
-          <a:prstGeom prst="rect">
-            <a:avLst/>
-          </a:prstGeom>
-          <a:noFill/>
-          <a:ln w="0">
-            <a:noFill/>
-          </a:ln>
-        </p:spPr>
-        <p:txBody>
-          <a:bodyPr anchor="ctr"/>
-          <a:lstStyle/>
-          <a:p>
-            <a:pPr>
+          <a:prstGeom xmlns:a="http://schemas.openxmlformats.org/drawingml/2006/main" prst="rect">
+            <a:avLst/>
+          </a:prstGeom>
+          <a:noFill xmlns:a="http://schemas.openxmlformats.org/drawingml/2006/main"/>
+          <a:ln xmlns:a="http://schemas.openxmlformats.org/drawingml/2006/main" w="0">
+            <a:noFill/>
+          </a:ln>
+        </p:spPr>
+        <p:txBody>
+          <a:bodyPr xmlns:a="http://schemas.openxmlformats.org/drawingml/2006/main" anchor="ctr"/>
+          <a:lstStyle xmlns:a="http://schemas.openxmlformats.org/drawingml/2006/main"/>
+          <a:p xmlns:a="http://schemas.openxmlformats.org/drawingml/2006/main">
+            <a:pPr>
+              <a:buNone/>
               <a:defRPr sz="1350" b="1">
                 <a:solidFill>
                   <a:srgbClr val="D9A441"/>
@@ -6288,35 +6785,36 @@
       <p:sp>
         <p:nvSpPr>
           <p:cNvPr id="37" name="Rectángulo 36">
-            <a:extLst>
+            <a:extLst xmlns:a="http://schemas.openxmlformats.org/drawingml/2006/main">
               <a:ext uri="{FF2B5EF4-FFF2-40B4-BE49-F238E27FC236}">
                 <a16:creationId xmlns:a16="http://schemas.microsoft.com/office/drawing/2014/main" id="{CEED62F7-9C9A-4EFF-AE0F-747882061D5F}"/>
               </a:ext>
             </a:extLst>
           </p:cNvPr>
           <p:cNvSpPr>
-            <a:spLocks noGrp="1"/>
-          </p:cNvSpPr>
-          <p:nvPr/>
-        </p:nvSpPr>
-        <p:spPr>
-          <a:xfrm>
+            <a:spLocks xmlns:a="http://schemas.openxmlformats.org/drawingml/2006/main" noGrp="1"/>
+          </p:cNvSpPr>
+          <p:nvPr/>
+        </p:nvSpPr>
+        <p:spPr>
+          <a:xfrm xmlns:a="http://schemas.openxmlformats.org/drawingml/2006/main">
             <a:off x="1752600" y="5305425"/>
             <a:ext cx="4286250" cy="457200"/>
           </a:xfrm>
-          <a:prstGeom prst="rect">
-            <a:avLst/>
-          </a:prstGeom>
-          <a:noFill/>
-          <a:ln w="0">
-            <a:noFill/>
-          </a:ln>
-        </p:spPr>
-        <p:txBody>
-          <a:bodyPr anchor="ctr"/>
-          <a:lstStyle/>
-          <a:p>
-            <a:pPr>
+          <a:prstGeom xmlns:a="http://schemas.openxmlformats.org/drawingml/2006/main" prst="rect">
+            <a:avLst/>
+          </a:prstGeom>
+          <a:noFill xmlns:a="http://schemas.openxmlformats.org/drawingml/2006/main"/>
+          <a:ln xmlns:a="http://schemas.openxmlformats.org/drawingml/2006/main" w="0">
+            <a:noFill/>
+          </a:ln>
+        </p:spPr>
+        <p:txBody>
+          <a:bodyPr xmlns:a="http://schemas.openxmlformats.org/drawingml/2006/main" anchor="ctr"/>
+          <a:lstStyle xmlns:a="http://schemas.openxmlformats.org/drawingml/2006/main"/>
+          <a:p xmlns:a="http://schemas.openxmlformats.org/drawingml/2006/main">
+            <a:pPr>
+              <a:buNone/>
               <a:defRPr sz="1125" b="0">
                 <a:solidFill>
                   <a:srgbClr val="FFFFFF"/>
@@ -6337,28 +6835,28 @@
       <p:sp>
         <p:nvSpPr>
           <p:cNvPr id="38" name="Rectángulo: esquinas redondeadas 37">
-            <a:extLst>
+            <a:extLst xmlns:a="http://schemas.openxmlformats.org/drawingml/2006/main">
               <a:ext uri="{FF2B5EF4-FFF2-40B4-BE49-F238E27FC236}">
                 <a16:creationId xmlns:a16="http://schemas.microsoft.com/office/drawing/2014/main" id="{192F604F-0693-4338-B4C8-60A0986BAF1E}"/>
               </a:ext>
             </a:extLst>
           </p:cNvPr>
           <p:cNvSpPr>
-            <a:spLocks noGrp="1"/>
-          </p:cNvSpPr>
-          <p:nvPr/>
-        </p:nvSpPr>
-        <p:spPr>
-          <a:xfrm>
+            <a:spLocks xmlns:a="http://schemas.openxmlformats.org/drawingml/2006/main" noGrp="1"/>
+          </p:cNvSpPr>
+          <p:nvPr/>
+        </p:nvSpPr>
+        <p:spPr>
+          <a:xfrm xmlns:a="http://schemas.openxmlformats.org/drawingml/2006/main">
             <a:off x="6524625" y="5010150"/>
             <a:ext cx="4953000" cy="666750"/>
           </a:xfrm>
-          <a:prstGeom prst="roundRect">
+          <a:prstGeom xmlns:a="http://schemas.openxmlformats.org/drawingml/2006/main" prst="roundRect">
             <a:avLst>
               <a:gd name="adj" fmla="val 17143"/>
             </a:avLst>
           </a:prstGeom>
-          <a:ln w="9525">
+          <a:ln xmlns:a="http://schemas.openxmlformats.org/drawingml/2006/main" w="9525">
             <a:solidFill>
               <a:srgbClr val="6E8790"/>
             </a:solidFill>
@@ -6369,35 +6867,36 @@
       <p:sp>
         <p:nvSpPr>
           <p:cNvPr id="39" name="Rectángulo 38">
-            <a:extLst>
+            <a:extLst xmlns:a="http://schemas.openxmlformats.org/drawingml/2006/main">
               <a:ext uri="{FF2B5EF4-FFF2-40B4-BE49-F238E27FC236}">
                 <a16:creationId xmlns:a16="http://schemas.microsoft.com/office/drawing/2014/main" id="{E1A9E620-0DA6-4D84-A6FA-A22825ED5D1C}"/>
               </a:ext>
             </a:extLst>
           </p:cNvPr>
           <p:cNvSpPr>
-            <a:spLocks noGrp="1"/>
-          </p:cNvSpPr>
-          <p:nvPr/>
-        </p:nvSpPr>
-        <p:spPr>
-          <a:xfrm>
+            <a:spLocks xmlns:a="http://schemas.openxmlformats.org/drawingml/2006/main" noGrp="1"/>
+          </p:cNvSpPr>
+          <p:nvPr/>
+        </p:nvSpPr>
+        <p:spPr>
+          <a:xfrm xmlns:a="http://schemas.openxmlformats.org/drawingml/2006/main">
             <a:off x="6743700" y="5105400"/>
             <a:ext cx="4514850" cy="476250"/>
           </a:xfrm>
-          <a:prstGeom prst="rect">
-            <a:avLst/>
-          </a:prstGeom>
-          <a:noFill/>
-          <a:ln w="0">
-            <a:noFill/>
-          </a:ln>
-        </p:spPr>
-        <p:txBody>
-          <a:bodyPr anchor="ctr"/>
-          <a:lstStyle/>
-          <a:p>
-            <a:pPr>
+          <a:prstGeom xmlns:a="http://schemas.openxmlformats.org/drawingml/2006/main" prst="rect">
+            <a:avLst/>
+          </a:prstGeom>
+          <a:noFill xmlns:a="http://schemas.openxmlformats.org/drawingml/2006/main"/>
+          <a:ln xmlns:a="http://schemas.openxmlformats.org/drawingml/2006/main" w="0">
+            <a:noFill/>
+          </a:ln>
+        </p:spPr>
+        <p:txBody>
+          <a:bodyPr xmlns:a="http://schemas.openxmlformats.org/drawingml/2006/main" anchor="ctr"/>
+          <a:lstStyle xmlns:a="http://schemas.openxmlformats.org/drawingml/2006/main"/>
+          <a:p xmlns:a="http://schemas.openxmlformats.org/drawingml/2006/main">
+            <a:pPr>
+              <a:buNone/>
               <a:defRPr sz="1275" b="1">
                 <a:solidFill>
                   <a:srgbClr val="F5E7C3"/>
@@ -6418,28 +6917,28 @@
       <p:sp>
         <p:nvSpPr>
           <p:cNvPr id="40" name="Rectángulo: esquinas redondeadas 39">
-            <a:extLst>
+            <a:extLst xmlns:a="http://schemas.openxmlformats.org/drawingml/2006/main">
               <a:ext uri="{FF2B5EF4-FFF2-40B4-BE49-F238E27FC236}">
                 <a16:creationId xmlns:a16="http://schemas.microsoft.com/office/drawing/2014/main" id="{4ED58C9D-8432-446A-B976-960336A9AB6B}"/>
               </a:ext>
             </a:extLst>
           </p:cNvPr>
           <p:cNvSpPr>
-            <a:spLocks noGrp="1"/>
-          </p:cNvSpPr>
-          <p:nvPr/>
-        </p:nvSpPr>
-        <p:spPr>
-          <a:xfrm>
+            <a:spLocks xmlns:a="http://schemas.openxmlformats.org/drawingml/2006/main" noGrp="1"/>
+          </p:cNvSpPr>
+          <p:nvPr/>
+        </p:nvSpPr>
+        <p:spPr>
+          <a:xfrm xmlns:a="http://schemas.openxmlformats.org/drawingml/2006/main">
             <a:off x="1752600" y="6048375"/>
             <a:ext cx="9725025" cy="447675"/>
           </a:xfrm>
-          <a:prstGeom prst="roundRect">
+          <a:prstGeom xmlns:a="http://schemas.openxmlformats.org/drawingml/2006/main" prst="roundRect">
             <a:avLst>
               <a:gd name="adj" fmla="val 25532"/>
             </a:avLst>
           </a:prstGeom>
-          <a:ln w="9525">
+          <a:ln xmlns:a="http://schemas.openxmlformats.org/drawingml/2006/main" w="9525">
             <a:solidFill>
               <a:srgbClr val="D9A441"/>
             </a:solidFill>
@@ -6450,35 +6949,36 @@
       <p:sp>
         <p:nvSpPr>
           <p:cNvPr id="41" name="Rectángulo 40">
-            <a:extLst>
+            <a:extLst xmlns:a="http://schemas.openxmlformats.org/drawingml/2006/main">
               <a:ext uri="{FF2B5EF4-FFF2-40B4-BE49-F238E27FC236}">
                 <a16:creationId xmlns:a16="http://schemas.microsoft.com/office/drawing/2014/main" id="{1E9C6448-F067-47A4-9BF5-FD916857C243}"/>
               </a:ext>
             </a:extLst>
           </p:cNvPr>
           <p:cNvSpPr>
-            <a:spLocks noGrp="1"/>
-          </p:cNvSpPr>
-          <p:nvPr/>
-        </p:nvSpPr>
-        <p:spPr>
-          <a:xfrm>
+            <a:spLocks xmlns:a="http://schemas.openxmlformats.org/drawingml/2006/main" noGrp="1"/>
+          </p:cNvSpPr>
+          <p:nvPr/>
+        </p:nvSpPr>
+        <p:spPr>
+          <a:xfrm xmlns:a="http://schemas.openxmlformats.org/drawingml/2006/main">
             <a:off x="1943100" y="6124575"/>
             <a:ext cx="9344025" cy="295275"/>
           </a:xfrm>
-          <a:prstGeom prst="rect">
-            <a:avLst/>
-          </a:prstGeom>
-          <a:noFill/>
-          <a:ln w="0">
-            <a:noFill/>
-          </a:ln>
-        </p:spPr>
-        <p:txBody>
-          <a:bodyPr anchor="ctr"/>
-          <a:lstStyle/>
-          <a:p>
-            <a:pPr>
+          <a:prstGeom xmlns:a="http://schemas.openxmlformats.org/drawingml/2006/main" prst="rect">
+            <a:avLst/>
+          </a:prstGeom>
+          <a:noFill xmlns:a="http://schemas.openxmlformats.org/drawingml/2006/main"/>
+          <a:ln xmlns:a="http://schemas.openxmlformats.org/drawingml/2006/main" w="0">
+            <a:noFill/>
+          </a:ln>
+        </p:spPr>
+        <p:txBody>
+          <a:bodyPr xmlns:a="http://schemas.openxmlformats.org/drawingml/2006/main" anchor="ctr"/>
+          <a:lstStyle xmlns:a="http://schemas.openxmlformats.org/drawingml/2006/main"/>
+          <a:p xmlns:a="http://schemas.openxmlformats.org/drawingml/2006/main">
+            <a:pPr>
+              <a:buNone/>
               <a:defRPr sz="1200" b="1">
                 <a:solidFill>
                   <a:srgbClr val="FFFFFF"/>
@@ -6499,35 +6999,36 @@
       <p:sp>
         <p:nvSpPr>
           <p:cNvPr id="42" name="Rectángulo 41">
-            <a:extLst>
+            <a:extLst xmlns:a="http://schemas.openxmlformats.org/drawingml/2006/main">
               <a:ext uri="{FF2B5EF4-FFF2-40B4-BE49-F238E27FC236}">
                 <a16:creationId xmlns:a16="http://schemas.microsoft.com/office/drawing/2014/main" id="{B8673AC7-8C86-4415-B176-1DC3C9738DEF}"/>
               </a:ext>
             </a:extLst>
           </p:cNvPr>
           <p:cNvSpPr>
-            <a:spLocks noGrp="1"/>
-          </p:cNvSpPr>
-          <p:nvPr/>
-        </p:nvSpPr>
-        <p:spPr>
-          <a:xfrm>
+            <a:spLocks xmlns:a="http://schemas.openxmlformats.org/drawingml/2006/main" noGrp="1"/>
+          </p:cNvSpPr>
+          <p:nvPr/>
+        </p:nvSpPr>
+        <p:spPr>
+          <a:xfrm xmlns:a="http://schemas.openxmlformats.org/drawingml/2006/main">
             <a:off x="11334750" y="6429375"/>
             <a:ext cx="400050" cy="171450"/>
           </a:xfrm>
-          <a:prstGeom prst="rect">
-            <a:avLst/>
-          </a:prstGeom>
-          <a:noFill/>
-          <a:ln w="0">
-            <a:noFill/>
-          </a:ln>
-        </p:spPr>
-        <p:txBody>
-          <a:bodyPr anchor="ctr"/>
-          <a:lstStyle/>
-          <a:p>
-            <a:pPr>
+          <a:prstGeom xmlns:a="http://schemas.openxmlformats.org/drawingml/2006/main" prst="rect">
+            <a:avLst/>
+          </a:prstGeom>
+          <a:noFill xmlns:a="http://schemas.openxmlformats.org/drawingml/2006/main"/>
+          <a:ln xmlns:a="http://schemas.openxmlformats.org/drawingml/2006/main" w="0">
+            <a:noFill/>
+          </a:ln>
+        </p:spPr>
+        <p:txBody>
+          <a:bodyPr xmlns:a="http://schemas.openxmlformats.org/drawingml/2006/main" anchor="ctr"/>
+          <a:lstStyle xmlns:a="http://schemas.openxmlformats.org/drawingml/2006/main"/>
+          <a:p xmlns:a="http://schemas.openxmlformats.org/drawingml/2006/main">
+            <a:pPr>
+              <a:buNone/>
               <a:defRPr sz="825" b="0">
                 <a:solidFill>
                   <a:srgbClr val="B8C3C7"/>
@@ -6552,9 +7053,6 @@
       </p:ext>
     </p:extLst>
   </p:cSld>
-  <p:clrMapOvr>
-    <a:masterClrMapping/>
-  </p:clrMapOvr>
 </p:sld>
 </file>
 
@@ -6800,254 +7298,5 @@
       </a:bgFillStyleLst>
     </a:fmtScheme>
   </a:themeElements>
-  <a:objectDefaults/>
-  <a:extraClrSchemeLst/>
-</a:theme>
-</file>
-
-<file path=ppt/theme/theme2.xml><?xml version="1.0" encoding="utf-8"?>
-<a:theme xmlns:a="http://schemas.openxmlformats.org/drawingml/2006/main" name="ChatGPT">
-  <a:themeElements>
-    <a:clrScheme name="ChatGPT">
-      <a:dk1>
-        <a:srgbClr val="000000"/>
-      </a:dk1>
-      <a:lt1>
-        <a:srgbClr val="FFFFFF"/>
-      </a:lt1>
-      <a:dk2>
-        <a:srgbClr val="0E2841"/>
-      </a:dk2>
-      <a:lt2>
-        <a:srgbClr val="E8E8E8"/>
-      </a:lt2>
-      <a:accent1>
-        <a:srgbClr val="156082"/>
-      </a:accent1>
-      <a:accent2>
-        <a:srgbClr val="E97132"/>
-      </a:accent2>
-      <a:accent3>
-        <a:srgbClr val="196B24"/>
-      </a:accent3>
-      <a:accent4>
-        <a:srgbClr val="0F9ED5"/>
-      </a:accent4>
-      <a:accent5>
-        <a:srgbClr val="A02B93"/>
-      </a:accent5>
-      <a:accent6>
-        <a:srgbClr val="4EA72E"/>
-      </a:accent6>
-      <a:hlink>
-        <a:srgbClr val="467886"/>
-      </a:hlink>
-      <a:folHlink>
-        <a:srgbClr val="96607D"/>
-      </a:folHlink>
-    </a:clrScheme>
-    <a:fontScheme name="Office">
-      <a:majorFont>
-        <a:latin typeface="Calibri Light"/>
-        <a:ea typeface="Calibri Light"/>
-        <a:cs typeface="Calibri Light"/>
-      </a:majorFont>
-      <a:minorFont>
-        <a:latin typeface="Calibri"/>
-        <a:ea typeface="Calibri"/>
-        <a:cs typeface="Calibri"/>
-      </a:minorFont>
-    </a:fontScheme>
-    <a:fmtScheme name="ChatGPT">
-      <a:fillStyleLst>
-        <a:solidFill>
-          <a:schemeClr val="phClr"/>
-        </a:solidFill>
-        <a:gradFill>
-          <a:gsLst>
-            <a:gs pos="0">
-              <a:schemeClr val="phClr">
-                <a:tint val="67000"/>
-                <a:lumMod val="110000"/>
-                <a:satMod val="105000"/>
-              </a:schemeClr>
-            </a:gs>
-            <a:gs pos="50000">
-              <a:schemeClr val="phClr">
-                <a:tint val="73000"/>
-                <a:lumMod val="105000"/>
-                <a:satMod val="103000"/>
-              </a:schemeClr>
-            </a:gs>
-            <a:gs pos="100000">
-              <a:schemeClr val="phClr">
-                <a:tint val="81000"/>
-                <a:lumMod val="105000"/>
-                <a:satMod val="109000"/>
-              </a:schemeClr>
-            </a:gs>
-          </a:gsLst>
-          <a:lin ang="5400000" scaled="0"/>
-        </a:gradFill>
-        <a:gradFill>
-          <a:gsLst>
-            <a:gs pos="0">
-              <a:schemeClr val="phClr">
-                <a:tint val="94000"/>
-                <a:lumMod val="102000"/>
-                <a:satMod val="103000"/>
-              </a:schemeClr>
-            </a:gs>
-            <a:gs pos="50000">
-              <a:schemeClr val="phClr">
-                <a:shade val="100000"/>
-                <a:lumMod val="100000"/>
-                <a:satMod val="110000"/>
-              </a:schemeClr>
-            </a:gs>
-            <a:gs pos="100000">
-              <a:schemeClr val="phClr">
-                <a:shade val="78000"/>
-                <a:lumMod val="99000"/>
-                <a:satMod val="120000"/>
-              </a:schemeClr>
-            </a:gs>
-          </a:gsLst>
-          <a:lin ang="5400000" scaled="0"/>
-        </a:gradFill>
-      </a:fillStyleLst>
-      <a:lnStyleLst>
-        <a:ln w="12700">
-          <a:solidFill>
-            <a:schemeClr val="phClr"/>
-          </a:solidFill>
-          <a:prstDash val="solid"/>
-        </a:ln>
-        <a:ln w="19050">
-          <a:solidFill>
-            <a:schemeClr val="phClr"/>
-          </a:solidFill>
-          <a:prstDash val="solid"/>
-        </a:ln>
-        <a:ln w="25400">
-          <a:solidFill>
-            <a:schemeClr val="phClr"/>
-          </a:solidFill>
-          <a:prstDash val="solid"/>
-        </a:ln>
-      </a:lnStyleLst>
-      <a:effectStyleLst>
-        <a:effectStyle>
-          <a:effectLst/>
-        </a:effectStyle>
-        <a:effectStyle>
-          <a:effectLst/>
-        </a:effectStyle>
-        <a:effectStyle>
-          <a:effectLst>
-            <a:outerShdw blurRad="57150" dist="19050" dir="5400000">
-              <a:srgbClr val="000000">
-                <a:alpha val="16000"/>
-              </a:srgbClr>
-            </a:outerShdw>
-          </a:effectLst>
-        </a:effectStyle>
-        <a:effectStyle>
-          <a:effectLst>
-            <a:outerShdw blurRad="19050" dist="9525" dir="5400000">
-              <a:srgbClr val="000000">
-                <a:alpha val="6000"/>
-              </a:srgbClr>
-            </a:outerShdw>
-          </a:effectLst>
-        </a:effectStyle>
-        <a:effectStyle>
-          <a:effectLst>
-            <a:outerShdw blurRad="28575" dist="9525" dir="5400000">
-              <a:srgbClr val="000000">
-                <a:alpha val="8000"/>
-              </a:srgbClr>
-            </a:outerShdw>
-          </a:effectLst>
-        </a:effectStyle>
-        <a:effectStyle>
-          <a:effectLst>
-            <a:outerShdw blurRad="57150" dist="19050" dir="5400000">
-              <a:srgbClr val="000000">
-                <a:alpha val="10000"/>
-              </a:srgbClr>
-            </a:outerShdw>
-          </a:effectLst>
-        </a:effectStyle>
-        <a:effectStyle>
-          <a:effectLst>
-            <a:outerShdw blurRad="114300" dist="38100" dir="5400000">
-              <a:srgbClr val="000000">
-                <a:alpha val="12000"/>
-              </a:srgbClr>
-            </a:outerShdw>
-          </a:effectLst>
-        </a:effectStyle>
-        <a:effectStyle>
-          <a:effectLst>
-            <a:outerShdw blurRad="171450" dist="57150" dir="5400000">
-              <a:srgbClr val="000000">
-                <a:alpha val="16000"/>
-              </a:srgbClr>
-            </a:outerShdw>
-          </a:effectLst>
-        </a:effectStyle>
-        <a:effectStyle>
-          <a:effectLst>
-            <a:outerShdw blurRad="266700" dist="95250" dir="5400000">
-              <a:srgbClr val="000000">
-                <a:alpha val="24000"/>
-              </a:srgbClr>
-            </a:outerShdw>
-          </a:effectLst>
-        </a:effectStyle>
-      </a:effectStyleLst>
-      <a:bgFillStyleLst>
-        <a:solidFill>
-          <a:schemeClr val="phClr"/>
-        </a:solidFill>
-        <a:solidFill>
-          <a:schemeClr val="phClr">
-            <a:tint val="95000"/>
-            <a:satMod val="170000"/>
-          </a:schemeClr>
-        </a:solidFill>
-        <a:gradFill>
-          <a:gsLst>
-            <a:gs pos="0">
-              <a:schemeClr val="phClr">
-                <a:tint val="93000"/>
-                <a:shade val="98000"/>
-                <a:lumMod val="102000"/>
-                <a:satMod val="150000"/>
-              </a:schemeClr>
-            </a:gs>
-            <a:gs pos="50000">
-              <a:schemeClr val="phClr">
-                <a:tint val="98000"/>
-                <a:shade val="90000"/>
-                <a:lumMod val="103000"/>
-                <a:satMod val="130000"/>
-              </a:schemeClr>
-            </a:gs>
-            <a:gs pos="100000">
-              <a:schemeClr val="phClr">
-                <a:shade val="63000"/>
-                <a:satMod val="120000"/>
-              </a:schemeClr>
-            </a:gs>
-          </a:gsLst>
-          <a:lin ang="5400000" scaled="0"/>
-        </a:gradFill>
-      </a:bgFillStyleLst>
-    </a:fmtScheme>
-  </a:themeElements>
-  <a:objectDefaults/>
-  <a:extraClrSchemeLst/>
 </a:theme>
 </file>